--- a/docs/test/stress/e2e-outputs/income_basic_pr01.pptx
+++ b/docs/test/stress/e2e-outputs/income_basic_pr01.pptx
@@ -2315,7 +2315,7 @@
         <p:spPr>
           <a:xfrm>
             <a:off x="502920" y="3090672"/>
-            <a:ext cx="7315200" cy="365760"/>
+            <a:ext cx="7315200" cy="329184"/>
           </a:xfrm>
           <a:prstGeom prst="rect">
             <a:avLst/>
@@ -2353,7 +2353,7 @@
         </p:nvSpPr>
         <p:spPr>
           <a:xfrm>
-            <a:off x="502920" y="3685032"/>
+            <a:off x="502920" y="3639312"/>
             <a:ext cx="1097280" cy="292608"/>
           </a:xfrm>
           <a:prstGeom prst="roundRect">
@@ -2375,7 +2375,7 @@
         </p:nvSpPr>
         <p:spPr>
           <a:xfrm>
-            <a:off x="502920" y="3685032"/>
+            <a:off x="502920" y="3639312"/>
             <a:ext cx="1097280" cy="292608"/>
           </a:xfrm>
           <a:prstGeom prst="rect">
@@ -2414,7 +2414,7 @@
         </p:nvSpPr>
         <p:spPr>
           <a:xfrm>
-            <a:off x="1691640" y="3685032"/>
+            <a:off x="1691640" y="3639312"/>
             <a:ext cx="1005840" cy="292608"/>
           </a:xfrm>
           <a:prstGeom prst="roundRect">
@@ -2436,7 +2436,7 @@
         </p:nvSpPr>
         <p:spPr>
           <a:xfrm>
-            <a:off x="1691640" y="3685032"/>
+            <a:off x="1691640" y="3639312"/>
             <a:ext cx="1005840" cy="292608"/>
           </a:xfrm>
           <a:prstGeom prst="rect">
@@ -2475,7 +2475,7 @@
         </p:nvSpPr>
         <p:spPr>
           <a:xfrm>
-            <a:off x="502920" y="4187952"/>
+            <a:off x="502920" y="4078224"/>
             <a:ext cx="6858000" cy="1051560"/>
           </a:xfrm>
           <a:prstGeom prst="roundRect">
@@ -2502,7 +2502,7 @@
         </p:nvSpPr>
         <p:spPr>
           <a:xfrm>
-            <a:off x="758952" y="4297680"/>
+            <a:off x="758952" y="4187952"/>
             <a:ext cx="6345936" cy="832104"/>
           </a:xfrm>
           <a:prstGeom prst="rect">
@@ -2644,7 +2644,7 @@
                 <a:ea typeface="Pretendard" pitchFamily="34" charset="-122"/>
                 <a:cs typeface="Pretendard" pitchFamily="34" charset="-120"/>
               </a:rPr>
-              <a:t>크리딜   |   </a:t>
+              <a:t>크리딜</a:t>
             </a:r>
             <a:endParaRPr lang="en-US" sz="800" dirty="0"/>
           </a:p>
@@ -2999,7 +2999,7 @@
                 <a:ea typeface="Pretendard" pitchFamily="34" charset="-122"/>
                 <a:cs typeface="Pretendard" pitchFamily="34" charset="-120"/>
               </a:rPr>
-              <a:t>크리딜   |   </a:t>
+              <a:t>크리딜</a:t>
             </a:r>
             <a:endParaRPr lang="en-US" sz="800" dirty="0"/>
           </a:p>
@@ -3656,7 +3656,7 @@
                 <a:ea typeface="Pretendard" pitchFamily="34" charset="-122"/>
                 <a:cs typeface="Pretendard" pitchFamily="34" charset="-120"/>
               </a:rPr>
-              <a:t>크리딜   |   </a:t>
+              <a:t>크리딜</a:t>
             </a:r>
             <a:endParaRPr lang="en-US" sz="800" dirty="0"/>
           </a:p>
@@ -3918,7 +3918,7 @@
         <p:spPr>
           <a:xfrm>
             <a:off x="502920" y="1719072"/>
-            <a:ext cx="5368900" cy="868680"/>
+            <a:ext cx="5368900" cy="749808"/>
           </a:xfrm>
           <a:prstGeom prst="rect">
             <a:avLst/>
@@ -3942,8 +3942,8 @@
         </p:nvSpPr>
         <p:spPr>
           <a:xfrm>
-            <a:off x="640080" y="1883664"/>
-            <a:ext cx="320040" cy="320040"/>
+            <a:off x="640080" y="1947672"/>
+            <a:ext cx="292608" cy="292608"/>
           </a:xfrm>
           <a:prstGeom prst="rect">
             <a:avLst/>
@@ -3962,8 +3962,8 @@
         </p:nvSpPr>
         <p:spPr>
           <a:xfrm>
-            <a:off x="640080" y="1883664"/>
-            <a:ext cx="320040" cy="320040"/>
+            <a:off x="640080" y="1947672"/>
+            <a:ext cx="292608" cy="292608"/>
           </a:xfrm>
           <a:prstGeom prst="rect">
             <a:avLst/>
@@ -3979,7 +3979,7 @@
               <a:buNone/>
             </a:pPr>
             <a:r>
-              <a:rPr lang="en-US" sz="1100" b="1" dirty="0">
+              <a:rPr lang="en-US" sz="1050" b="1" dirty="0">
                 <a:solidFill>
                   <a:srgbClr val="FFFFFF"/>
                 </a:solidFill>
@@ -3989,7 +3989,7 @@
               </a:rPr>
               <a:t>✓</a:t>
             </a:r>
-            <a:endParaRPr lang="en-US" sz="1100" dirty="0"/>
+            <a:endParaRPr lang="en-US" sz="1050" dirty="0"/>
           </a:p>
         </p:txBody>
       </p:sp>
@@ -4001,8 +4001,8 @@
         </p:nvSpPr>
         <p:spPr>
           <a:xfrm>
-            <a:off x="1051560" y="1810512"/>
-            <a:ext cx="4683100" cy="722376"/>
+            <a:off x="1033272" y="1792224"/>
+            <a:ext cx="4710532" cy="603504"/>
           </a:xfrm>
           <a:prstGeom prst="rect">
             <a:avLst/>
@@ -4043,8 +4043,8 @@
         </p:nvSpPr>
         <p:spPr>
           <a:xfrm>
-            <a:off x="502920" y="2715768"/>
-            <a:ext cx="5368900" cy="868680"/>
+            <a:off x="502920" y="2542032"/>
+            <a:ext cx="5368900" cy="749808"/>
           </a:xfrm>
           <a:prstGeom prst="rect">
             <a:avLst/>
@@ -4068,8 +4068,8 @@
         </p:nvSpPr>
         <p:spPr>
           <a:xfrm>
-            <a:off x="640080" y="2880360"/>
-            <a:ext cx="320040" cy="320040"/>
+            <a:off x="640080" y="2770632"/>
+            <a:ext cx="292608" cy="292608"/>
           </a:xfrm>
           <a:prstGeom prst="rect">
             <a:avLst/>
@@ -4088,8 +4088,8 @@
         </p:nvSpPr>
         <p:spPr>
           <a:xfrm>
-            <a:off x="640080" y="2880360"/>
-            <a:ext cx="320040" cy="320040"/>
+            <a:off x="640080" y="2770632"/>
+            <a:ext cx="292608" cy="292608"/>
           </a:xfrm>
           <a:prstGeom prst="rect">
             <a:avLst/>
@@ -4105,7 +4105,7 @@
               <a:buNone/>
             </a:pPr>
             <a:r>
-              <a:rPr lang="en-US" sz="1100" b="1" dirty="0">
+              <a:rPr lang="en-US" sz="1050" b="1" dirty="0">
                 <a:solidFill>
                   <a:srgbClr val="FFFFFF"/>
                 </a:solidFill>
@@ -4115,7 +4115,7 @@
               </a:rPr>
               <a:t>✓</a:t>
             </a:r>
-            <a:endParaRPr lang="en-US" sz="1100" dirty="0"/>
+            <a:endParaRPr lang="en-US" sz="1050" dirty="0"/>
           </a:p>
         </p:txBody>
       </p:sp>
@@ -4127,8 +4127,8 @@
         </p:nvSpPr>
         <p:spPr>
           <a:xfrm>
-            <a:off x="1051560" y="2807208"/>
-            <a:ext cx="4683100" cy="722376"/>
+            <a:off x="1033272" y="2615184"/>
+            <a:ext cx="4710532" cy="603504"/>
           </a:xfrm>
           <a:prstGeom prst="rect">
             <a:avLst/>
@@ -4169,8 +4169,8 @@
         </p:nvSpPr>
         <p:spPr>
           <a:xfrm>
-            <a:off x="502920" y="3712464"/>
-            <a:ext cx="5368900" cy="868680"/>
+            <a:off x="502920" y="3364992"/>
+            <a:ext cx="5368900" cy="749808"/>
           </a:xfrm>
           <a:prstGeom prst="rect">
             <a:avLst/>
@@ -4194,8 +4194,8 @@
         </p:nvSpPr>
         <p:spPr>
           <a:xfrm>
-            <a:off x="640080" y="3877056"/>
-            <a:ext cx="320040" cy="320040"/>
+            <a:off x="640080" y="3593592"/>
+            <a:ext cx="292608" cy="292608"/>
           </a:xfrm>
           <a:prstGeom prst="rect">
             <a:avLst/>
@@ -4214,8 +4214,8 @@
         </p:nvSpPr>
         <p:spPr>
           <a:xfrm>
-            <a:off x="640080" y="3877056"/>
-            <a:ext cx="320040" cy="320040"/>
+            <a:off x="640080" y="3593592"/>
+            <a:ext cx="292608" cy="292608"/>
           </a:xfrm>
           <a:prstGeom prst="rect">
             <a:avLst/>
@@ -4231,7 +4231,7 @@
               <a:buNone/>
             </a:pPr>
             <a:r>
-              <a:rPr lang="en-US" sz="1100" b="1" dirty="0">
+              <a:rPr lang="en-US" sz="1050" b="1" dirty="0">
                 <a:solidFill>
                   <a:srgbClr val="FFFFFF"/>
                 </a:solidFill>
@@ -4241,7 +4241,7 @@
               </a:rPr>
               <a:t>✓</a:t>
             </a:r>
-            <a:endParaRPr lang="en-US" sz="1100" dirty="0"/>
+            <a:endParaRPr lang="en-US" sz="1050" dirty="0"/>
           </a:p>
         </p:txBody>
       </p:sp>
@@ -4253,8 +4253,8 @@
         </p:nvSpPr>
         <p:spPr>
           <a:xfrm>
-            <a:off x="1051560" y="3803904"/>
-            <a:ext cx="4683100" cy="722376"/>
+            <a:off x="1033272" y="3438144"/>
+            <a:ext cx="4710532" cy="603504"/>
           </a:xfrm>
           <a:prstGeom prst="rect">
             <a:avLst/>
@@ -4296,7 +4296,7 @@
         <p:spPr>
           <a:xfrm>
             <a:off x="6191860" y="1719072"/>
-            <a:ext cx="5368900" cy="868680"/>
+            <a:ext cx="5368900" cy="749808"/>
           </a:xfrm>
           <a:prstGeom prst="rect">
             <a:avLst/>
@@ -4320,8 +4320,8 @@
         </p:nvSpPr>
         <p:spPr>
           <a:xfrm>
-            <a:off x="6329020" y="1883664"/>
-            <a:ext cx="320040" cy="320040"/>
+            <a:off x="6329020" y="1947672"/>
+            <a:ext cx="292608" cy="292608"/>
           </a:xfrm>
           <a:prstGeom prst="rect">
             <a:avLst/>
@@ -4340,8 +4340,8 @@
         </p:nvSpPr>
         <p:spPr>
           <a:xfrm>
-            <a:off x="6329020" y="1883664"/>
-            <a:ext cx="320040" cy="320040"/>
+            <a:off x="6329020" y="1947672"/>
+            <a:ext cx="292608" cy="292608"/>
           </a:xfrm>
           <a:prstGeom prst="rect">
             <a:avLst/>
@@ -4357,7 +4357,7 @@
               <a:buNone/>
             </a:pPr>
             <a:r>
-              <a:rPr lang="en-US" sz="1100" b="1" dirty="0">
+              <a:rPr lang="en-US" sz="1050" b="1" dirty="0">
                 <a:solidFill>
                   <a:srgbClr val="FFFFFF"/>
                 </a:solidFill>
@@ -4367,7 +4367,7 @@
               </a:rPr>
               <a:t>✓</a:t>
             </a:r>
-            <a:endParaRPr lang="en-US" sz="1100" dirty="0"/>
+            <a:endParaRPr lang="en-US" sz="1050" dirty="0"/>
           </a:p>
         </p:txBody>
       </p:sp>
@@ -4379,8 +4379,8 @@
         </p:nvSpPr>
         <p:spPr>
           <a:xfrm>
-            <a:off x="6740500" y="1810512"/>
-            <a:ext cx="4683100" cy="722376"/>
+            <a:off x="6722212" y="1792224"/>
+            <a:ext cx="4710532" cy="603504"/>
           </a:xfrm>
           <a:prstGeom prst="rect">
             <a:avLst/>
@@ -4421,8 +4421,8 @@
         </p:nvSpPr>
         <p:spPr>
           <a:xfrm>
-            <a:off x="6191860" y="2715768"/>
-            <a:ext cx="5368900" cy="868680"/>
+            <a:off x="6191860" y="2542032"/>
+            <a:ext cx="5368900" cy="749808"/>
           </a:xfrm>
           <a:prstGeom prst="rect">
             <a:avLst/>
@@ -4446,8 +4446,8 @@
         </p:nvSpPr>
         <p:spPr>
           <a:xfrm>
-            <a:off x="6329020" y="2880360"/>
-            <a:ext cx="320040" cy="320040"/>
+            <a:off x="6329020" y="2770632"/>
+            <a:ext cx="292608" cy="292608"/>
           </a:xfrm>
           <a:prstGeom prst="rect">
             <a:avLst/>
@@ -4466,8 +4466,8 @@
         </p:nvSpPr>
         <p:spPr>
           <a:xfrm>
-            <a:off x="6329020" y="2880360"/>
-            <a:ext cx="320040" cy="320040"/>
+            <a:off x="6329020" y="2770632"/>
+            <a:ext cx="292608" cy="292608"/>
           </a:xfrm>
           <a:prstGeom prst="rect">
             <a:avLst/>
@@ -4483,7 +4483,7 @@
               <a:buNone/>
             </a:pPr>
             <a:r>
-              <a:rPr lang="en-US" sz="1100" b="1" dirty="0">
+              <a:rPr lang="en-US" sz="1050" b="1" dirty="0">
                 <a:solidFill>
                   <a:srgbClr val="FFFFFF"/>
                 </a:solidFill>
@@ -4493,7 +4493,7 @@
               </a:rPr>
               <a:t>✓</a:t>
             </a:r>
-            <a:endParaRPr lang="en-US" sz="1100" dirty="0"/>
+            <a:endParaRPr lang="en-US" sz="1050" dirty="0"/>
           </a:p>
         </p:txBody>
       </p:sp>
@@ -4505,8 +4505,8 @@
         </p:nvSpPr>
         <p:spPr>
           <a:xfrm>
-            <a:off x="6740500" y="2807208"/>
-            <a:ext cx="4683100" cy="722376"/>
+            <a:off x="6722212" y="2615184"/>
+            <a:ext cx="4710532" cy="603504"/>
           </a:xfrm>
           <a:prstGeom prst="rect">
             <a:avLst/>
@@ -4547,8 +4547,8 @@
         </p:nvSpPr>
         <p:spPr>
           <a:xfrm>
-            <a:off x="6191860" y="3712464"/>
-            <a:ext cx="5368900" cy="868680"/>
+            <a:off x="6191860" y="3364992"/>
+            <a:ext cx="5368900" cy="749808"/>
           </a:xfrm>
           <a:prstGeom prst="rect">
             <a:avLst/>
@@ -4572,8 +4572,8 @@
         </p:nvSpPr>
         <p:spPr>
           <a:xfrm>
-            <a:off x="6329020" y="3877056"/>
-            <a:ext cx="320040" cy="320040"/>
+            <a:off x="6329020" y="3593592"/>
+            <a:ext cx="292608" cy="292608"/>
           </a:xfrm>
           <a:prstGeom prst="rect">
             <a:avLst/>
@@ -4592,8 +4592,8 @@
         </p:nvSpPr>
         <p:spPr>
           <a:xfrm>
-            <a:off x="6329020" y="3877056"/>
-            <a:ext cx="320040" cy="320040"/>
+            <a:off x="6329020" y="3593592"/>
+            <a:ext cx="292608" cy="292608"/>
           </a:xfrm>
           <a:prstGeom prst="rect">
             <a:avLst/>
@@ -4609,7 +4609,7 @@
               <a:buNone/>
             </a:pPr>
             <a:r>
-              <a:rPr lang="en-US" sz="1100" b="1" dirty="0">
+              <a:rPr lang="en-US" sz="1050" b="1" dirty="0">
                 <a:solidFill>
                   <a:srgbClr val="FFFFFF"/>
                 </a:solidFill>
@@ -4619,7 +4619,7 @@
               </a:rPr>
               <a:t>✓</a:t>
             </a:r>
-            <a:endParaRPr lang="en-US" sz="1100" dirty="0"/>
+            <a:endParaRPr lang="en-US" sz="1050" dirty="0"/>
           </a:p>
         </p:txBody>
       </p:sp>
@@ -4631,8 +4631,8 @@
         </p:nvSpPr>
         <p:spPr>
           <a:xfrm>
-            <a:off x="6740500" y="3803904"/>
-            <a:ext cx="4683100" cy="722376"/>
+            <a:off x="6722212" y="3438144"/>
+            <a:ext cx="4710532" cy="603504"/>
           </a:xfrm>
           <a:prstGeom prst="rect">
             <a:avLst/>
@@ -4757,7 +4757,7 @@
                 <a:ea typeface="Pretendard" pitchFamily="34" charset="-122"/>
                 <a:cs typeface="Pretendard" pitchFamily="34" charset="-120"/>
               </a:rPr>
-              <a:t>크리딜   |   </a:t>
+              <a:t>크리딜</a:t>
             </a:r>
             <a:endParaRPr lang="en-US" sz="800" dirty="0"/>
           </a:p>
@@ -5185,7 +5185,7 @@
                 <a:ea typeface="Pretendard" pitchFamily="34" charset="-122"/>
                 <a:cs typeface="Pretendard" pitchFamily="34" charset="-120"/>
               </a:rPr>
-              <a:t>크리딜   |   </a:t>
+              <a:t>크리딜</a:t>
             </a:r>
             <a:endParaRPr lang="en-US" sz="800" dirty="0"/>
           </a:p>
@@ -6688,7 +6688,7 @@
                 <a:ea typeface="Pretendard" pitchFamily="34" charset="-122"/>
                 <a:cs typeface="Pretendard" pitchFamily="34" charset="-120"/>
               </a:rPr>
-              <a:t>크리딜   |   </a:t>
+              <a:t>크리딜</a:t>
             </a:r>
             <a:endParaRPr lang="en-US" sz="800" dirty="0"/>
           </a:p>
@@ -7054,10 +7054,13 @@
           <a:lstStyle/>
           <a:p>
             <a:pPr indent="0" marL="0">
-              <a:buNone/>
-            </a:pPr>
-            <a:r>
-              <a:rPr lang="en-US" sz="1700" b="1" dirty="0">
+              <a:lnSpc>
+                <a:spcPct val="100000"/>
+              </a:lnSpc>
+              <a:buNone/>
+            </a:pPr>
+            <a:r>
+              <a:rPr lang="en-US" sz="2200" b="1" dirty="0">
                 <a:solidFill>
                   <a:srgbClr val="10161F"/>
                 </a:solidFill>
@@ -7067,7 +7070,7 @@
               </a:rPr>
               <a:t>-</a:t>
             </a:r>
-            <a:endParaRPr lang="en-US" sz="1700" dirty="0"/>
+            <a:endParaRPr lang="en-US" sz="2200" dirty="0"/>
           </a:p>
         </p:txBody>
       </p:sp>
@@ -7161,10 +7164,13 @@
           <a:lstStyle/>
           <a:p>
             <a:pPr indent="0" marL="0">
-              <a:buNone/>
-            </a:pPr>
-            <a:r>
-              <a:rPr lang="en-US" sz="1700" b="1" dirty="0">
+              <a:lnSpc>
+                <a:spcPct val="100000"/>
+              </a:lnSpc>
+              <a:buNone/>
+            </a:pPr>
+            <a:r>
+              <a:rPr lang="en-US" sz="2200" b="1" dirty="0">
                 <a:solidFill>
                   <a:srgbClr val="10161F"/>
                 </a:solidFill>
@@ -7174,7 +7180,7 @@
               </a:rPr>
               <a:t>142.5평</a:t>
             </a:r>
-            <a:endParaRPr lang="en-US" sz="1700" dirty="0"/>
+            <a:endParaRPr lang="en-US" sz="2200" dirty="0"/>
           </a:p>
         </p:txBody>
       </p:sp>
@@ -7268,10 +7274,13 @@
           <a:lstStyle/>
           <a:p>
             <a:pPr indent="0" marL="0">
-              <a:buNone/>
-            </a:pPr>
-            <a:r>
-              <a:rPr lang="en-US" sz="1700" b="1" dirty="0">
+              <a:lnSpc>
+                <a:spcPct val="100000"/>
+              </a:lnSpc>
+              <a:buNone/>
+            </a:pPr>
+            <a:r>
+              <a:rPr lang="en-US" sz="2200" b="1" dirty="0">
                 <a:solidFill>
                   <a:srgbClr val="10161F"/>
                 </a:solidFill>
@@ -7281,7 +7290,7 @@
               </a:rPr>
               <a:t>620.8평</a:t>
             </a:r>
-            <a:endParaRPr lang="en-US" sz="1700" dirty="0"/>
+            <a:endParaRPr lang="en-US" sz="2200" dirty="0"/>
           </a:p>
         </p:txBody>
       </p:sp>
@@ -7375,10 +7384,13 @@
           <a:lstStyle/>
           <a:p>
             <a:pPr indent="0" marL="0">
-              <a:buNone/>
-            </a:pPr>
-            <a:r>
-              <a:rPr lang="en-US" sz="1700" b="1" dirty="0">
+              <a:lnSpc>
+                <a:spcPct val="100000"/>
+              </a:lnSpc>
+              <a:buNone/>
+            </a:pPr>
+            <a:r>
+              <a:rPr lang="en-US" sz="2200" b="1" dirty="0">
                 <a:solidFill>
                   <a:srgbClr val="10161F"/>
                 </a:solidFill>
@@ -7388,7 +7400,7 @@
               </a:rPr>
               <a:t>2017년</a:t>
             </a:r>
-            <a:endParaRPr lang="en-US" sz="1700" dirty="0"/>
+            <a:endParaRPr lang="en-US" sz="2200" dirty="0"/>
           </a:p>
         </p:txBody>
       </p:sp>
@@ -7444,7 +7456,7 @@
               <a:buNone/>
             </a:pPr>
             <a:r>
-              <a:rPr lang="en-US" sz="950" dirty="0">
+              <a:rPr lang="en-US" sz="850" dirty="0">
                 <a:solidFill>
                   <a:srgbClr val="718096"/>
                 </a:solidFill>
@@ -7454,7 +7466,7 @@
               </a:rPr>
               <a:t>서초 메디컬 빌딩은 지하2</a:t>
             </a:r>
-            <a:endParaRPr lang="en-US" sz="950" dirty="0"/>
+            <a:endParaRPr lang="en-US" sz="850" dirty="0"/>
           </a:p>
         </p:txBody>
       </p:sp>
@@ -7482,10 +7494,13 @@
           <a:lstStyle/>
           <a:p>
             <a:pPr indent="0" marL="0">
-              <a:buNone/>
-            </a:pPr>
-            <a:r>
-              <a:rPr lang="en-US" sz="1700" b="1" dirty="0">
+              <a:lnSpc>
+                <a:spcPct val="100000"/>
+              </a:lnSpc>
+              <a:buNone/>
+            </a:pPr>
+            <a:r>
+              <a:rPr lang="en-US" sz="2200" b="1" dirty="0">
                 <a:solidFill>
                   <a:srgbClr val="10161F"/>
                 </a:solidFill>
@@ -7495,7 +7510,7 @@
               </a:rPr>
               <a:t>2층</a:t>
             </a:r>
-            <a:endParaRPr lang="en-US" sz="1700" dirty="0"/>
+            <a:endParaRPr lang="en-US" sz="2200" dirty="0"/>
           </a:p>
         </p:txBody>
       </p:sp>
@@ -7551,7 +7566,7 @@
               <a:buNone/>
             </a:pPr>
             <a:r>
-              <a:rPr lang="en-US" sz="950" dirty="0">
+              <a:rPr lang="en-US" sz="850" dirty="0">
                 <a:solidFill>
                   <a:srgbClr val="718096"/>
                 </a:solidFill>
@@ -7561,7 +7576,7 @@
               </a:rPr>
               <a:t>연 수익률(Cap Rate)</a:t>
             </a:r>
-            <a:endParaRPr lang="en-US" sz="950" dirty="0"/>
+            <a:endParaRPr lang="en-US" sz="850" dirty="0"/>
           </a:p>
         </p:txBody>
       </p:sp>
@@ -7589,10 +7604,13 @@
           <a:lstStyle/>
           <a:p>
             <a:pPr indent="0" marL="0">
-              <a:buNone/>
-            </a:pPr>
-            <a:r>
-              <a:rPr lang="en-US" sz="1700" b="1" dirty="0">
+              <a:lnSpc>
+                <a:spcPct val="100000"/>
+              </a:lnSpc>
+              <a:buNone/>
+            </a:pPr>
+            <a:r>
+              <a:rPr lang="en-US" sz="2200" b="1" dirty="0">
                 <a:solidFill>
                   <a:srgbClr val="10161F"/>
                 </a:solidFill>
@@ -7602,7 +7620,7 @@
               </a:rPr>
               <a:t>-</a:t>
             </a:r>
-            <a:endParaRPr lang="en-US" sz="1700" dirty="0"/>
+            <a:endParaRPr lang="en-US" sz="2200" dirty="0"/>
           </a:p>
         </p:txBody>
       </p:sp>
@@ -7696,10 +7714,13 @@
           <a:lstStyle/>
           <a:p>
             <a:pPr indent="0" marL="0">
-              <a:buNone/>
-            </a:pPr>
-            <a:r>
-              <a:rPr lang="en-US" sz="1700" b="1" dirty="0">
+              <a:lnSpc>
+                <a:spcPct val="100000"/>
+              </a:lnSpc>
+              <a:buNone/>
+            </a:pPr>
+            <a:r>
+              <a:rPr lang="en-US" sz="2200" b="1" dirty="0">
                 <a:solidFill>
                   <a:srgbClr val="10161F"/>
                 </a:solidFill>
@@ -7709,7 +7730,7 @@
               </a:rPr>
               <a:t>-</a:t>
             </a:r>
-            <a:endParaRPr lang="en-US" sz="1700" dirty="0"/>
+            <a:endParaRPr lang="en-US" sz="2200" dirty="0"/>
           </a:p>
         </p:txBody>
       </p:sp>
@@ -7803,10 +7824,13 @@
           <a:lstStyle/>
           <a:p>
             <a:pPr indent="0" marL="0">
-              <a:buNone/>
-            </a:pPr>
-            <a:r>
-              <a:rPr lang="en-US" sz="1700" b="1" dirty="0">
+              <a:lnSpc>
+                <a:spcPct val="100000"/>
+              </a:lnSpc>
+              <a:buNone/>
+            </a:pPr>
+            <a:r>
+              <a:rPr lang="en-US" sz="2200" b="1" dirty="0">
                 <a:solidFill>
                   <a:srgbClr val="10161F"/>
                 </a:solidFill>
@@ -7816,7 +7840,7 @@
               </a:rPr>
               <a:t>확인 중</a:t>
             </a:r>
-            <a:endParaRPr lang="en-US" sz="1700" dirty="0"/>
+            <a:endParaRPr lang="en-US" sz="2200" dirty="0"/>
           </a:p>
         </p:txBody>
       </p:sp>
@@ -8288,7 +8312,7 @@
                 <a:ea typeface="Pretendard" pitchFamily="34" charset="-122"/>
                 <a:cs typeface="Pretendard" pitchFamily="34" charset="-120"/>
               </a:rPr>
-              <a:t>크리딜   |   </a:t>
+              <a:t>크리딜</a:t>
             </a:r>
             <a:endParaRPr lang="en-US" sz="800" dirty="0"/>
           </a:p>
@@ -8535,7 +8559,7 @@
         <p:spPr>
           <a:xfrm>
             <a:off x="5989320" y="1481328"/>
-            <a:ext cx="1560003" cy="493776"/>
+            <a:ext cx="1560003" cy="457200"/>
           </a:xfrm>
           <a:prstGeom prst="rect">
             <a:avLst/>
@@ -8554,7 +8578,7 @@
               <a:buNone/>
             </a:pPr>
             <a:r>
-              <a:rPr lang="en-US" sz="1300" dirty="0">
+              <a:rPr lang="en-US" sz="1250" dirty="0">
                 <a:solidFill>
                   <a:srgbClr val="718096"/>
                 </a:solidFill>
@@ -8564,7 +8588,7 @@
               </a:rPr>
               <a:t>대중교통</a:t>
             </a:r>
-            <a:endParaRPr lang="en-US" sz="1300" dirty="0"/>
+            <a:endParaRPr lang="en-US" sz="1250" dirty="0"/>
           </a:p>
         </p:txBody>
       </p:sp>
@@ -8577,7 +8601,7 @@
         <p:spPr>
           <a:xfrm>
             <a:off x="7549323" y="1481328"/>
-            <a:ext cx="4011436" cy="493776"/>
+            <a:ext cx="4011436" cy="457200"/>
           </a:xfrm>
           <a:prstGeom prst="rect">
             <a:avLst/>
@@ -8596,7 +8620,7 @@
               <a:buNone/>
             </a:pPr>
             <a:r>
-              <a:rPr lang="en-US" sz="1300" b="1" dirty="0">
+              <a:rPr lang="en-US" sz="1250" b="1" dirty="0">
                 <a:solidFill>
                   <a:srgbClr val="10161F"/>
                 </a:solidFill>
@@ -8604,9 +8628,9 @@
                 <a:ea typeface="Pretendard" pitchFamily="34" charset="-122"/>
                 <a:cs typeface="Pretendard" pitchFamily="34" charset="-120"/>
               </a:rPr>
-              <a:t>인접 지하철역 역세권 (상세 확인 필요)</a:t>
-            </a:r>
-            <a:endParaRPr lang="en-US" sz="1300" dirty="0"/>
+              <a:t>지하철 및 간선버스 인접</a:t>
+            </a:r>
+            <a:endParaRPr lang="en-US" sz="1250" dirty="0"/>
           </a:p>
         </p:txBody>
       </p:sp>
@@ -8618,7 +8642,7 @@
         </p:nvSpPr>
         <p:spPr>
           <a:xfrm>
-            <a:off x="5989320" y="1975104"/>
+            <a:off x="5989320" y="1938528"/>
             <a:ext cx="5571439" cy="0"/>
           </a:xfrm>
           <a:prstGeom prst="line">
@@ -8641,8 +8665,8 @@
         </p:nvSpPr>
         <p:spPr>
           <a:xfrm>
-            <a:off x="5989320" y="1975104"/>
-            <a:ext cx="1560003" cy="493776"/>
+            <a:off x="5989320" y="1938528"/>
+            <a:ext cx="1560003" cy="457200"/>
           </a:xfrm>
           <a:prstGeom prst="rect">
             <a:avLst/>
@@ -8661,7 +8685,7 @@
               <a:buNone/>
             </a:pPr>
             <a:r>
-              <a:rPr lang="en-US" sz="1300" dirty="0">
+              <a:rPr lang="en-US" sz="1250" dirty="0">
                 <a:solidFill>
                   <a:srgbClr val="718096"/>
                 </a:solidFill>
@@ -8671,7 +8695,7 @@
               </a:rPr>
               <a:t>상권권역</a:t>
             </a:r>
-            <a:endParaRPr lang="en-US" sz="1300" dirty="0"/>
+            <a:endParaRPr lang="en-US" sz="1250" dirty="0"/>
           </a:p>
         </p:txBody>
       </p:sp>
@@ -8683,8 +8707,8 @@
         </p:nvSpPr>
         <p:spPr>
           <a:xfrm>
-            <a:off x="7549323" y="1975104"/>
-            <a:ext cx="4011436" cy="493776"/>
+            <a:off x="7549323" y="1938528"/>
+            <a:ext cx="4011436" cy="457200"/>
           </a:xfrm>
           <a:prstGeom prst="rect">
             <a:avLst/>
@@ -8703,7 +8727,7 @@
               <a:buNone/>
             </a:pPr>
             <a:r>
-              <a:rPr lang="en-US" sz="1300" b="1" dirty="0">
+              <a:rPr lang="en-US" sz="1250" b="1" dirty="0">
                 <a:solidFill>
                   <a:srgbClr val="10161F"/>
                 </a:solidFill>
@@ -8713,7 +8737,7 @@
               </a:rPr>
               <a:t>서초권역 주요 상업·업무 권역</a:t>
             </a:r>
-            <a:endParaRPr lang="en-US" sz="1300" dirty="0"/>
+            <a:endParaRPr lang="en-US" sz="1250" dirty="0"/>
           </a:p>
         </p:txBody>
       </p:sp>
@@ -8725,7 +8749,7 @@
         </p:nvSpPr>
         <p:spPr>
           <a:xfrm>
-            <a:off x="5989320" y="2606040"/>
+            <a:off x="5989320" y="2505456"/>
             <a:ext cx="5571439" cy="658368"/>
           </a:xfrm>
           <a:prstGeom prst="roundRect">
@@ -8747,7 +8771,7 @@
         </p:nvSpPr>
         <p:spPr>
           <a:xfrm>
-            <a:off x="5989320" y="2660904"/>
+            <a:off x="5989320" y="2560320"/>
             <a:ext cx="36576" cy="548640"/>
           </a:xfrm>
           <a:prstGeom prst="rect">
@@ -8767,7 +8791,7 @@
         </p:nvSpPr>
         <p:spPr>
           <a:xfrm>
-            <a:off x="6135624" y="2697480"/>
+            <a:off x="6135624" y="2596896"/>
             <a:ext cx="5315407" cy="201168"/>
           </a:xfrm>
           <a:prstGeom prst="rect">
@@ -8806,7 +8830,7 @@
         </p:nvSpPr>
         <p:spPr>
           <a:xfrm>
-            <a:off x="6135624" y="2898648"/>
+            <a:off x="6135624" y="2798064"/>
             <a:ext cx="5315407" cy="329184"/>
           </a:xfrm>
           <a:prstGeom prst="rect">
@@ -8874,7 +8898,7 @@
                 <a:ea typeface="Pretendard" pitchFamily="34" charset="-122"/>
                 <a:cs typeface="Pretendard" pitchFamily="34" charset="-120"/>
               </a:rPr>
-              <a:t>크리딜   |   </a:t>
+              <a:t>크리딜</a:t>
             </a:r>
             <a:endParaRPr lang="en-US" sz="800" dirty="0"/>
           </a:p>
@@ -9136,7 +9160,7 @@
         <p:spPr>
           <a:xfrm>
             <a:off x="502920" y="1645920"/>
-            <a:ext cx="1920240" cy="420624"/>
+            <a:ext cx="1920240" cy="402336"/>
           </a:xfrm>
           <a:prstGeom prst="rect">
             <a:avLst/>
@@ -9178,7 +9202,7 @@
         <p:spPr>
           <a:xfrm>
             <a:off x="2423160" y="1645920"/>
-            <a:ext cx="4937760" cy="420624"/>
+            <a:ext cx="4937760" cy="402336"/>
           </a:xfrm>
           <a:prstGeom prst="rect">
             <a:avLst/>
@@ -9219,7 +9243,7 @@
         </p:nvSpPr>
         <p:spPr>
           <a:xfrm>
-            <a:off x="502920" y="2066544"/>
+            <a:off x="502920" y="2048256"/>
             <a:ext cx="6858000" cy="0"/>
           </a:xfrm>
           <a:prstGeom prst="line">
@@ -9242,8 +9266,8 @@
         </p:nvSpPr>
         <p:spPr>
           <a:xfrm>
-            <a:off x="502920" y="2066544"/>
-            <a:ext cx="1920240" cy="420624"/>
+            <a:off x="502920" y="2048256"/>
+            <a:ext cx="1920240" cy="402336"/>
           </a:xfrm>
           <a:prstGeom prst="rect">
             <a:avLst/>
@@ -9284,8 +9308,8 @@
         </p:nvSpPr>
         <p:spPr>
           <a:xfrm>
-            <a:off x="2423160" y="2066544"/>
-            <a:ext cx="4937760" cy="420624"/>
+            <a:off x="2423160" y="2048256"/>
+            <a:ext cx="4937760" cy="402336"/>
           </a:xfrm>
           <a:prstGeom prst="rect">
             <a:avLst/>
@@ -9416,7 +9440,7 @@
                 <a:ea typeface="Pretendard" pitchFamily="34" charset="-122"/>
                 <a:cs typeface="Pretendard" pitchFamily="34" charset="-120"/>
               </a:rPr>
-              <a:t>토지 및 건축 규제 포인트</a:t>
+              <a:t>토지 및 건축 규제</a:t>
             </a:r>
             <a:endParaRPr lang="en-US" sz="1050" dirty="0"/>
           </a:p>
@@ -9459,7 +9483,131 @@
                 <a:ea typeface="Pretendard" pitchFamily="34" charset="-122"/>
                 <a:cs typeface="Pretendard" pitchFamily="34" charset="-120"/>
               </a:rPr>
-              <a:t>용도지역·용도지구 기준 건폐율/용적률 상한 확인</a:t>
+              <a:t>토지이용계획 열람 및 건축 규제 확인 필요</a:t>
+            </a:r>
+            <a:endParaRPr lang="en-US" sz="980" dirty="0"/>
+          </a:p>
+        </p:txBody>
+      </p:sp>
+      <p:sp>
+        <p:nvSpPr>
+          <p:cNvPr id="17" name="Shape 15"/>
+          <p:cNvSpPr/>
+          <p:nvPr/>
+        </p:nvSpPr>
+        <p:spPr>
+          <a:xfrm>
+            <a:off x="7720279" y="3977640"/>
+            <a:ext cx="3840480" cy="2148840"/>
+          </a:xfrm>
+          <a:prstGeom prst="roundRect">
+            <a:avLst>
+              <a:gd name="adj" fmla="val 2553"/>
+            </a:avLst>
+          </a:prstGeom>
+          <a:solidFill>
+            <a:srgbClr val="BEE3F8"/>
+          </a:solidFill>
+          <a:ln/>
+        </p:spPr>
+      </p:sp>
+      <p:sp>
+        <p:nvSpPr>
+          <p:cNvPr id="18" name="Shape 16"/>
+          <p:cNvSpPr/>
+          <p:nvPr/>
+        </p:nvSpPr>
+        <p:spPr>
+          <a:xfrm>
+            <a:off x="7720279" y="4032504"/>
+            <a:ext cx="36576" cy="2039112"/>
+          </a:xfrm>
+          <a:prstGeom prst="rect">
+            <a:avLst/>
+          </a:prstGeom>
+          <a:solidFill>
+            <a:srgbClr val="2B6CB0"/>
+          </a:solidFill>
+          <a:ln/>
+        </p:spPr>
+      </p:sp>
+      <p:sp>
+        <p:nvSpPr>
+          <p:cNvPr id="19" name="Text 17"/>
+          <p:cNvSpPr/>
+          <p:nvPr/>
+        </p:nvSpPr>
+        <p:spPr>
+          <a:xfrm>
+            <a:off x="7866583" y="4069080"/>
+            <a:ext cx="3584448" cy="201168"/>
+          </a:xfrm>
+          <a:prstGeom prst="rect">
+            <a:avLst/>
+          </a:prstGeom>
+          <a:noFill/>
+          <a:ln/>
+        </p:spPr>
+        <p:txBody>
+          <a:bodyPr wrap="square" lIns="0" tIns="0" rIns="0" bIns="0" rtlCol="0" anchor="ctr"/>
+          <a:lstStyle/>
+          <a:p>
+            <a:pPr indent="0" marL="0">
+              <a:buNone/>
+            </a:pPr>
+            <a:r>
+              <a:rPr lang="en-US" sz="1050" b="1" dirty="0">
+                <a:solidFill>
+                  <a:srgbClr val="2B6CB0"/>
+                </a:solidFill>
+                <a:latin typeface="Pretendard" pitchFamily="34" charset="0"/>
+                <a:ea typeface="Pretendard" pitchFamily="34" charset="-122"/>
+                <a:cs typeface="Pretendard" pitchFamily="34" charset="-120"/>
+              </a:rPr>
+              <a:t>권리관계 및 공적장부</a:t>
+            </a:r>
+            <a:endParaRPr lang="en-US" sz="1050" dirty="0"/>
+          </a:p>
+        </p:txBody>
+      </p:sp>
+      <p:sp>
+        <p:nvSpPr>
+          <p:cNvPr id="20" name="Text 18"/>
+          <p:cNvSpPr/>
+          <p:nvPr/>
+        </p:nvSpPr>
+        <p:spPr>
+          <a:xfrm>
+            <a:off x="7866583" y="4270248"/>
+            <a:ext cx="3584448" cy="1819656"/>
+          </a:xfrm>
+          <a:prstGeom prst="rect">
+            <a:avLst/>
+          </a:prstGeom>
+          <a:noFill/>
+          <a:ln/>
+        </p:spPr>
+        <p:txBody>
+          <a:bodyPr wrap="square" lIns="0" tIns="0" rIns="0" bIns="0" rtlCol="0" anchor="t"/>
+          <a:lstStyle/>
+          <a:p>
+            <a:pPr marL="342900" indent="-342900">
+              <a:lnSpc>
+                <a:spcPct val="108000"/>
+              </a:lnSpc>
+              <a:buSzPct val="100000"/>
+              <a:buChar char="•"/>
+            </a:pPr>
+            <a:r>
+              <a:rPr lang="en-US" sz="980" dirty="0">
+                <a:solidFill>
+                  <a:srgbClr val="10161F"/>
+                </a:solidFill>
+                <a:latin typeface="Pretendard" pitchFamily="34" charset="0"/>
+                <a:ea typeface="Pretendard" pitchFamily="34" charset="-122"/>
+                <a:cs typeface="Pretendard" pitchFamily="34" charset="-120"/>
+              </a:rPr>
+              <a:t>등기부등본 갑구 소유권 확인</a:t>
             </a:r>
             <a:endParaRPr lang="en-US" sz="980" dirty="0"/>
           </a:p>
@@ -9483,7 +9631,7 @@
                 <a:ea typeface="Pretendard" pitchFamily="34" charset="-122"/>
                 <a:cs typeface="Pretendard" pitchFamily="34" charset="-120"/>
               </a:rPr>
-              <a:t>필지 형상 및 접도 조건에 따른 건축 가능 면적 검토</a:t>
+              <a:t>건축물대장 기재 사항 실물 대조</a:t>
             </a:r>
             <a:endParaRPr lang="en-US" sz="980" dirty="0"/>
           </a:p>
@@ -9507,7 +9655,7 @@
                 <a:ea typeface="Pretendard" pitchFamily="34" charset="-122"/>
                 <a:cs typeface="Pretendard" pitchFamily="34" charset="-120"/>
               </a:rPr>
-              <a:t>토지이용계획 열람 및 개발행위허가 제한 여부 확인</a:t>
+              <a:t>개별공시지가 및 실거래가 비교</a:t>
             </a:r>
             <a:endParaRPr lang="en-US" sz="980" dirty="0"/>
           </a:p>
@@ -9515,56 +9663,14 @@
       </p:sp>
       <p:sp>
         <p:nvSpPr>
-          <p:cNvPr id="17" name="Shape 15"/>
-          <p:cNvSpPr/>
-          <p:nvPr/>
-        </p:nvSpPr>
-        <p:spPr>
-          <a:xfrm>
-            <a:off x="7720279" y="3977640"/>
-            <a:ext cx="3840480" cy="2148840"/>
-          </a:xfrm>
-          <a:prstGeom prst="roundRect">
-            <a:avLst>
-              <a:gd name="adj" fmla="val 2553"/>
-            </a:avLst>
-          </a:prstGeom>
-          <a:solidFill>
-            <a:srgbClr val="BEE3F8"/>
-          </a:solidFill>
-          <a:ln/>
-        </p:spPr>
-      </p:sp>
-      <p:sp>
-        <p:nvSpPr>
-          <p:cNvPr id="18" name="Shape 16"/>
-          <p:cNvSpPr/>
-          <p:nvPr/>
-        </p:nvSpPr>
-        <p:spPr>
-          <a:xfrm>
-            <a:off x="7720279" y="4032504"/>
-            <a:ext cx="36576" cy="2039112"/>
-          </a:xfrm>
-          <a:prstGeom prst="rect">
-            <a:avLst/>
-          </a:prstGeom>
-          <a:solidFill>
-            <a:srgbClr val="2B6CB0"/>
-          </a:solidFill>
-          <a:ln/>
-        </p:spPr>
-      </p:sp>
-      <p:sp>
-        <p:nvSpPr>
-          <p:cNvPr id="19" name="Text 17"/>
-          <p:cNvSpPr/>
-          <p:nvPr/>
-        </p:nvSpPr>
-        <p:spPr>
-          <a:xfrm>
-            <a:off x="7866583" y="4069080"/>
-            <a:ext cx="3584448" cy="201168"/>
+          <p:cNvPr id="21" name="Text 19"/>
+          <p:cNvSpPr/>
+          <p:nvPr/>
+        </p:nvSpPr>
+        <p:spPr>
+          <a:xfrm>
+            <a:off x="502920" y="6382512"/>
+            <a:ext cx="7315200" cy="219456"/>
           </a:xfrm>
           <a:prstGeom prst="rect">
             <a:avLst/>
@@ -9580,145 +9686,15 @@
               <a:buNone/>
             </a:pPr>
             <a:r>
-              <a:rPr lang="en-US" sz="1050" b="1" dirty="0">
-                <a:solidFill>
-                  <a:srgbClr val="2B6CB0"/>
+              <a:rPr lang="en-US" sz="800" dirty="0">
+                <a:solidFill>
+                  <a:srgbClr val="718096"/>
                 </a:solidFill>
                 <a:latin typeface="Pretendard" pitchFamily="34" charset="0"/>
                 <a:ea typeface="Pretendard" pitchFamily="34" charset="-122"/>
                 <a:cs typeface="Pretendard" pitchFamily="34" charset="-120"/>
               </a:rPr>
-              <a:t>권리관계 및 공적장부</a:t>
-            </a:r>
-            <a:endParaRPr lang="en-US" sz="1050" dirty="0"/>
-          </a:p>
-        </p:txBody>
-      </p:sp>
-      <p:sp>
-        <p:nvSpPr>
-          <p:cNvPr id="20" name="Text 18"/>
-          <p:cNvSpPr/>
-          <p:nvPr/>
-        </p:nvSpPr>
-        <p:spPr>
-          <a:xfrm>
-            <a:off x="7866583" y="4270248"/>
-            <a:ext cx="3584448" cy="1819656"/>
-          </a:xfrm>
-          <a:prstGeom prst="rect">
-            <a:avLst/>
-          </a:prstGeom>
-          <a:noFill/>
-          <a:ln/>
-        </p:spPr>
-        <p:txBody>
-          <a:bodyPr wrap="square" lIns="0" tIns="0" rIns="0" bIns="0" rtlCol="0" anchor="t"/>
-          <a:lstStyle/>
-          <a:p>
-            <a:pPr marL="342900" indent="-342900">
-              <a:lnSpc>
-                <a:spcPct val="108000"/>
-              </a:lnSpc>
-              <a:buSzPct val="100000"/>
-              <a:buChar char="•"/>
-            </a:pPr>
-            <a:r>
-              <a:rPr lang="en-US" sz="980" dirty="0">
-                <a:solidFill>
-                  <a:srgbClr val="10161F"/>
-                </a:solidFill>
-                <a:latin typeface="Pretendard" pitchFamily="34" charset="0"/>
-                <a:ea typeface="Pretendard" pitchFamily="34" charset="-122"/>
-                <a:cs typeface="Pretendard" pitchFamily="34" charset="-120"/>
-              </a:rPr>
-              <a:t>등기부등본 갑구 소유권 및 을구 근저당·가압류 확인</a:t>
-            </a:r>
-            <a:endParaRPr lang="en-US" sz="980" dirty="0"/>
-          </a:p>
-          <a:p>
-            <a:pPr marL="342900" indent="-342900">
-              <a:lnSpc>
-                <a:spcPct val="108000"/>
-              </a:lnSpc>
-              <a:spcBef>
-                <a:spcPts val="300"/>
-              </a:spcBef>
-              <a:buSzPct val="100000"/>
-              <a:buChar char="•"/>
-            </a:pPr>
-            <a:r>
-              <a:rPr lang="en-US" sz="980" dirty="0">
-                <a:solidFill>
-                  <a:srgbClr val="10161F"/>
-                </a:solidFill>
-                <a:latin typeface="Pretendard" pitchFamily="34" charset="0"/>
-                <a:ea typeface="Pretendard" pitchFamily="34" charset="-122"/>
-                <a:cs typeface="Pretendard" pitchFamily="34" charset="-120"/>
-              </a:rPr>
-              <a:t>건축물대장 기재 사항과 실물 현황 대조 점검</a:t>
-            </a:r>
-            <a:endParaRPr lang="en-US" sz="980" dirty="0"/>
-          </a:p>
-          <a:p>
-            <a:pPr marL="342900" indent="-342900">
-              <a:lnSpc>
-                <a:spcPct val="108000"/>
-              </a:lnSpc>
-              <a:spcBef>
-                <a:spcPts val="300"/>
-              </a:spcBef>
-              <a:buSzPct val="100000"/>
-              <a:buChar char="•"/>
-            </a:pPr>
-            <a:r>
-              <a:rPr lang="en-US" sz="980" dirty="0">
-                <a:solidFill>
-                  <a:srgbClr val="10161F"/>
-                </a:solidFill>
-                <a:latin typeface="Pretendard" pitchFamily="34" charset="0"/>
-                <a:ea typeface="Pretendard" pitchFamily="34" charset="-122"/>
-                <a:cs typeface="Pretendard" pitchFamily="34" charset="-120"/>
-              </a:rPr>
-              <a:t>개별공시지가 및 실거래가 비교 분석</a:t>
-            </a:r>
-            <a:endParaRPr lang="en-US" sz="980" dirty="0"/>
-          </a:p>
-        </p:txBody>
-      </p:sp>
-      <p:sp>
-        <p:nvSpPr>
-          <p:cNvPr id="21" name="Text 19"/>
-          <p:cNvSpPr/>
-          <p:nvPr/>
-        </p:nvSpPr>
-        <p:spPr>
-          <a:xfrm>
-            <a:off x="502920" y="6382512"/>
-            <a:ext cx="7315200" cy="219456"/>
-          </a:xfrm>
-          <a:prstGeom prst="rect">
-            <a:avLst/>
-          </a:prstGeom>
-          <a:noFill/>
-          <a:ln/>
-        </p:spPr>
-        <p:txBody>
-          <a:bodyPr wrap="square" lIns="0" tIns="0" rIns="0" bIns="0" rtlCol="0" anchor="ctr"/>
-          <a:lstStyle/>
-          <a:p>
-            <a:pPr indent="0" marL="0">
-              <a:buNone/>
-            </a:pPr>
-            <a:r>
-              <a:rPr lang="en-US" sz="800" dirty="0">
-                <a:solidFill>
-                  <a:srgbClr val="718096"/>
-                </a:solidFill>
-                <a:latin typeface="Pretendard" pitchFamily="34" charset="0"/>
-                <a:ea typeface="Pretendard" pitchFamily="34" charset="-122"/>
-                <a:cs typeface="Pretendard" pitchFamily="34" charset="-120"/>
-              </a:rPr>
-              <a:t>크리딜   |   </a:t>
+              <a:t>크리딜</a:t>
             </a:r>
             <a:endParaRPr lang="en-US" sz="800" dirty="0"/>
           </a:p>
@@ -9980,7 +9956,7 @@
         <p:spPr>
           <a:xfrm>
             <a:off x="502920" y="1645920"/>
-            <a:ext cx="1920240" cy="420624"/>
+            <a:ext cx="1920240" cy="402336"/>
           </a:xfrm>
           <a:prstGeom prst="rect">
             <a:avLst/>
@@ -10022,7 +9998,7 @@
         <p:spPr>
           <a:xfrm>
             <a:off x="2423160" y="1645920"/>
-            <a:ext cx="4937760" cy="420624"/>
+            <a:ext cx="4937760" cy="402336"/>
           </a:xfrm>
           <a:prstGeom prst="rect">
             <a:avLst/>
@@ -10063,7 +10039,7 @@
         </p:nvSpPr>
         <p:spPr>
           <a:xfrm>
-            <a:off x="502920" y="2066544"/>
+            <a:off x="502920" y="2048256"/>
             <a:ext cx="6858000" cy="0"/>
           </a:xfrm>
           <a:prstGeom prst="line">
@@ -10086,8 +10062,8 @@
         </p:nvSpPr>
         <p:spPr>
           <a:xfrm>
-            <a:off x="502920" y="2066544"/>
-            <a:ext cx="1920240" cy="420624"/>
+            <a:off x="502920" y="2048256"/>
+            <a:ext cx="1920240" cy="402336"/>
           </a:xfrm>
           <a:prstGeom prst="rect">
             <a:avLst/>
@@ -10128,8 +10104,8 @@
         </p:nvSpPr>
         <p:spPr>
           <a:xfrm>
-            <a:off x="2423160" y="2066544"/>
-            <a:ext cx="4937760" cy="420624"/>
+            <a:off x="2423160" y="2048256"/>
+            <a:ext cx="4937760" cy="402336"/>
           </a:xfrm>
           <a:prstGeom prst="rect">
             <a:avLst/>
@@ -10170,7 +10146,7 @@
         </p:nvSpPr>
         <p:spPr>
           <a:xfrm>
-            <a:off x="502920" y="2487168"/>
+            <a:off x="502920" y="2450592"/>
             <a:ext cx="6858000" cy="0"/>
           </a:xfrm>
           <a:prstGeom prst="line">
@@ -10193,8 +10169,8 @@
         </p:nvSpPr>
         <p:spPr>
           <a:xfrm>
-            <a:off x="502920" y="2487168"/>
-            <a:ext cx="1920240" cy="420624"/>
+            <a:off x="502920" y="2450592"/>
+            <a:ext cx="1920240" cy="402336"/>
           </a:xfrm>
           <a:prstGeom prst="rect">
             <a:avLst/>
@@ -10235,8 +10211,8 @@
         </p:nvSpPr>
         <p:spPr>
           <a:xfrm>
-            <a:off x="2423160" y="2487168"/>
-            <a:ext cx="4937760" cy="420624"/>
+            <a:off x="2423160" y="2450592"/>
+            <a:ext cx="4937760" cy="402336"/>
           </a:xfrm>
           <a:prstGeom prst="rect">
             <a:avLst/>
@@ -10437,7 +10413,7 @@
                 <a:ea typeface="Pretendard" pitchFamily="34" charset="-122"/>
                 <a:cs typeface="Pretendard" pitchFamily="34" charset="-120"/>
               </a:rPr>
-              <a:t>크리딜   |   </a:t>
+              <a:t>크리딜</a:t>
             </a:r>
             <a:endParaRPr lang="en-US" sz="800" dirty="0"/>
           </a:p>
@@ -11538,7 +11514,7 @@
                 <a:ea typeface="Pretendard" pitchFamily="34" charset="-122"/>
                 <a:cs typeface="Pretendard" pitchFamily="34" charset="-120"/>
               </a:rPr>
-              <a:t>크리딜   |   </a:t>
+              <a:t>크리딜</a:t>
             </a:r>
             <a:endParaRPr lang="en-US" sz="800" dirty="0"/>
           </a:p>
@@ -11800,7 +11776,7 @@
         <p:spPr>
           <a:xfrm>
             <a:off x="502920" y="1645920"/>
-            <a:ext cx="1920240" cy="420624"/>
+            <a:ext cx="1920240" cy="402336"/>
           </a:xfrm>
           <a:prstGeom prst="rect">
             <a:avLst/>
@@ -11842,7 +11818,7 @@
         <p:spPr>
           <a:xfrm>
             <a:off x="2423160" y="1645920"/>
-            <a:ext cx="4937760" cy="420624"/>
+            <a:ext cx="4937760" cy="402336"/>
           </a:xfrm>
           <a:prstGeom prst="rect">
             <a:avLst/>
@@ -11883,7 +11859,7 @@
         </p:nvSpPr>
         <p:spPr>
           <a:xfrm>
-            <a:off x="502920" y="2066544"/>
+            <a:off x="502920" y="2048256"/>
             <a:ext cx="6858000" cy="0"/>
           </a:xfrm>
           <a:prstGeom prst="line">
@@ -11906,8 +11882,8 @@
         </p:nvSpPr>
         <p:spPr>
           <a:xfrm>
-            <a:off x="502920" y="2066544"/>
-            <a:ext cx="1920240" cy="420624"/>
+            <a:off x="502920" y="2048256"/>
+            <a:ext cx="1920240" cy="402336"/>
           </a:xfrm>
           <a:prstGeom prst="rect">
             <a:avLst/>
@@ -11948,8 +11924,8 @@
         </p:nvSpPr>
         <p:spPr>
           <a:xfrm>
-            <a:off x="2423160" y="2066544"/>
-            <a:ext cx="4937760" cy="420624"/>
+            <a:off x="2423160" y="2048256"/>
+            <a:ext cx="4937760" cy="402336"/>
           </a:xfrm>
           <a:prstGeom prst="rect">
             <a:avLst/>
@@ -12150,7 +12126,7 @@
                 <a:ea typeface="Pretendard" pitchFamily="34" charset="-122"/>
                 <a:cs typeface="Pretendard" pitchFamily="34" charset="-120"/>
               </a:rPr>
-              <a:t>크리딜   |   </a:t>
+              <a:t>크리딜</a:t>
             </a:r>
             <a:endParaRPr lang="en-US" sz="800" dirty="0"/>
           </a:p>
@@ -12477,6 +12453,9 @@
           <a:lstStyle/>
           <a:p>
             <a:pPr indent="0" marL="0">
+              <a:lnSpc>
+                <a:spcPct val="100000"/>
+              </a:lnSpc>
               <a:buNone/>
             </a:pPr>
             <a:r>
@@ -12584,6 +12563,9 @@
           <a:lstStyle/>
           <a:p>
             <a:pPr indent="0" marL="0">
+              <a:lnSpc>
+                <a:spcPct val="100000"/>
+              </a:lnSpc>
               <a:buNone/>
             </a:pPr>
             <a:r>
@@ -12691,6 +12673,9 @@
           <a:lstStyle/>
           <a:p>
             <a:pPr indent="0" marL="0">
+              <a:lnSpc>
+                <a:spcPct val="100000"/>
+              </a:lnSpc>
               <a:buNone/>
             </a:pPr>
             <a:r>
@@ -12864,7 +12849,7 @@
                 <a:ea typeface="Pretendard" pitchFamily="34" charset="-122"/>
                 <a:cs typeface="Pretendard" pitchFamily="34" charset="-120"/>
               </a:rPr>
-              <a:t>크리딜   |   </a:t>
+              <a:t>크리딜</a:t>
             </a:r>
             <a:endParaRPr lang="en-US" sz="800" dirty="0"/>
           </a:p>
@@ -13222,7 +13207,7 @@
                 <a:ea typeface="Pretendard" pitchFamily="34" charset="-122"/>
                 <a:cs typeface="Pretendard" pitchFamily="34" charset="-120"/>
               </a:rPr>
-              <a:t>165.0억 원</a:t>
+              <a:t>165억 원</a:t>
             </a:r>
             <a:endParaRPr lang="en-US" sz="1150" dirty="0"/>
           </a:p>
@@ -13650,7 +13635,7 @@
                 <a:ea typeface="Pretendard" pitchFamily="34" charset="-122"/>
                 <a:cs typeface="Pretendard" pitchFamily="34" charset="-120"/>
               </a:rPr>
-              <a:t>0.0억 원</a:t>
+              <a:t>-</a:t>
             </a:r>
             <a:endParaRPr lang="en-US" sz="1150" dirty="0"/>
           </a:p>
@@ -14488,7 +14473,7 @@
                           <a:ea typeface="Pretendard" pitchFamily="34" charset="-122"/>
                           <a:cs typeface="Pretendard" pitchFamily="34" charset="-120"/>
                         </a:rPr>
-                        <a:t>0.00%</a:t>
+                        <a:t>-</a:t>
                       </a:r>
                       <a:endParaRPr lang="en-US" sz="1100" dirty="0">
                         <a:latin typeface="Pretendard" charset="0"/>
@@ -14790,7 +14775,7 @@
                           <a:ea typeface="Pretendard" pitchFamily="34" charset="-122"/>
                           <a:cs typeface="Pretendard" pitchFamily="34" charset="-120"/>
                         </a:rPr>
-                        <a:t>0.00%</a:t>
+                        <a:t>-</a:t>
                       </a:r>
                       <a:endParaRPr lang="en-US" sz="1100" dirty="0">
                         <a:latin typeface="Pretendard" charset="0"/>
@@ -15092,7 +15077,7 @@
                           <a:ea typeface="Pretendard" pitchFamily="34" charset="-122"/>
                           <a:cs typeface="Pretendard" pitchFamily="34" charset="-120"/>
                         </a:rPr>
-                        <a:t>0.00%</a:t>
+                        <a:t>-</a:t>
                       </a:r>
                       <a:endParaRPr lang="en-US" sz="1100" dirty="0">
                         <a:latin typeface="Pretendard" charset="0"/>
@@ -15394,7 +15379,7 @@
                           <a:ea typeface="Pretendard" pitchFamily="34" charset="-122"/>
                           <a:cs typeface="Pretendard" pitchFamily="34" charset="-120"/>
                         </a:rPr>
-                        <a:t>0.00%</a:t>
+                        <a:t>-</a:t>
                       </a:r>
                       <a:endParaRPr lang="en-US" sz="1100" dirty="0">
                         <a:latin typeface="Pretendard" charset="0"/>
@@ -15606,7 +15591,7 @@
                 <a:ea typeface="Pretendard" pitchFamily="34" charset="-122"/>
                 <a:cs typeface="Pretendard" pitchFamily="34" charset="-120"/>
               </a:rPr>
-              <a:t>크리딜   |   </a:t>
+              <a:t>크리딜</a:t>
             </a:r>
             <a:endParaRPr lang="en-US" sz="800" dirty="0"/>
           </a:p>

--- a/docs/test/stress/e2e-outputs/income_basic_pr01.pptx
+++ b/docs/test/stress/e2e-outputs/income_basic_pr01.pptx
@@ -4155,7 +4155,7 @@
                 <a:ea typeface="Pretendard" pitchFamily="34" charset="-122"/>
                 <a:cs typeface="Pretendard" pitchFamily="34" charset="-120"/>
               </a:rPr>
-              <a:t>임대차 원본 계약서 대조 (보증금, 월임대료, 관리비 실입금 내역 및 제소전화해조서)</a:t>
+              <a:t>임대차 원본 계약서 검토 (보증금, 월임대료, 관리비 실입금 내역 및 제소전화해조서)</a:t>
             </a:r>
             <a:endParaRPr lang="en-US" sz="950" dirty="0"/>
           </a:p>

--- a/docs/test/stress/e2e-outputs/income_basic_pr01.pptx
+++ b/docs/test/stress/e2e-outputs/income_basic_pr01.pptx
@@ -2183,7 +2183,7 @@
         </p:nvSpPr>
         <p:spPr>
           <a:xfrm>
-            <a:off x="502920" y="475488"/>
+            <a:off x="566928" y="475488"/>
             <a:ext cx="2743200" cy="365760"/>
           </a:xfrm>
           <a:prstGeom prst="rect">
@@ -2236,7 +2236,7 @@
         </p:nvSpPr>
         <p:spPr>
           <a:xfrm>
-            <a:off x="502920" y="2029968"/>
+            <a:off x="566928" y="2029968"/>
             <a:ext cx="7315200" cy="274320"/>
           </a:xfrm>
           <a:prstGeom prst="rect">
@@ -2275,8 +2275,8 @@
         </p:nvSpPr>
         <p:spPr>
           <a:xfrm>
-            <a:off x="502920" y="2304288"/>
-            <a:ext cx="7315200" cy="731520"/>
+            <a:off x="566928" y="2304288"/>
+            <a:ext cx="7315200" cy="1051560"/>
           </a:xfrm>
           <a:prstGeom prst="rect">
             <a:avLst/>
@@ -2292,7 +2292,7 @@
               <a:buNone/>
             </a:pPr>
             <a:r>
-              <a:rPr lang="en-US" sz="4000" b="1" dirty="0">
+              <a:rPr lang="en-US" sz="3000" b="1" dirty="0">
                 <a:solidFill>
                   <a:srgbClr val="FFFFFF"/>
                 </a:solidFill>
@@ -2302,7 +2302,7 @@
               </a:rPr>
               <a:t>income 포스처 테스트 문서</a:t>
             </a:r>
-            <a:endParaRPr lang="en-US" sz="4000" dirty="0"/>
+            <a:endParaRPr lang="en-US" sz="3000" dirty="0"/>
           </a:p>
         </p:txBody>
       </p:sp>
@@ -2314,7 +2314,7 @@
         </p:nvSpPr>
         <p:spPr>
           <a:xfrm>
-            <a:off x="502920" y="3090672"/>
+            <a:off x="566928" y="3410712"/>
             <a:ext cx="7315200" cy="329184"/>
           </a:xfrm>
           <a:prstGeom prst="rect">
@@ -2353,7 +2353,7 @@
         </p:nvSpPr>
         <p:spPr>
           <a:xfrm>
-            <a:off x="502920" y="3639312"/>
+            <a:off x="566928" y="3959352"/>
             <a:ext cx="1097280" cy="292608"/>
           </a:xfrm>
           <a:prstGeom prst="roundRect">
@@ -2375,7 +2375,7 @@
         </p:nvSpPr>
         <p:spPr>
           <a:xfrm>
-            <a:off x="502920" y="3639312"/>
+            <a:off x="566928" y="3959352"/>
             <a:ext cx="1097280" cy="292608"/>
           </a:xfrm>
           <a:prstGeom prst="rect">
@@ -2414,7 +2414,7 @@
         </p:nvSpPr>
         <p:spPr>
           <a:xfrm>
-            <a:off x="1691640" y="3639312"/>
+            <a:off x="1755648" y="3959352"/>
             <a:ext cx="1005840" cy="292608"/>
           </a:xfrm>
           <a:prstGeom prst="roundRect">
@@ -2436,7 +2436,7 @@
         </p:nvSpPr>
         <p:spPr>
           <a:xfrm>
-            <a:off x="1691640" y="3639312"/>
+            <a:off x="1755648" y="3959352"/>
             <a:ext cx="1005840" cy="292608"/>
           </a:xfrm>
           <a:prstGeom prst="rect">
@@ -2475,7 +2475,7 @@
         </p:nvSpPr>
         <p:spPr>
           <a:xfrm>
-            <a:off x="502920" y="4078224"/>
+            <a:off x="566928" y="4398264"/>
             <a:ext cx="6858000" cy="1051560"/>
           </a:xfrm>
           <a:prstGeom prst="roundRect">
@@ -2502,7 +2502,7 @@
         </p:nvSpPr>
         <p:spPr>
           <a:xfrm>
-            <a:off x="758952" y="4187952"/>
+            <a:off x="822960" y="4507992"/>
             <a:ext cx="6345936" cy="832104"/>
           </a:xfrm>
           <a:prstGeom prst="rect">
@@ -2541,7 +2541,7 @@
         </p:nvSpPr>
         <p:spPr>
           <a:xfrm>
-            <a:off x="502920" y="1700784"/>
+            <a:off x="566928" y="1700784"/>
             <a:ext cx="7315200" cy="256032"/>
           </a:xfrm>
           <a:prstGeom prst="rect">
@@ -2580,8 +2580,8 @@
         </p:nvSpPr>
         <p:spPr>
           <a:xfrm>
-            <a:off x="502920" y="6035040"/>
-            <a:ext cx="11057839" cy="274320"/>
+            <a:off x="566928" y="5943600"/>
+            <a:ext cx="11057839" cy="201168"/>
           </a:xfrm>
           <a:prstGeom prst="rect">
             <a:avLst/>
@@ -2619,7 +2619,7 @@
         </p:nvSpPr>
         <p:spPr>
           <a:xfrm>
-            <a:off x="502920" y="6382512"/>
+            <a:off x="566928" y="6382512"/>
             <a:ext cx="7315200" cy="219456"/>
           </a:xfrm>
           <a:prstGeom prst="rect">
@@ -2658,7 +2658,7 @@
         </p:nvSpPr>
         <p:spPr>
           <a:xfrm>
-            <a:off x="10774375" y="6382512"/>
+            <a:off x="10710367" y="6382512"/>
             <a:ext cx="914400" cy="219456"/>
           </a:xfrm>
           <a:prstGeom prst="rect">
@@ -2729,7 +2729,7 @@
         </p:nvSpPr>
         <p:spPr>
           <a:xfrm>
-            <a:off x="502920" y="457200"/>
+            <a:off x="566928" y="457200"/>
             <a:ext cx="384048" cy="384048"/>
           </a:xfrm>
           <a:prstGeom prst="ellipse">
@@ -2749,7 +2749,7 @@
         </p:nvSpPr>
         <p:spPr>
           <a:xfrm>
-            <a:off x="502920" y="457200"/>
+            <a:off x="566928" y="457200"/>
             <a:ext cx="384048" cy="384048"/>
           </a:xfrm>
           <a:prstGeom prst="rect">
@@ -2788,7 +2788,7 @@
         </p:nvSpPr>
         <p:spPr>
           <a:xfrm>
-            <a:off x="1069848" y="457200"/>
+            <a:off x="1133856" y="457200"/>
             <a:ext cx="10490911" cy="182880"/>
           </a:xfrm>
           <a:prstGeom prst="rect">
@@ -2827,7 +2827,7 @@
         </p:nvSpPr>
         <p:spPr>
           <a:xfrm>
-            <a:off x="1069848" y="640080"/>
+            <a:off x="1133856" y="640080"/>
             <a:ext cx="10490911" cy="365760"/>
           </a:xfrm>
           <a:prstGeom prst="rect">
@@ -2837,7 +2837,9 @@
           <a:ln/>
         </p:spPr>
         <p:txBody>
-          <a:bodyPr wrap="square" lIns="0" tIns="0" rIns="0" bIns="0" rtlCol="0" anchor="ctr"/>
+          <a:bodyPr wrap="square" lIns="0" tIns="0" rIns="0" bIns="0" rtlCol="0" anchor="ctr">
+            <a:normAutofit/>
+          </a:bodyPr>
           <a:lstStyle/>
           <a:p>
             <a:pPr indent="0" marL="0">
@@ -2866,7 +2868,7 @@
         </p:nvSpPr>
         <p:spPr>
           <a:xfrm>
-            <a:off x="502920" y="4937760"/>
+            <a:off x="566928" y="4937760"/>
             <a:ext cx="11057839" cy="804672"/>
           </a:xfrm>
           <a:prstGeom prst="roundRect">
@@ -2893,7 +2895,7 @@
         </p:nvSpPr>
         <p:spPr>
           <a:xfrm>
-            <a:off x="685800" y="5047488"/>
+            <a:off x="749808" y="5047488"/>
             <a:ext cx="1691640" cy="256032"/>
           </a:xfrm>
           <a:prstGeom prst="rect">
@@ -2932,7 +2934,7 @@
         </p:nvSpPr>
         <p:spPr>
           <a:xfrm>
-            <a:off x="2423160" y="5010912"/>
+            <a:off x="2487168" y="5010912"/>
             <a:ext cx="8954719" cy="658368"/>
           </a:xfrm>
           <a:prstGeom prst="rect">
@@ -2974,7 +2976,7 @@
         </p:nvSpPr>
         <p:spPr>
           <a:xfrm>
-            <a:off x="502920" y="6382512"/>
+            <a:off x="566928" y="6382512"/>
             <a:ext cx="7315200" cy="219456"/>
           </a:xfrm>
           <a:prstGeom prst="rect">
@@ -3013,7 +3015,7 @@
         </p:nvSpPr>
         <p:spPr>
           <a:xfrm>
-            <a:off x="10774375" y="6382512"/>
+            <a:off x="10710367" y="6382512"/>
             <a:ext cx="914400" cy="219456"/>
           </a:xfrm>
           <a:prstGeom prst="rect">
@@ -3084,7 +3086,7 @@
         </p:nvSpPr>
         <p:spPr>
           <a:xfrm>
-            <a:off x="502920" y="457200"/>
+            <a:off x="566928" y="457200"/>
             <a:ext cx="384048" cy="384048"/>
           </a:xfrm>
           <a:prstGeom prst="ellipse">
@@ -3104,7 +3106,7 @@
         </p:nvSpPr>
         <p:spPr>
           <a:xfrm>
-            <a:off x="502920" y="457200"/>
+            <a:off x="566928" y="457200"/>
             <a:ext cx="384048" cy="384048"/>
           </a:xfrm>
           <a:prstGeom prst="rect">
@@ -3143,7 +3145,7 @@
         </p:nvSpPr>
         <p:spPr>
           <a:xfrm>
-            <a:off x="1069848" y="457200"/>
+            <a:off x="1133856" y="457200"/>
             <a:ext cx="10490911" cy="182880"/>
           </a:xfrm>
           <a:prstGeom prst="rect">
@@ -3182,7 +3184,7 @@
         </p:nvSpPr>
         <p:spPr>
           <a:xfrm>
-            <a:off x="1069848" y="640080"/>
+            <a:off x="1133856" y="640080"/>
             <a:ext cx="10490911" cy="365760"/>
           </a:xfrm>
           <a:prstGeom prst="rect">
@@ -3192,7 +3194,9 @@
           <a:ln/>
         </p:spPr>
         <p:txBody>
-          <a:bodyPr wrap="square" lIns="0" tIns="0" rIns="0" bIns="0" rtlCol="0" anchor="ctr"/>
+          <a:bodyPr wrap="square" lIns="0" tIns="0" rIns="0" bIns="0" rtlCol="0" anchor="ctr">
+            <a:normAutofit/>
+          </a:bodyPr>
           <a:lstStyle/>
           <a:p>
             <a:pPr indent="0" marL="0">
@@ -3221,7 +3225,7 @@
         </p:nvSpPr>
         <p:spPr>
           <a:xfrm>
-            <a:off x="502920" y="1417320"/>
+            <a:off x="566928" y="1417320"/>
             <a:ext cx="5400904" cy="3657600"/>
           </a:xfrm>
           <a:prstGeom prst="roundRect">
@@ -3248,7 +3252,7 @@
         </p:nvSpPr>
         <p:spPr>
           <a:xfrm>
-            <a:off x="502920" y="1417320"/>
+            <a:off x="566928" y="1417320"/>
             <a:ext cx="5400904" cy="45720"/>
           </a:xfrm>
           <a:prstGeom prst="rect">
@@ -3268,7 +3272,7 @@
         </p:nvSpPr>
         <p:spPr>
           <a:xfrm>
-            <a:off x="731520" y="1618488"/>
+            <a:off x="795528" y="1618488"/>
             <a:ext cx="4943704" cy="292608"/>
           </a:xfrm>
           <a:prstGeom prst="rect">
@@ -3307,7 +3311,7 @@
         </p:nvSpPr>
         <p:spPr>
           <a:xfrm>
-            <a:off x="731520" y="1947672"/>
+            <a:off x="795528" y="1947672"/>
             <a:ext cx="4943704" cy="365760"/>
           </a:xfrm>
           <a:prstGeom prst="rect">
@@ -3348,7 +3352,7 @@
         </p:nvSpPr>
         <p:spPr>
           <a:xfrm>
-            <a:off x="731520" y="2377440"/>
+            <a:off x="795528" y="2377440"/>
             <a:ext cx="4943704" cy="2606040"/>
           </a:xfrm>
           <a:prstGeom prst="rect">
@@ -3393,7 +3397,7 @@
         </p:nvSpPr>
         <p:spPr>
           <a:xfrm>
-            <a:off x="6159856" y="1417320"/>
+            <a:off x="6223864" y="1417320"/>
             <a:ext cx="5400904" cy="3657600"/>
           </a:xfrm>
           <a:prstGeom prst="roundRect">
@@ -3420,7 +3424,7 @@
         </p:nvSpPr>
         <p:spPr>
           <a:xfrm>
-            <a:off x="6159856" y="1417320"/>
+            <a:off x="6223864" y="1417320"/>
             <a:ext cx="5400904" cy="45720"/>
           </a:xfrm>
           <a:prstGeom prst="rect">
@@ -3440,7 +3444,7 @@
         </p:nvSpPr>
         <p:spPr>
           <a:xfrm>
-            <a:off x="6388456" y="1618488"/>
+            <a:off x="6452464" y="1618488"/>
             <a:ext cx="4943704" cy="292608"/>
           </a:xfrm>
           <a:prstGeom prst="rect">
@@ -3479,7 +3483,7 @@
         </p:nvSpPr>
         <p:spPr>
           <a:xfrm>
-            <a:off x="6388456" y="1947672"/>
+            <a:off x="6452464" y="1947672"/>
             <a:ext cx="4943704" cy="365760"/>
           </a:xfrm>
           <a:prstGeom prst="rect">
@@ -3520,7 +3524,7 @@
         </p:nvSpPr>
         <p:spPr>
           <a:xfrm>
-            <a:off x="6388456" y="2377440"/>
+            <a:off x="6452464" y="2377440"/>
             <a:ext cx="4943704" cy="2606040"/>
           </a:xfrm>
           <a:prstGeom prst="rect">
@@ -3565,7 +3569,7 @@
         </p:nvSpPr>
         <p:spPr>
           <a:xfrm>
-            <a:off x="502920" y="5193792"/>
+            <a:off x="566928" y="5193792"/>
             <a:ext cx="11057839" cy="621792"/>
           </a:xfrm>
           <a:prstGeom prst="roundRect">
@@ -3592,7 +3596,7 @@
         </p:nvSpPr>
         <p:spPr>
           <a:xfrm>
-            <a:off x="731520" y="5193792"/>
+            <a:off x="795528" y="5193792"/>
             <a:ext cx="10600639" cy="621792"/>
           </a:xfrm>
           <a:prstGeom prst="rect">
@@ -3631,7 +3635,7 @@
         </p:nvSpPr>
         <p:spPr>
           <a:xfrm>
-            <a:off x="502920" y="6382512"/>
+            <a:off x="566928" y="6382512"/>
             <a:ext cx="7315200" cy="219456"/>
           </a:xfrm>
           <a:prstGeom prst="rect">
@@ -3670,7 +3674,7 @@
         </p:nvSpPr>
         <p:spPr>
           <a:xfrm>
-            <a:off x="10774375" y="6382512"/>
+            <a:off x="10710367" y="6382512"/>
             <a:ext cx="914400" cy="219456"/>
           </a:xfrm>
           <a:prstGeom prst="rect">
@@ -3741,7 +3745,7 @@
         </p:nvSpPr>
         <p:spPr>
           <a:xfrm>
-            <a:off x="502920" y="457200"/>
+            <a:off x="566928" y="457200"/>
             <a:ext cx="384048" cy="384048"/>
           </a:xfrm>
           <a:prstGeom prst="ellipse">
@@ -3761,7 +3765,7 @@
         </p:nvSpPr>
         <p:spPr>
           <a:xfrm>
-            <a:off x="502920" y="457200"/>
+            <a:off x="566928" y="457200"/>
             <a:ext cx="384048" cy="384048"/>
           </a:xfrm>
           <a:prstGeom prst="rect">
@@ -3800,7 +3804,7 @@
         </p:nvSpPr>
         <p:spPr>
           <a:xfrm>
-            <a:off x="1069848" y="457200"/>
+            <a:off x="1133856" y="457200"/>
             <a:ext cx="10490911" cy="182880"/>
           </a:xfrm>
           <a:prstGeom prst="rect">
@@ -3839,7 +3843,7 @@
         </p:nvSpPr>
         <p:spPr>
           <a:xfrm>
-            <a:off x="1069848" y="640080"/>
+            <a:off x="1133856" y="640080"/>
             <a:ext cx="10490911" cy="365760"/>
           </a:xfrm>
           <a:prstGeom prst="rect">
@@ -3849,7 +3853,9 @@
           <a:ln/>
         </p:spPr>
         <p:txBody>
-          <a:bodyPr wrap="square" lIns="0" tIns="0" rIns="0" bIns="0" rtlCol="0" anchor="ctr"/>
+          <a:bodyPr wrap="square" lIns="0" tIns="0" rIns="0" bIns="0" rtlCol="0" anchor="ctr">
+            <a:normAutofit/>
+          </a:bodyPr>
           <a:lstStyle/>
           <a:p>
             <a:pPr indent="0" marL="0">
@@ -3878,7 +3884,7 @@
         </p:nvSpPr>
         <p:spPr>
           <a:xfrm>
-            <a:off x="502920" y="1371600"/>
+            <a:off x="566928" y="1371600"/>
             <a:ext cx="11057839" cy="237744"/>
           </a:xfrm>
           <a:prstGeom prst="rect">
@@ -3917,7 +3923,7 @@
         </p:nvSpPr>
         <p:spPr>
           <a:xfrm>
-            <a:off x="502920" y="1719072"/>
+            <a:off x="566928" y="1719072"/>
             <a:ext cx="5368900" cy="749808"/>
           </a:xfrm>
           <a:prstGeom prst="rect">
@@ -3942,7 +3948,7 @@
         </p:nvSpPr>
         <p:spPr>
           <a:xfrm>
-            <a:off x="640080" y="1947672"/>
+            <a:off x="704088" y="1947672"/>
             <a:ext cx="292608" cy="292608"/>
           </a:xfrm>
           <a:prstGeom prst="rect">
@@ -3962,7 +3968,7 @@
         </p:nvSpPr>
         <p:spPr>
           <a:xfrm>
-            <a:off x="640080" y="1947672"/>
+            <a:off x="704088" y="1947672"/>
             <a:ext cx="292608" cy="292608"/>
           </a:xfrm>
           <a:prstGeom prst="rect">
@@ -4001,7 +4007,7 @@
         </p:nvSpPr>
         <p:spPr>
           <a:xfrm>
-            <a:off x="1033272" y="1792224"/>
+            <a:off x="1097280" y="1792224"/>
             <a:ext cx="4710532" cy="603504"/>
           </a:xfrm>
           <a:prstGeom prst="rect">
@@ -4043,7 +4049,7 @@
         </p:nvSpPr>
         <p:spPr>
           <a:xfrm>
-            <a:off x="502920" y="2542032"/>
+            <a:off x="566928" y="2542032"/>
             <a:ext cx="5368900" cy="749808"/>
           </a:xfrm>
           <a:prstGeom prst="rect">
@@ -4068,7 +4074,7 @@
         </p:nvSpPr>
         <p:spPr>
           <a:xfrm>
-            <a:off x="640080" y="2770632"/>
+            <a:off x="704088" y="2770632"/>
             <a:ext cx="292608" cy="292608"/>
           </a:xfrm>
           <a:prstGeom prst="rect">
@@ -4088,7 +4094,7 @@
         </p:nvSpPr>
         <p:spPr>
           <a:xfrm>
-            <a:off x="640080" y="2770632"/>
+            <a:off x="704088" y="2770632"/>
             <a:ext cx="292608" cy="292608"/>
           </a:xfrm>
           <a:prstGeom prst="rect">
@@ -4127,7 +4133,7 @@
         </p:nvSpPr>
         <p:spPr>
           <a:xfrm>
-            <a:off x="1033272" y="2615184"/>
+            <a:off x="1097280" y="2615184"/>
             <a:ext cx="4710532" cy="603504"/>
           </a:xfrm>
           <a:prstGeom prst="rect">
@@ -4169,7 +4175,7 @@
         </p:nvSpPr>
         <p:spPr>
           <a:xfrm>
-            <a:off x="502920" y="3364992"/>
+            <a:off x="566928" y="3364992"/>
             <a:ext cx="5368900" cy="749808"/>
           </a:xfrm>
           <a:prstGeom prst="rect">
@@ -4194,7 +4200,7 @@
         </p:nvSpPr>
         <p:spPr>
           <a:xfrm>
-            <a:off x="640080" y="3593592"/>
+            <a:off x="704088" y="3593592"/>
             <a:ext cx="292608" cy="292608"/>
           </a:xfrm>
           <a:prstGeom prst="rect">
@@ -4214,7 +4220,7 @@
         </p:nvSpPr>
         <p:spPr>
           <a:xfrm>
-            <a:off x="640080" y="3593592"/>
+            <a:off x="704088" y="3593592"/>
             <a:ext cx="292608" cy="292608"/>
           </a:xfrm>
           <a:prstGeom prst="rect">
@@ -4253,7 +4259,7 @@
         </p:nvSpPr>
         <p:spPr>
           <a:xfrm>
-            <a:off x="1033272" y="3438144"/>
+            <a:off x="1097280" y="3438144"/>
             <a:ext cx="4710532" cy="603504"/>
           </a:xfrm>
           <a:prstGeom prst="rect">
@@ -4295,7 +4301,7 @@
         </p:nvSpPr>
         <p:spPr>
           <a:xfrm>
-            <a:off x="6191860" y="1719072"/>
+            <a:off x="6255868" y="1719072"/>
             <a:ext cx="5368900" cy="749808"/>
           </a:xfrm>
           <a:prstGeom prst="rect">
@@ -4320,7 +4326,7 @@
         </p:nvSpPr>
         <p:spPr>
           <a:xfrm>
-            <a:off x="6329020" y="1947672"/>
+            <a:off x="6393028" y="1947672"/>
             <a:ext cx="292608" cy="292608"/>
           </a:xfrm>
           <a:prstGeom prst="rect">
@@ -4340,7 +4346,7 @@
         </p:nvSpPr>
         <p:spPr>
           <a:xfrm>
-            <a:off x="6329020" y="1947672"/>
+            <a:off x="6393028" y="1947672"/>
             <a:ext cx="292608" cy="292608"/>
           </a:xfrm>
           <a:prstGeom prst="rect">
@@ -4379,7 +4385,7 @@
         </p:nvSpPr>
         <p:spPr>
           <a:xfrm>
-            <a:off x="6722212" y="1792224"/>
+            <a:off x="6786220" y="1792224"/>
             <a:ext cx="4710532" cy="603504"/>
           </a:xfrm>
           <a:prstGeom prst="rect">
@@ -4421,7 +4427,7 @@
         </p:nvSpPr>
         <p:spPr>
           <a:xfrm>
-            <a:off x="6191860" y="2542032"/>
+            <a:off x="6255868" y="2542032"/>
             <a:ext cx="5368900" cy="749808"/>
           </a:xfrm>
           <a:prstGeom prst="rect">
@@ -4446,7 +4452,7 @@
         </p:nvSpPr>
         <p:spPr>
           <a:xfrm>
-            <a:off x="6329020" y="2770632"/>
+            <a:off x="6393028" y="2770632"/>
             <a:ext cx="292608" cy="292608"/>
           </a:xfrm>
           <a:prstGeom prst="rect">
@@ -4466,7 +4472,7 @@
         </p:nvSpPr>
         <p:spPr>
           <a:xfrm>
-            <a:off x="6329020" y="2770632"/>
+            <a:off x="6393028" y="2770632"/>
             <a:ext cx="292608" cy="292608"/>
           </a:xfrm>
           <a:prstGeom prst="rect">
@@ -4505,7 +4511,7 @@
         </p:nvSpPr>
         <p:spPr>
           <a:xfrm>
-            <a:off x="6722212" y="2615184"/>
+            <a:off x="6786220" y="2615184"/>
             <a:ext cx="4710532" cy="603504"/>
           </a:xfrm>
           <a:prstGeom prst="rect">
@@ -4547,7 +4553,7 @@
         </p:nvSpPr>
         <p:spPr>
           <a:xfrm>
-            <a:off x="6191860" y="3364992"/>
+            <a:off x="6255868" y="3364992"/>
             <a:ext cx="5368900" cy="749808"/>
           </a:xfrm>
           <a:prstGeom prst="rect">
@@ -4572,7 +4578,7 @@
         </p:nvSpPr>
         <p:spPr>
           <a:xfrm>
-            <a:off x="6329020" y="3593592"/>
+            <a:off x="6393028" y="3593592"/>
             <a:ext cx="292608" cy="292608"/>
           </a:xfrm>
           <a:prstGeom prst="rect">
@@ -4592,7 +4598,7 @@
         </p:nvSpPr>
         <p:spPr>
           <a:xfrm>
-            <a:off x="6329020" y="3593592"/>
+            <a:off x="6393028" y="3593592"/>
             <a:ext cx="292608" cy="292608"/>
           </a:xfrm>
           <a:prstGeom prst="rect">
@@ -4631,7 +4637,7 @@
         </p:nvSpPr>
         <p:spPr>
           <a:xfrm>
-            <a:off x="6722212" y="3438144"/>
+            <a:off x="6786220" y="3438144"/>
             <a:ext cx="4710532" cy="603504"/>
           </a:xfrm>
           <a:prstGeom prst="rect">
@@ -4673,7 +4679,7 @@
         </p:nvSpPr>
         <p:spPr>
           <a:xfrm>
-            <a:off x="502920" y="5349240"/>
+            <a:off x="566928" y="5349240"/>
             <a:ext cx="11057839" cy="457200"/>
           </a:xfrm>
           <a:prstGeom prst="rect">
@@ -4693,7 +4699,7 @@
         </p:nvSpPr>
         <p:spPr>
           <a:xfrm>
-            <a:off x="685800" y="5422392"/>
+            <a:off x="749808" y="5422392"/>
             <a:ext cx="10692079" cy="310896"/>
           </a:xfrm>
           <a:prstGeom prst="rect">
@@ -4732,7 +4738,7 @@
         </p:nvSpPr>
         <p:spPr>
           <a:xfrm>
-            <a:off x="502920" y="6382512"/>
+            <a:off x="566928" y="6382512"/>
             <a:ext cx="7315200" cy="219456"/>
           </a:xfrm>
           <a:prstGeom prst="rect">
@@ -4771,7 +4777,7 @@
         </p:nvSpPr>
         <p:spPr>
           <a:xfrm>
-            <a:off x="10774375" y="6382512"/>
+            <a:off x="10710367" y="6382512"/>
             <a:ext cx="914400" cy="219456"/>
           </a:xfrm>
           <a:prstGeom prst="rect">
@@ -4842,7 +4848,7 @@
         </p:nvSpPr>
         <p:spPr>
           <a:xfrm>
-            <a:off x="502920" y="457200"/>
+            <a:off x="566928" y="457200"/>
             <a:ext cx="384048" cy="384048"/>
           </a:xfrm>
           <a:prstGeom prst="ellipse">
@@ -4862,7 +4868,7 @@
         </p:nvSpPr>
         <p:spPr>
           <a:xfrm>
-            <a:off x="502920" y="457200"/>
+            <a:off x="566928" y="457200"/>
             <a:ext cx="384048" cy="384048"/>
           </a:xfrm>
           <a:prstGeom prst="rect">
@@ -4901,7 +4907,7 @@
         </p:nvSpPr>
         <p:spPr>
           <a:xfrm>
-            <a:off x="1069848" y="457200"/>
+            <a:off x="1133856" y="457200"/>
             <a:ext cx="10490911" cy="182880"/>
           </a:xfrm>
           <a:prstGeom prst="rect">
@@ -4940,7 +4946,7 @@
         </p:nvSpPr>
         <p:spPr>
           <a:xfrm>
-            <a:off x="1069848" y="640080"/>
+            <a:off x="1133856" y="640080"/>
             <a:ext cx="10490911" cy="365760"/>
           </a:xfrm>
           <a:prstGeom prst="rect">
@@ -4950,7 +4956,9 @@
           <a:ln/>
         </p:spPr>
         <p:txBody>
-          <a:bodyPr wrap="square" lIns="0" tIns="0" rIns="0" bIns="0" rtlCol="0" anchor="ctr"/>
+          <a:bodyPr wrap="square" lIns="0" tIns="0" rIns="0" bIns="0" rtlCol="0" anchor="ctr">
+            <a:normAutofit/>
+          </a:bodyPr>
           <a:lstStyle/>
           <a:p>
             <a:pPr indent="0" marL="0">
@@ -4979,7 +4987,7 @@
         </p:nvSpPr>
         <p:spPr>
           <a:xfrm>
-            <a:off x="502920" y="1572768"/>
+            <a:off x="566928" y="1572768"/>
             <a:ext cx="11057839" cy="3200400"/>
           </a:xfrm>
           <a:prstGeom prst="roundRect">
@@ -5006,7 +5014,7 @@
         </p:nvSpPr>
         <p:spPr>
           <a:xfrm>
-            <a:off x="722376" y="1792224"/>
+            <a:off x="786384" y="1792224"/>
             <a:ext cx="438912" cy="438912"/>
           </a:xfrm>
           <a:prstGeom prst="ellipse">
@@ -5026,7 +5034,7 @@
         </p:nvSpPr>
         <p:spPr>
           <a:xfrm>
-            <a:off x="722376" y="1792224"/>
+            <a:off x="786384" y="1792224"/>
             <a:ext cx="438912" cy="438912"/>
           </a:xfrm>
           <a:prstGeom prst="rect">
@@ -5065,7 +5073,7 @@
         </p:nvSpPr>
         <p:spPr>
           <a:xfrm>
-            <a:off x="722376" y="2304288"/>
+            <a:off x="786384" y="2304288"/>
             <a:ext cx="10618927" cy="365760"/>
           </a:xfrm>
           <a:prstGeom prst="rect">
@@ -5104,7 +5112,7 @@
         </p:nvSpPr>
         <p:spPr>
           <a:xfrm>
-            <a:off x="722376" y="2761488"/>
+            <a:off x="786384" y="2761488"/>
             <a:ext cx="10618927" cy="1828800"/>
           </a:xfrm>
           <a:prstGeom prst="rect">
@@ -5160,7 +5168,7 @@
         </p:nvSpPr>
         <p:spPr>
           <a:xfrm>
-            <a:off x="502920" y="6382512"/>
+            <a:off x="566928" y="6382512"/>
             <a:ext cx="7315200" cy="219456"/>
           </a:xfrm>
           <a:prstGeom prst="rect">
@@ -5199,7 +5207,7 @@
         </p:nvSpPr>
         <p:spPr>
           <a:xfrm>
-            <a:off x="10774375" y="6382512"/>
+            <a:off x="10710367" y="6382512"/>
             <a:ext cx="914400" cy="219456"/>
           </a:xfrm>
           <a:prstGeom prst="rect">
@@ -5270,7 +5278,7 @@
         </p:nvSpPr>
         <p:spPr>
           <a:xfrm>
-            <a:off x="502920" y="457200"/>
+            <a:off x="566928" y="457200"/>
             <a:ext cx="384048" cy="384048"/>
           </a:xfrm>
           <a:prstGeom prst="ellipse">
@@ -5290,7 +5298,7 @@
         </p:nvSpPr>
         <p:spPr>
           <a:xfrm>
-            <a:off x="502920" y="457200"/>
+            <a:off x="566928" y="457200"/>
             <a:ext cx="384048" cy="384048"/>
           </a:xfrm>
           <a:prstGeom prst="rect">
@@ -5329,7 +5337,7 @@
         </p:nvSpPr>
         <p:spPr>
           <a:xfrm>
-            <a:off x="1069848" y="457200"/>
+            <a:off x="1133856" y="457200"/>
             <a:ext cx="10490911" cy="182880"/>
           </a:xfrm>
           <a:prstGeom prst="rect">
@@ -5368,7 +5376,7 @@
         </p:nvSpPr>
         <p:spPr>
           <a:xfrm>
-            <a:off x="1069848" y="658368"/>
+            <a:off x="1133856" y="658368"/>
             <a:ext cx="10490911" cy="420624"/>
           </a:xfrm>
           <a:prstGeom prst="rect">
@@ -5378,7 +5386,9 @@
           <a:ln/>
         </p:spPr>
         <p:txBody>
-          <a:bodyPr wrap="square" lIns="0" tIns="0" rIns="0" bIns="0" rtlCol="0" anchor="ctr"/>
+          <a:bodyPr wrap="square" lIns="0" tIns="0" rIns="0" bIns="0" rtlCol="0" anchor="ctr">
+            <a:normAutofit/>
+          </a:bodyPr>
           <a:lstStyle/>
           <a:p>
             <a:pPr indent="0" marL="0">
@@ -5407,7 +5417,7 @@
         </p:nvSpPr>
         <p:spPr>
           <a:xfrm>
-            <a:off x="502920" y="1463040"/>
+            <a:off x="566928" y="1463040"/>
             <a:ext cx="3588410" cy="658368"/>
           </a:xfrm>
           <a:prstGeom prst="roundRect">
@@ -5429,7 +5439,7 @@
         </p:nvSpPr>
         <p:spPr>
           <a:xfrm>
-            <a:off x="612648" y="1572768"/>
+            <a:off x="676656" y="1572768"/>
             <a:ext cx="438912" cy="438912"/>
           </a:xfrm>
           <a:prstGeom prst="ellipse">
@@ -5449,7 +5459,7 @@
         </p:nvSpPr>
         <p:spPr>
           <a:xfrm>
-            <a:off x="612648" y="1572768"/>
+            <a:off x="676656" y="1572768"/>
             <a:ext cx="438912" cy="438912"/>
           </a:xfrm>
           <a:prstGeom prst="rect">
@@ -5488,7 +5498,7 @@
         </p:nvSpPr>
         <p:spPr>
           <a:xfrm>
-            <a:off x="1161288" y="1554480"/>
+            <a:off x="1225296" y="1554480"/>
             <a:ext cx="2820314" cy="237744"/>
           </a:xfrm>
           <a:prstGeom prst="rect">
@@ -5527,7 +5537,7 @@
         </p:nvSpPr>
         <p:spPr>
           <a:xfrm>
-            <a:off x="1161288" y="1792224"/>
+            <a:off x="1225296" y="1792224"/>
             <a:ext cx="2820314" cy="256032"/>
           </a:xfrm>
           <a:prstGeom prst="rect">
@@ -5566,7 +5576,7 @@
         </p:nvSpPr>
         <p:spPr>
           <a:xfrm>
-            <a:off x="4091330" y="1600200"/>
+            <a:off x="4155338" y="1600200"/>
             <a:ext cx="146304" cy="384048"/>
           </a:xfrm>
           <a:prstGeom prst="rect">
@@ -5605,7 +5615,7 @@
         </p:nvSpPr>
         <p:spPr>
           <a:xfrm>
-            <a:off x="4237634" y="1463040"/>
+            <a:off x="4301642" y="1463040"/>
             <a:ext cx="3588410" cy="658368"/>
           </a:xfrm>
           <a:prstGeom prst="roundRect">
@@ -5627,7 +5637,7 @@
         </p:nvSpPr>
         <p:spPr>
           <a:xfrm>
-            <a:off x="4347362" y="1572768"/>
+            <a:off x="4411370" y="1572768"/>
             <a:ext cx="438912" cy="438912"/>
           </a:xfrm>
           <a:prstGeom prst="ellipse">
@@ -5647,7 +5657,7 @@
         </p:nvSpPr>
         <p:spPr>
           <a:xfrm>
-            <a:off x="4347362" y="1572768"/>
+            <a:off x="4411370" y="1572768"/>
             <a:ext cx="438912" cy="438912"/>
           </a:xfrm>
           <a:prstGeom prst="rect">
@@ -5686,7 +5696,7 @@
         </p:nvSpPr>
         <p:spPr>
           <a:xfrm>
-            <a:off x="4896002" y="1554480"/>
+            <a:off x="4960010" y="1554480"/>
             <a:ext cx="2820314" cy="237744"/>
           </a:xfrm>
           <a:prstGeom prst="rect">
@@ -5725,7 +5735,7 @@
         </p:nvSpPr>
         <p:spPr>
           <a:xfrm>
-            <a:off x="4896002" y="1792224"/>
+            <a:off x="4960010" y="1792224"/>
             <a:ext cx="2820314" cy="256032"/>
           </a:xfrm>
           <a:prstGeom prst="rect">
@@ -5764,7 +5774,7 @@
         </p:nvSpPr>
         <p:spPr>
           <a:xfrm>
-            <a:off x="7826045" y="1600200"/>
+            <a:off x="7890053" y="1600200"/>
             <a:ext cx="146304" cy="384048"/>
           </a:xfrm>
           <a:prstGeom prst="rect">
@@ -5803,7 +5813,7 @@
         </p:nvSpPr>
         <p:spPr>
           <a:xfrm>
-            <a:off x="7972349" y="1463040"/>
+            <a:off x="8036357" y="1463040"/>
             <a:ext cx="3588410" cy="658368"/>
           </a:xfrm>
           <a:prstGeom prst="roundRect">
@@ -5825,7 +5835,7 @@
         </p:nvSpPr>
         <p:spPr>
           <a:xfrm>
-            <a:off x="8082077" y="1572768"/>
+            <a:off x="8146085" y="1572768"/>
             <a:ext cx="438912" cy="438912"/>
           </a:xfrm>
           <a:prstGeom prst="ellipse">
@@ -5845,7 +5855,7 @@
         </p:nvSpPr>
         <p:spPr>
           <a:xfrm>
-            <a:off x="8082077" y="1572768"/>
+            <a:off x="8146085" y="1572768"/>
             <a:ext cx="438912" cy="438912"/>
           </a:xfrm>
           <a:prstGeom prst="rect">
@@ -5884,7 +5894,7 @@
         </p:nvSpPr>
         <p:spPr>
           <a:xfrm>
-            <a:off x="8630717" y="1554480"/>
+            <a:off x="8694725" y="1554480"/>
             <a:ext cx="2820314" cy="237744"/>
           </a:xfrm>
           <a:prstGeom prst="rect">
@@ -5923,7 +5933,7 @@
         </p:nvSpPr>
         <p:spPr>
           <a:xfrm>
-            <a:off x="8630717" y="1792224"/>
+            <a:off x="8694725" y="1792224"/>
             <a:ext cx="2820314" cy="256032"/>
           </a:xfrm>
           <a:prstGeom prst="rect">
@@ -5962,7 +5972,7 @@
         </p:nvSpPr>
         <p:spPr>
           <a:xfrm>
-            <a:off x="502920" y="2395728"/>
+            <a:off x="566928" y="2395728"/>
             <a:ext cx="5486400" cy="237744"/>
           </a:xfrm>
           <a:prstGeom prst="rect">
@@ -6001,7 +6011,7 @@
         </p:nvSpPr>
         <p:spPr>
           <a:xfrm>
-            <a:off x="502920" y="2724912"/>
+            <a:off x="566928" y="2724912"/>
             <a:ext cx="1280160" cy="292608"/>
           </a:xfrm>
           <a:prstGeom prst="roundRect">
@@ -6023,7 +6033,7 @@
         </p:nvSpPr>
         <p:spPr>
           <a:xfrm>
-            <a:off x="502920" y="2724912"/>
+            <a:off x="566928" y="2724912"/>
             <a:ext cx="1280160" cy="292608"/>
           </a:xfrm>
           <a:prstGeom prst="rect">
@@ -6062,7 +6072,7 @@
         </p:nvSpPr>
         <p:spPr>
           <a:xfrm>
-            <a:off x="1929384" y="2706624"/>
+            <a:off x="1993392" y="2706624"/>
             <a:ext cx="3840480" cy="329184"/>
           </a:xfrm>
           <a:prstGeom prst="rect">
@@ -6101,7 +6111,7 @@
         </p:nvSpPr>
         <p:spPr>
           <a:xfrm>
-            <a:off x="502920" y="3127248"/>
+            <a:off x="566928" y="3127248"/>
             <a:ext cx="1280160" cy="292608"/>
           </a:xfrm>
           <a:prstGeom prst="roundRect">
@@ -6123,7 +6133,7 @@
         </p:nvSpPr>
         <p:spPr>
           <a:xfrm>
-            <a:off x="502920" y="3127248"/>
+            <a:off x="566928" y="3127248"/>
             <a:ext cx="1280160" cy="292608"/>
           </a:xfrm>
           <a:prstGeom prst="rect">
@@ -6162,7 +6172,7 @@
         </p:nvSpPr>
         <p:spPr>
           <a:xfrm>
-            <a:off x="1929384" y="3108960"/>
+            <a:off x="1993392" y="3108960"/>
             <a:ext cx="3840480" cy="329184"/>
           </a:xfrm>
           <a:prstGeom prst="rect">
@@ -6201,7 +6211,7 @@
         </p:nvSpPr>
         <p:spPr>
           <a:xfrm>
-            <a:off x="502920" y="3529584"/>
+            <a:off x="566928" y="3529584"/>
             <a:ext cx="1280160" cy="292608"/>
           </a:xfrm>
           <a:prstGeom prst="roundRect">
@@ -6223,7 +6233,7 @@
         </p:nvSpPr>
         <p:spPr>
           <a:xfrm>
-            <a:off x="502920" y="3529584"/>
+            <a:off x="566928" y="3529584"/>
             <a:ext cx="1280160" cy="292608"/>
           </a:xfrm>
           <a:prstGeom prst="rect">
@@ -6262,7 +6272,7 @@
         </p:nvSpPr>
         <p:spPr>
           <a:xfrm>
-            <a:off x="1929384" y="3511296"/>
+            <a:off x="1993392" y="3511296"/>
             <a:ext cx="3840480" cy="329184"/>
           </a:xfrm>
           <a:prstGeom prst="rect">
@@ -6301,7 +6311,7 @@
         </p:nvSpPr>
         <p:spPr>
           <a:xfrm>
-            <a:off x="502920" y="3931920"/>
+            <a:off x="566928" y="3931920"/>
             <a:ext cx="1280160" cy="292608"/>
           </a:xfrm>
           <a:prstGeom prst="roundRect">
@@ -6323,7 +6333,7 @@
         </p:nvSpPr>
         <p:spPr>
           <a:xfrm>
-            <a:off x="502920" y="3931920"/>
+            <a:off x="566928" y="3931920"/>
             <a:ext cx="1280160" cy="292608"/>
           </a:xfrm>
           <a:prstGeom prst="rect">
@@ -6362,7 +6372,7 @@
         </p:nvSpPr>
         <p:spPr>
           <a:xfrm>
-            <a:off x="1929384" y="3913632"/>
+            <a:off x="1993392" y="3913632"/>
             <a:ext cx="3840480" cy="329184"/>
           </a:xfrm>
           <a:prstGeom prst="rect">
@@ -6401,7 +6411,7 @@
         </p:nvSpPr>
         <p:spPr>
           <a:xfrm>
-            <a:off x="502920" y="4334256"/>
+            <a:off x="566928" y="4334256"/>
             <a:ext cx="1280160" cy="292608"/>
           </a:xfrm>
           <a:prstGeom prst="roundRect">
@@ -6423,7 +6433,7 @@
         </p:nvSpPr>
         <p:spPr>
           <a:xfrm>
-            <a:off x="502920" y="4334256"/>
+            <a:off x="566928" y="4334256"/>
             <a:ext cx="1280160" cy="292608"/>
           </a:xfrm>
           <a:prstGeom prst="rect">
@@ -6462,7 +6472,7 @@
         </p:nvSpPr>
         <p:spPr>
           <a:xfrm>
-            <a:off x="1929384" y="4315968"/>
+            <a:off x="1993392" y="4315968"/>
             <a:ext cx="3840480" cy="329184"/>
           </a:xfrm>
           <a:prstGeom prst="rect">
@@ -6604,7 +6614,7 @@
         </p:nvSpPr>
         <p:spPr>
           <a:xfrm>
-            <a:off x="502920" y="5760720"/>
+            <a:off x="566928" y="5760720"/>
             <a:ext cx="11057839" cy="457200"/>
           </a:xfrm>
           <a:prstGeom prst="rect">
@@ -6624,7 +6634,7 @@
         </p:nvSpPr>
         <p:spPr>
           <a:xfrm>
-            <a:off x="685800" y="5806440"/>
+            <a:off x="749808" y="5806440"/>
             <a:ext cx="10692079" cy="365760"/>
           </a:xfrm>
           <a:prstGeom prst="rect">
@@ -6663,7 +6673,7 @@
         </p:nvSpPr>
         <p:spPr>
           <a:xfrm>
-            <a:off x="502920" y="6382512"/>
+            <a:off x="566928" y="6382512"/>
             <a:ext cx="7315200" cy="219456"/>
           </a:xfrm>
           <a:prstGeom prst="rect">
@@ -6702,7 +6712,7 @@
         </p:nvSpPr>
         <p:spPr>
           <a:xfrm>
-            <a:off x="10774375" y="6382512"/>
+            <a:off x="10710367" y="6382512"/>
             <a:ext cx="914400" cy="219456"/>
           </a:xfrm>
           <a:prstGeom prst="rect">
@@ -6773,7 +6783,7 @@
         </p:nvSpPr>
         <p:spPr>
           <a:xfrm>
-            <a:off x="502920" y="457200"/>
+            <a:off x="566928" y="457200"/>
             <a:ext cx="384048" cy="384048"/>
           </a:xfrm>
           <a:prstGeom prst="ellipse">
@@ -6793,7 +6803,7 @@
         </p:nvSpPr>
         <p:spPr>
           <a:xfrm>
-            <a:off x="502920" y="457200"/>
+            <a:off x="566928" y="457200"/>
             <a:ext cx="384048" cy="384048"/>
           </a:xfrm>
           <a:prstGeom prst="rect">
@@ -6832,7 +6842,7 @@
         </p:nvSpPr>
         <p:spPr>
           <a:xfrm>
-            <a:off x="1069848" y="457200"/>
+            <a:off x="1133856" y="457200"/>
             <a:ext cx="10490911" cy="182880"/>
           </a:xfrm>
           <a:prstGeom prst="rect">
@@ -6871,7 +6881,7 @@
         </p:nvSpPr>
         <p:spPr>
           <a:xfrm>
-            <a:off x="1069848" y="640080"/>
+            <a:off x="1133856" y="640080"/>
             <a:ext cx="10490911" cy="365760"/>
           </a:xfrm>
           <a:prstGeom prst="rect">
@@ -6881,7 +6891,9 @@
           <a:ln/>
         </p:spPr>
         <p:txBody>
-          <a:bodyPr wrap="square" lIns="0" tIns="0" rIns="0" bIns="0" rtlCol="0" anchor="ctr"/>
+          <a:bodyPr wrap="square" lIns="0" tIns="0" rIns="0" bIns="0" rtlCol="0" anchor="ctr">
+            <a:normAutofit/>
+          </a:bodyPr>
           <a:lstStyle/>
           <a:p>
             <a:pPr indent="0" marL="0">
@@ -6910,17 +6922,19 @@
         </p:nvSpPr>
         <p:spPr>
           <a:xfrm>
-            <a:off x="502920" y="1188720"/>
-            <a:ext cx="11057839" cy="457200"/>
-          </a:xfrm>
-          <a:prstGeom prst="rect">
-            <a:avLst/>
-          </a:prstGeom>
-          <a:noFill/>
-          <a:ln/>
-        </p:spPr>
-        <p:txBody>
-          <a:bodyPr wrap="square" rtlCol="0" anchor="ctr"/>
+            <a:off x="566928" y="1188720"/>
+            <a:ext cx="11057839" cy="219075"/>
+          </a:xfrm>
+          <a:prstGeom prst="rect">
+            <a:avLst/>
+          </a:prstGeom>
+          <a:noFill/>
+          <a:ln/>
+        </p:spPr>
+        <p:txBody>
+          <a:bodyPr wrap="square" lIns="0" tIns="0" rIns="0" bIns="0" rtlCol="0" anchor="ctr">
+            <a:normAutofit/>
+          </a:bodyPr>
           <a:lstStyle/>
           <a:p>
             <a:pPr indent="0" marL="0">
@@ -6949,7 +6963,7 @@
         </p:nvSpPr>
         <p:spPr>
           <a:xfrm>
-            <a:off x="502920" y="1691640"/>
+            <a:off x="566928" y="1480947"/>
             <a:ext cx="11057839" cy="0"/>
           </a:xfrm>
           <a:prstGeom prst="line">
@@ -6972,7 +6986,7 @@
         </p:nvSpPr>
         <p:spPr>
           <a:xfrm>
-            <a:off x="502920" y="1965960"/>
+            <a:off x="566928" y="1618107"/>
             <a:ext cx="2641016" cy="960120"/>
           </a:xfrm>
           <a:prstGeom prst="roundRect">
@@ -6999,7 +7013,7 @@
         </p:nvSpPr>
         <p:spPr>
           <a:xfrm>
-            <a:off x="667512" y="2093976"/>
+            <a:off x="731520" y="1746123"/>
             <a:ext cx="2311832" cy="201168"/>
           </a:xfrm>
           <a:prstGeom prst="rect">
@@ -7009,7 +7023,9 @@
           <a:ln/>
         </p:spPr>
         <p:txBody>
-          <a:bodyPr wrap="square" lIns="0" tIns="0" rIns="0" bIns="0" rtlCol="0" anchor="ctr"/>
+          <a:bodyPr wrap="square" lIns="0" tIns="0" rIns="0" bIns="0" rtlCol="0" anchor="ctr">
+            <a:normAutofit/>
+          </a:bodyPr>
           <a:lstStyle/>
           <a:p>
             <a:pPr indent="0" marL="0">
@@ -7038,8 +7054,8 @@
         </p:nvSpPr>
         <p:spPr>
           <a:xfrm>
-            <a:off x="667512" y="2313432"/>
-            <a:ext cx="2311832" cy="274320"/>
+            <a:off x="731520" y="1965579"/>
+            <a:ext cx="2311832" cy="279400"/>
           </a:xfrm>
           <a:prstGeom prst="rect">
             <a:avLst/>
@@ -7082,7 +7098,7 @@
         </p:nvSpPr>
         <p:spPr>
           <a:xfrm>
-            <a:off x="3308528" y="1965960"/>
+            <a:off x="3372536" y="1618107"/>
             <a:ext cx="2641016" cy="960120"/>
           </a:xfrm>
           <a:prstGeom prst="roundRect">
@@ -7109,7 +7125,7 @@
         </p:nvSpPr>
         <p:spPr>
           <a:xfrm>
-            <a:off x="3473120" y="2093976"/>
+            <a:off x="3537128" y="1746123"/>
             <a:ext cx="2311832" cy="201168"/>
           </a:xfrm>
           <a:prstGeom prst="rect">
@@ -7119,7 +7135,9 @@
           <a:ln/>
         </p:spPr>
         <p:txBody>
-          <a:bodyPr wrap="square" lIns="0" tIns="0" rIns="0" bIns="0" rtlCol="0" anchor="ctr"/>
+          <a:bodyPr wrap="square" lIns="0" tIns="0" rIns="0" bIns="0" rtlCol="0" anchor="ctr">
+            <a:normAutofit/>
+          </a:bodyPr>
           <a:lstStyle/>
           <a:p>
             <a:pPr indent="0" marL="0">
@@ -7148,8 +7166,8 @@
         </p:nvSpPr>
         <p:spPr>
           <a:xfrm>
-            <a:off x="3473120" y="2313432"/>
-            <a:ext cx="2311832" cy="274320"/>
+            <a:off x="3537128" y="1965579"/>
+            <a:ext cx="2311832" cy="279400"/>
           </a:xfrm>
           <a:prstGeom prst="rect">
             <a:avLst/>
@@ -7192,7 +7210,7 @@
         </p:nvSpPr>
         <p:spPr>
           <a:xfrm>
-            <a:off x="6114136" y="1965960"/>
+            <a:off x="6178144" y="1618107"/>
             <a:ext cx="2641016" cy="960120"/>
           </a:xfrm>
           <a:prstGeom prst="roundRect">
@@ -7219,7 +7237,7 @@
         </p:nvSpPr>
         <p:spPr>
           <a:xfrm>
-            <a:off x="6278728" y="2093976"/>
+            <a:off x="6342736" y="1746123"/>
             <a:ext cx="2311832" cy="201168"/>
           </a:xfrm>
           <a:prstGeom prst="rect">
@@ -7229,7 +7247,9 @@
           <a:ln/>
         </p:spPr>
         <p:txBody>
-          <a:bodyPr wrap="square" lIns="0" tIns="0" rIns="0" bIns="0" rtlCol="0" anchor="ctr"/>
+          <a:bodyPr wrap="square" lIns="0" tIns="0" rIns="0" bIns="0" rtlCol="0" anchor="ctr">
+            <a:normAutofit/>
+          </a:bodyPr>
           <a:lstStyle/>
           <a:p>
             <a:pPr indent="0" marL="0">
@@ -7258,8 +7278,8 @@
         </p:nvSpPr>
         <p:spPr>
           <a:xfrm>
-            <a:off x="6278728" y="2313432"/>
-            <a:ext cx="2311832" cy="274320"/>
+            <a:off x="6342736" y="1965579"/>
+            <a:ext cx="2311832" cy="279400"/>
           </a:xfrm>
           <a:prstGeom prst="rect">
             <a:avLst/>
@@ -7302,7 +7322,7 @@
         </p:nvSpPr>
         <p:spPr>
           <a:xfrm>
-            <a:off x="8919743" y="1965960"/>
+            <a:off x="8983751" y="1618107"/>
             <a:ext cx="2641016" cy="960120"/>
           </a:xfrm>
           <a:prstGeom prst="roundRect">
@@ -7329,7 +7349,7 @@
         </p:nvSpPr>
         <p:spPr>
           <a:xfrm>
-            <a:off x="9084335" y="2093976"/>
+            <a:off x="9148343" y="1746123"/>
             <a:ext cx="2311832" cy="201168"/>
           </a:xfrm>
           <a:prstGeom prst="rect">
@@ -7339,7 +7359,9 @@
           <a:ln/>
         </p:spPr>
         <p:txBody>
-          <a:bodyPr wrap="square" lIns="0" tIns="0" rIns="0" bIns="0" rtlCol="0" anchor="ctr"/>
+          <a:bodyPr wrap="square" lIns="0" tIns="0" rIns="0" bIns="0" rtlCol="0" anchor="ctr">
+            <a:normAutofit/>
+          </a:bodyPr>
           <a:lstStyle/>
           <a:p>
             <a:pPr indent="0" marL="0">
@@ -7368,8 +7390,8 @@
         </p:nvSpPr>
         <p:spPr>
           <a:xfrm>
-            <a:off x="9084335" y="2313432"/>
-            <a:ext cx="2311832" cy="274320"/>
+            <a:off x="9148343" y="1965579"/>
+            <a:ext cx="2311832" cy="279400"/>
           </a:xfrm>
           <a:prstGeom prst="rect">
             <a:avLst/>
@@ -7412,7 +7434,7 @@
         </p:nvSpPr>
         <p:spPr>
           <a:xfrm>
-            <a:off x="502920" y="3090672"/>
+            <a:off x="566928" y="2742819"/>
             <a:ext cx="2641016" cy="960120"/>
           </a:xfrm>
           <a:prstGeom prst="roundRect">
@@ -7439,7 +7461,7 @@
         </p:nvSpPr>
         <p:spPr>
           <a:xfrm>
-            <a:off x="667512" y="3218688"/>
+            <a:off x="731520" y="2870835"/>
             <a:ext cx="2311832" cy="201168"/>
           </a:xfrm>
           <a:prstGeom prst="rect">
@@ -7449,7 +7471,9 @@
           <a:ln/>
         </p:spPr>
         <p:txBody>
-          <a:bodyPr wrap="square" lIns="0" tIns="0" rIns="0" bIns="0" rtlCol="0" anchor="ctr"/>
+          <a:bodyPr wrap="square" lIns="0" tIns="0" rIns="0" bIns="0" rtlCol="0" anchor="ctr">
+            <a:normAutofit/>
+          </a:bodyPr>
           <a:lstStyle/>
           <a:p>
             <a:pPr indent="0" marL="0">
@@ -7478,8 +7502,8 @@
         </p:nvSpPr>
         <p:spPr>
           <a:xfrm>
-            <a:off x="667512" y="3438144"/>
-            <a:ext cx="2311832" cy="274320"/>
+            <a:off x="731520" y="3090291"/>
+            <a:ext cx="2311832" cy="279400"/>
           </a:xfrm>
           <a:prstGeom prst="rect">
             <a:avLst/>
@@ -7522,7 +7546,7 @@
         </p:nvSpPr>
         <p:spPr>
           <a:xfrm>
-            <a:off x="3308528" y="3090672"/>
+            <a:off x="3372536" y="2742819"/>
             <a:ext cx="2641016" cy="960120"/>
           </a:xfrm>
           <a:prstGeom prst="roundRect">
@@ -7549,7 +7573,7 @@
         </p:nvSpPr>
         <p:spPr>
           <a:xfrm>
-            <a:off x="3473120" y="3218688"/>
+            <a:off x="3537128" y="2870835"/>
             <a:ext cx="2311832" cy="201168"/>
           </a:xfrm>
           <a:prstGeom prst="rect">
@@ -7559,7 +7583,9 @@
           <a:ln/>
         </p:spPr>
         <p:txBody>
-          <a:bodyPr wrap="square" lIns="0" tIns="0" rIns="0" bIns="0" rtlCol="0" anchor="ctr"/>
+          <a:bodyPr wrap="square" lIns="0" tIns="0" rIns="0" bIns="0" rtlCol="0" anchor="ctr">
+            <a:normAutofit/>
+          </a:bodyPr>
           <a:lstStyle/>
           <a:p>
             <a:pPr indent="0" marL="0">
@@ -7588,8 +7614,8 @@
         </p:nvSpPr>
         <p:spPr>
           <a:xfrm>
-            <a:off x="3473120" y="3438144"/>
-            <a:ext cx="2311832" cy="274320"/>
+            <a:off x="3537128" y="3090291"/>
+            <a:ext cx="2311832" cy="279400"/>
           </a:xfrm>
           <a:prstGeom prst="rect">
             <a:avLst/>
@@ -7632,7 +7658,7 @@
         </p:nvSpPr>
         <p:spPr>
           <a:xfrm>
-            <a:off x="6114136" y="3090672"/>
+            <a:off x="6178144" y="2742819"/>
             <a:ext cx="2641016" cy="960120"/>
           </a:xfrm>
           <a:prstGeom prst="roundRect">
@@ -7659,7 +7685,7 @@
         </p:nvSpPr>
         <p:spPr>
           <a:xfrm>
-            <a:off x="6278728" y="3218688"/>
+            <a:off x="6342736" y="2870835"/>
             <a:ext cx="2311832" cy="201168"/>
           </a:xfrm>
           <a:prstGeom prst="rect">
@@ -7669,7 +7695,9 @@
           <a:ln/>
         </p:spPr>
         <p:txBody>
-          <a:bodyPr wrap="square" lIns="0" tIns="0" rIns="0" bIns="0" rtlCol="0" anchor="ctr"/>
+          <a:bodyPr wrap="square" lIns="0" tIns="0" rIns="0" bIns="0" rtlCol="0" anchor="ctr">
+            <a:normAutofit/>
+          </a:bodyPr>
           <a:lstStyle/>
           <a:p>
             <a:pPr indent="0" marL="0">
@@ -7698,8 +7726,8 @@
         </p:nvSpPr>
         <p:spPr>
           <a:xfrm>
-            <a:off x="6278728" y="3438144"/>
-            <a:ext cx="2311832" cy="274320"/>
+            <a:off x="6342736" y="3090291"/>
+            <a:ext cx="2311832" cy="279400"/>
           </a:xfrm>
           <a:prstGeom prst="rect">
             <a:avLst/>
@@ -7742,7 +7770,7 @@
         </p:nvSpPr>
         <p:spPr>
           <a:xfrm>
-            <a:off x="8919743" y="3090672"/>
+            <a:off x="8983751" y="2742819"/>
             <a:ext cx="2641016" cy="960120"/>
           </a:xfrm>
           <a:prstGeom prst="roundRect">
@@ -7769,7 +7797,7 @@
         </p:nvSpPr>
         <p:spPr>
           <a:xfrm>
-            <a:off x="9084335" y="3218688"/>
+            <a:off x="9148343" y="2870835"/>
             <a:ext cx="2311832" cy="201168"/>
           </a:xfrm>
           <a:prstGeom prst="rect">
@@ -7779,7 +7807,9 @@
           <a:ln/>
         </p:spPr>
         <p:txBody>
-          <a:bodyPr wrap="square" lIns="0" tIns="0" rIns="0" bIns="0" rtlCol="0" anchor="ctr"/>
+          <a:bodyPr wrap="square" lIns="0" tIns="0" rIns="0" bIns="0" rtlCol="0" anchor="ctr">
+            <a:normAutofit/>
+          </a:bodyPr>
           <a:lstStyle/>
           <a:p>
             <a:pPr indent="0" marL="0">
@@ -7808,8 +7838,8 @@
         </p:nvSpPr>
         <p:spPr>
           <a:xfrm>
-            <a:off x="9084335" y="3438144"/>
-            <a:ext cx="2311832" cy="274320"/>
+            <a:off x="9148343" y="3090291"/>
+            <a:ext cx="2311832" cy="279400"/>
           </a:xfrm>
           <a:prstGeom prst="rect">
             <a:avLst/>
@@ -7852,7 +7882,7 @@
         </p:nvSpPr>
         <p:spPr>
           <a:xfrm>
-            <a:off x="502920" y="4306824"/>
+            <a:off x="566928" y="3958971"/>
             <a:ext cx="11057839" cy="274320"/>
           </a:xfrm>
           <a:prstGeom prst="rect">
@@ -7891,12 +7921,12 @@
         </p:nvSpPr>
         <p:spPr>
           <a:xfrm>
-            <a:off x="502920" y="4636008"/>
-            <a:ext cx="11057839" cy="396240"/>
+            <a:off x="566928" y="4288155"/>
+            <a:ext cx="11057839" cy="512191"/>
           </a:xfrm>
           <a:prstGeom prst="roundRect">
             <a:avLst>
-              <a:gd name="adj" fmla="val 11538"/>
+              <a:gd name="adj" fmla="val 8926"/>
             </a:avLst>
           </a:prstGeom>
           <a:solidFill>
@@ -7918,12 +7948,12 @@
         </p:nvSpPr>
         <p:spPr>
           <a:xfrm>
-            <a:off x="612648" y="4709160"/>
-            <a:ext cx="411480" cy="249936"/>
+            <a:off x="676656" y="4361371"/>
+            <a:ext cx="411480" cy="365760"/>
           </a:xfrm>
           <a:prstGeom prst="roundRect">
             <a:avLst>
-              <a:gd name="adj" fmla="val 14634"/>
+              <a:gd name="adj" fmla="val 10000"/>
             </a:avLst>
           </a:prstGeom>
           <a:solidFill>
@@ -7945,8 +7975,8 @@
         </p:nvSpPr>
         <p:spPr>
           <a:xfrm>
-            <a:off x="612648" y="4709160"/>
-            <a:ext cx="411480" cy="249936"/>
+            <a:off x="676656" y="4361371"/>
+            <a:ext cx="411480" cy="365760"/>
           </a:xfrm>
           <a:prstGeom prst="rect">
             <a:avLst/>
@@ -7984,8 +8014,8 @@
         </p:nvSpPr>
         <p:spPr>
           <a:xfrm>
-            <a:off x="1143000" y="4672584"/>
-            <a:ext cx="10280599" cy="323088"/>
+            <a:off x="1207008" y="4324731"/>
+            <a:ext cx="10280599" cy="439039"/>
           </a:xfrm>
           <a:prstGeom prst="rect">
             <a:avLst/>
@@ -8001,7 +8031,7 @@
               <a:buNone/>
             </a:pPr>
             <a:r>
-              <a:rPr lang="en-US" sz="1000" dirty="0">
+              <a:rPr lang="en-US" sz="1150" dirty="0">
                 <a:solidFill>
                   <a:srgbClr val="10161F"/>
                 </a:solidFill>
@@ -8011,7 +8041,7 @@
               </a:rPr>
               <a:t>입지 가치: 대중교통 역세권 입지, 해당 권역 업무·상업 중심지 배후 수요 확보</a:t>
             </a:r>
-            <a:endParaRPr lang="en-US" sz="1000" dirty="0"/>
+            <a:endParaRPr lang="en-US" sz="1150" dirty="0"/>
           </a:p>
         </p:txBody>
       </p:sp>
@@ -8023,12 +8053,12 @@
         </p:nvSpPr>
         <p:spPr>
           <a:xfrm>
-            <a:off x="502920" y="5114544"/>
-            <a:ext cx="11057839" cy="396240"/>
+            <a:off x="566928" y="4882642"/>
+            <a:ext cx="11057839" cy="512191"/>
           </a:xfrm>
           <a:prstGeom prst="roundRect">
             <a:avLst>
-              <a:gd name="adj" fmla="val 11538"/>
+              <a:gd name="adj" fmla="val 8926"/>
             </a:avLst>
           </a:prstGeom>
           <a:solidFill>
@@ -8050,12 +8080,12 @@
         </p:nvSpPr>
         <p:spPr>
           <a:xfrm>
-            <a:off x="612648" y="5187696"/>
-            <a:ext cx="411480" cy="249936"/>
+            <a:off x="676656" y="4955858"/>
+            <a:ext cx="411480" cy="365760"/>
           </a:xfrm>
           <a:prstGeom prst="roundRect">
             <a:avLst>
-              <a:gd name="adj" fmla="val 14634"/>
+              <a:gd name="adj" fmla="val 10000"/>
             </a:avLst>
           </a:prstGeom>
           <a:solidFill>
@@ -8077,8 +8107,8 @@
         </p:nvSpPr>
         <p:spPr>
           <a:xfrm>
-            <a:off x="612648" y="5187696"/>
-            <a:ext cx="411480" cy="249936"/>
+            <a:off x="676656" y="4955858"/>
+            <a:ext cx="411480" cy="365760"/>
           </a:xfrm>
           <a:prstGeom prst="rect">
             <a:avLst/>
@@ -8116,8 +8146,8 @@
         </p:nvSpPr>
         <p:spPr>
           <a:xfrm>
-            <a:off x="1143000" y="5151120"/>
-            <a:ext cx="10280599" cy="323088"/>
+            <a:off x="1207008" y="4919218"/>
+            <a:ext cx="10280599" cy="439039"/>
           </a:xfrm>
           <a:prstGeom prst="rect">
             <a:avLst/>
@@ -8133,7 +8163,7 @@
               <a:buNone/>
             </a:pPr>
             <a:r>
-              <a:rPr lang="en-US" sz="1000" dirty="0">
+              <a:rPr lang="en-US" sz="1150" dirty="0">
                 <a:solidFill>
                   <a:srgbClr val="10161F"/>
                 </a:solidFill>
@@ -8143,7 +8173,7 @@
               </a:rPr>
               <a:t>자산 규모: 해당 권역 소재 단독 빌딩 매입 기회</a:t>
             </a:r>
-            <a:endParaRPr lang="en-US" sz="1000" dirty="0"/>
+            <a:endParaRPr lang="en-US" sz="1150" dirty="0"/>
           </a:p>
         </p:txBody>
       </p:sp>
@@ -8155,12 +8185,12 @@
         </p:nvSpPr>
         <p:spPr>
           <a:xfrm>
-            <a:off x="502920" y="5593080"/>
-            <a:ext cx="11057839" cy="396240"/>
+            <a:off x="566928" y="5477129"/>
+            <a:ext cx="11057839" cy="512191"/>
           </a:xfrm>
           <a:prstGeom prst="roundRect">
             <a:avLst>
-              <a:gd name="adj" fmla="val 11538"/>
+              <a:gd name="adj" fmla="val 8926"/>
             </a:avLst>
           </a:prstGeom>
           <a:solidFill>
@@ -8182,12 +8212,12 @@
         </p:nvSpPr>
         <p:spPr>
           <a:xfrm>
-            <a:off x="612648" y="5666232"/>
-            <a:ext cx="411480" cy="249936"/>
+            <a:off x="676656" y="5550345"/>
+            <a:ext cx="411480" cy="365760"/>
           </a:xfrm>
           <a:prstGeom prst="roundRect">
             <a:avLst>
-              <a:gd name="adj" fmla="val 14634"/>
+              <a:gd name="adj" fmla="val 10000"/>
             </a:avLst>
           </a:prstGeom>
           <a:solidFill>
@@ -8209,8 +8239,8 @@
         </p:nvSpPr>
         <p:spPr>
           <a:xfrm>
-            <a:off x="612648" y="5666232"/>
-            <a:ext cx="411480" cy="249936"/>
+            <a:off x="676656" y="5550345"/>
+            <a:ext cx="411480" cy="365760"/>
           </a:xfrm>
           <a:prstGeom prst="rect">
             <a:avLst/>
@@ -8248,8 +8278,8 @@
         </p:nvSpPr>
         <p:spPr>
           <a:xfrm>
-            <a:off x="1143000" y="5629656"/>
-            <a:ext cx="10280599" cy="323088"/>
+            <a:off x="1207008" y="5513705"/>
+            <a:ext cx="10280599" cy="439039"/>
           </a:xfrm>
           <a:prstGeom prst="rect">
             <a:avLst/>
@@ -8265,7 +8295,7 @@
               <a:buNone/>
             </a:pPr>
             <a:r>
-              <a:rPr lang="en-US" sz="1000" dirty="0">
+              <a:rPr lang="en-US" sz="1150" dirty="0">
                 <a:solidFill>
                   <a:srgbClr val="10161F"/>
                 </a:solidFill>
@@ -8275,7 +8305,7 @@
               </a:rPr>
               <a:t>수익 안정성: 안정적 임대수익 기반 투자 매물</a:t>
             </a:r>
-            <a:endParaRPr lang="en-US" sz="1000" dirty="0"/>
+            <a:endParaRPr lang="en-US" sz="1150" dirty="0"/>
           </a:p>
         </p:txBody>
       </p:sp>
@@ -8287,7 +8317,7 @@
         </p:nvSpPr>
         <p:spPr>
           <a:xfrm>
-            <a:off x="502920" y="6382512"/>
+            <a:off x="566928" y="6382512"/>
             <a:ext cx="7315200" cy="219456"/>
           </a:xfrm>
           <a:prstGeom prst="rect">
@@ -8326,7 +8356,7 @@
         </p:nvSpPr>
         <p:spPr>
           <a:xfrm>
-            <a:off x="10774375" y="6382512"/>
+            <a:off x="10710367" y="6382512"/>
             <a:ext cx="914400" cy="219456"/>
           </a:xfrm>
           <a:prstGeom prst="rect">
@@ -8397,7 +8427,7 @@
         </p:nvSpPr>
         <p:spPr>
           <a:xfrm>
-            <a:off x="502920" y="457200"/>
+            <a:off x="566928" y="457200"/>
             <a:ext cx="384048" cy="384048"/>
           </a:xfrm>
           <a:prstGeom prst="ellipse">
@@ -8417,7 +8447,7 @@
         </p:nvSpPr>
         <p:spPr>
           <a:xfrm>
-            <a:off x="502920" y="457200"/>
+            <a:off x="566928" y="457200"/>
             <a:ext cx="384048" cy="384048"/>
           </a:xfrm>
           <a:prstGeom prst="rect">
@@ -8456,7 +8486,7 @@
         </p:nvSpPr>
         <p:spPr>
           <a:xfrm>
-            <a:off x="1069848" y="457200"/>
+            <a:off x="1133856" y="457200"/>
             <a:ext cx="10490911" cy="182880"/>
           </a:xfrm>
           <a:prstGeom prst="rect">
@@ -8495,7 +8525,7 @@
         </p:nvSpPr>
         <p:spPr>
           <a:xfrm>
-            <a:off x="1069848" y="640080"/>
+            <a:off x="1133856" y="640080"/>
             <a:ext cx="10490911" cy="365760"/>
           </a:xfrm>
           <a:prstGeom prst="rect">
@@ -8505,7 +8535,9 @@
           <a:ln/>
         </p:spPr>
         <p:txBody>
-          <a:bodyPr wrap="square" lIns="0" tIns="0" rIns="0" bIns="0" rtlCol="0" anchor="ctr"/>
+          <a:bodyPr wrap="square" lIns="0" tIns="0" rIns="0" bIns="0" rtlCol="0" anchor="ctr">
+            <a:normAutofit/>
+          </a:bodyPr>
           <a:lstStyle/>
           <a:p>
             <a:pPr indent="0" marL="0">
@@ -8542,7 +8574,7 @@
         </p:blipFill>
         <p:spPr>
           <a:xfrm>
-            <a:off x="502920" y="1481328"/>
+            <a:off x="566928" y="1481328"/>
             <a:ext cx="5120640" cy="4114800"/>
           </a:xfrm>
           <a:prstGeom prst="rect">
@@ -8558,7 +8590,7 @@
         </p:nvSpPr>
         <p:spPr>
           <a:xfrm>
-            <a:off x="5989320" y="1481328"/>
+            <a:off x="6053328" y="1481328"/>
             <a:ext cx="1560003" cy="457200"/>
           </a:xfrm>
           <a:prstGeom prst="rect">
@@ -8568,7 +8600,9 @@
           <a:ln/>
         </p:spPr>
         <p:txBody>
-          <a:bodyPr wrap="square" lIns="0" tIns="0" rIns="0" bIns="0" rtlCol="0" anchor="ctr"/>
+          <a:bodyPr wrap="square" lIns="0" tIns="0" rIns="0" bIns="0" rtlCol="0" anchor="ctr">
+            <a:normAutofit/>
+          </a:bodyPr>
           <a:lstStyle/>
           <a:p>
             <a:pPr indent="0" marL="0">
@@ -8600,7 +8634,7 @@
         </p:nvSpPr>
         <p:spPr>
           <a:xfrm>
-            <a:off x="7549323" y="1481328"/>
+            <a:off x="7613331" y="1481328"/>
             <a:ext cx="4011436" cy="457200"/>
           </a:xfrm>
           <a:prstGeom prst="rect">
@@ -8610,7 +8644,9 @@
           <a:ln/>
         </p:spPr>
         <p:txBody>
-          <a:bodyPr wrap="square" lIns="0" tIns="0" rIns="0" bIns="0" rtlCol="0" anchor="ctr"/>
+          <a:bodyPr wrap="square" lIns="0" tIns="0" rIns="0" bIns="0" rtlCol="0" anchor="ctr">
+            <a:normAutofit/>
+          </a:bodyPr>
           <a:lstStyle/>
           <a:p>
             <a:pPr indent="0" marL="0">
@@ -8642,7 +8678,7 @@
         </p:nvSpPr>
         <p:spPr>
           <a:xfrm>
-            <a:off x="5989320" y="1938528"/>
+            <a:off x="6053328" y="1938528"/>
             <a:ext cx="5571439" cy="0"/>
           </a:xfrm>
           <a:prstGeom prst="line">
@@ -8665,7 +8701,7 @@
         </p:nvSpPr>
         <p:spPr>
           <a:xfrm>
-            <a:off x="5989320" y="1938528"/>
+            <a:off x="6053328" y="1938528"/>
             <a:ext cx="1560003" cy="457200"/>
           </a:xfrm>
           <a:prstGeom prst="rect">
@@ -8675,7 +8711,9 @@
           <a:ln/>
         </p:spPr>
         <p:txBody>
-          <a:bodyPr wrap="square" lIns="0" tIns="0" rIns="0" bIns="0" rtlCol="0" anchor="ctr"/>
+          <a:bodyPr wrap="square" lIns="0" tIns="0" rIns="0" bIns="0" rtlCol="0" anchor="ctr">
+            <a:normAutofit/>
+          </a:bodyPr>
           <a:lstStyle/>
           <a:p>
             <a:pPr indent="0" marL="0">
@@ -8707,7 +8745,7 @@
         </p:nvSpPr>
         <p:spPr>
           <a:xfrm>
-            <a:off x="7549323" y="1938528"/>
+            <a:off x="7613331" y="1938528"/>
             <a:ext cx="4011436" cy="457200"/>
           </a:xfrm>
           <a:prstGeom prst="rect">
@@ -8717,7 +8755,9 @@
           <a:ln/>
         </p:spPr>
         <p:txBody>
-          <a:bodyPr wrap="square" lIns="0" tIns="0" rIns="0" bIns="0" rtlCol="0" anchor="ctr"/>
+          <a:bodyPr wrap="square" lIns="0" tIns="0" rIns="0" bIns="0" rtlCol="0" anchor="ctr">
+            <a:normAutofit/>
+          </a:bodyPr>
           <a:lstStyle/>
           <a:p>
             <a:pPr indent="0" marL="0">
@@ -8749,7 +8789,7 @@
         </p:nvSpPr>
         <p:spPr>
           <a:xfrm>
-            <a:off x="5989320" y="2505456"/>
+            <a:off x="6053328" y="2505456"/>
             <a:ext cx="5571439" cy="658368"/>
           </a:xfrm>
           <a:prstGeom prst="roundRect">
@@ -8771,7 +8811,7 @@
         </p:nvSpPr>
         <p:spPr>
           <a:xfrm>
-            <a:off x="5989320" y="2560320"/>
+            <a:off x="6053328" y="2560320"/>
             <a:ext cx="36576" cy="548640"/>
           </a:xfrm>
           <a:prstGeom prst="rect">
@@ -8791,7 +8831,7 @@
         </p:nvSpPr>
         <p:spPr>
           <a:xfrm>
-            <a:off x="6135624" y="2596896"/>
+            <a:off x="6199632" y="2596896"/>
             <a:ext cx="5315407" cy="201168"/>
           </a:xfrm>
           <a:prstGeom prst="rect">
@@ -8830,7 +8870,7 @@
         </p:nvSpPr>
         <p:spPr>
           <a:xfrm>
-            <a:off x="6135624" y="2798064"/>
+            <a:off x="6199632" y="2798064"/>
             <a:ext cx="5315407" cy="329184"/>
           </a:xfrm>
           <a:prstGeom prst="rect">
@@ -8873,7 +8913,7 @@
         </p:nvSpPr>
         <p:spPr>
           <a:xfrm>
-            <a:off x="502920" y="6382512"/>
+            <a:off x="566928" y="6382512"/>
             <a:ext cx="7315200" cy="219456"/>
           </a:xfrm>
           <a:prstGeom prst="rect">
@@ -8912,7 +8952,7 @@
         </p:nvSpPr>
         <p:spPr>
           <a:xfrm>
-            <a:off x="10774375" y="6382512"/>
+            <a:off x="10710367" y="6382512"/>
             <a:ext cx="914400" cy="219456"/>
           </a:xfrm>
           <a:prstGeom prst="rect">
@@ -8983,7 +9023,7 @@
         </p:nvSpPr>
         <p:spPr>
           <a:xfrm>
-            <a:off x="502920" y="457200"/>
+            <a:off x="566928" y="457200"/>
             <a:ext cx="384048" cy="384048"/>
           </a:xfrm>
           <a:prstGeom prst="ellipse">
@@ -9003,7 +9043,7 @@
         </p:nvSpPr>
         <p:spPr>
           <a:xfrm>
-            <a:off x="502920" y="457200"/>
+            <a:off x="566928" y="457200"/>
             <a:ext cx="384048" cy="384048"/>
           </a:xfrm>
           <a:prstGeom prst="rect">
@@ -9042,7 +9082,7 @@
         </p:nvSpPr>
         <p:spPr>
           <a:xfrm>
-            <a:off x="1069848" y="457200"/>
+            <a:off x="1133856" y="457200"/>
             <a:ext cx="10490911" cy="182880"/>
           </a:xfrm>
           <a:prstGeom prst="rect">
@@ -9081,7 +9121,7 @@
         </p:nvSpPr>
         <p:spPr>
           <a:xfrm>
-            <a:off x="1069848" y="640080"/>
+            <a:off x="1133856" y="640080"/>
             <a:ext cx="10490911" cy="365760"/>
           </a:xfrm>
           <a:prstGeom prst="rect">
@@ -9091,7 +9131,9 @@
           <a:ln/>
         </p:spPr>
         <p:txBody>
-          <a:bodyPr wrap="square" lIns="0" tIns="0" rIns="0" bIns="0" rtlCol="0" anchor="ctr"/>
+          <a:bodyPr wrap="square" lIns="0" tIns="0" rIns="0" bIns="0" rtlCol="0" anchor="ctr">
+            <a:normAutofit/>
+          </a:bodyPr>
           <a:lstStyle/>
           <a:p>
             <a:pPr indent="0" marL="0">
@@ -9120,7 +9162,7 @@
         </p:nvSpPr>
         <p:spPr>
           <a:xfrm>
-            <a:off x="502920" y="1371600"/>
+            <a:off x="566928" y="1371600"/>
             <a:ext cx="6858000" cy="237744"/>
           </a:xfrm>
           <a:prstGeom prst="rect">
@@ -9159,7 +9201,7 @@
         </p:nvSpPr>
         <p:spPr>
           <a:xfrm>
-            <a:off x="502920" y="1645920"/>
+            <a:off x="566928" y="1645920"/>
             <a:ext cx="1920240" cy="402336"/>
           </a:xfrm>
           <a:prstGeom prst="rect">
@@ -9169,7 +9211,9 @@
           <a:ln/>
         </p:spPr>
         <p:txBody>
-          <a:bodyPr wrap="square" lIns="0" tIns="0" rIns="0" bIns="0" rtlCol="0" anchor="ctr"/>
+          <a:bodyPr wrap="square" lIns="0" tIns="0" rIns="0" bIns="0" rtlCol="0" anchor="ctr">
+            <a:normAutofit/>
+          </a:bodyPr>
           <a:lstStyle/>
           <a:p>
             <a:pPr indent="0" marL="0">
@@ -9201,7 +9245,7 @@
         </p:nvSpPr>
         <p:spPr>
           <a:xfrm>
-            <a:off x="2423160" y="1645920"/>
+            <a:off x="2487168" y="1645920"/>
             <a:ext cx="4937760" cy="402336"/>
           </a:xfrm>
           <a:prstGeom prst="rect">
@@ -9211,7 +9255,9 @@
           <a:ln/>
         </p:spPr>
         <p:txBody>
-          <a:bodyPr wrap="square" lIns="0" tIns="0" rIns="0" bIns="0" rtlCol="0" anchor="ctr"/>
+          <a:bodyPr wrap="square" lIns="0" tIns="0" rIns="0" bIns="0" rtlCol="0" anchor="ctr">
+            <a:normAutofit/>
+          </a:bodyPr>
           <a:lstStyle/>
           <a:p>
             <a:pPr indent="0" marL="0">
@@ -9243,7 +9289,7 @@
         </p:nvSpPr>
         <p:spPr>
           <a:xfrm>
-            <a:off x="502920" y="2048256"/>
+            <a:off x="566928" y="2048256"/>
             <a:ext cx="6858000" cy="0"/>
           </a:xfrm>
           <a:prstGeom prst="line">
@@ -9266,7 +9312,7 @@
         </p:nvSpPr>
         <p:spPr>
           <a:xfrm>
-            <a:off x="502920" y="2048256"/>
+            <a:off x="566928" y="2048256"/>
             <a:ext cx="1920240" cy="402336"/>
           </a:xfrm>
           <a:prstGeom prst="rect">
@@ -9276,7 +9322,9 @@
           <a:ln/>
         </p:spPr>
         <p:txBody>
-          <a:bodyPr wrap="square" lIns="0" tIns="0" rIns="0" bIns="0" rtlCol="0" anchor="ctr"/>
+          <a:bodyPr wrap="square" lIns="0" tIns="0" rIns="0" bIns="0" rtlCol="0" anchor="ctr">
+            <a:normAutofit/>
+          </a:bodyPr>
           <a:lstStyle/>
           <a:p>
             <a:pPr indent="0" marL="0">
@@ -9308,7 +9356,7 @@
         </p:nvSpPr>
         <p:spPr>
           <a:xfrm>
-            <a:off x="2423160" y="2048256"/>
+            <a:off x="2487168" y="2048256"/>
             <a:ext cx="4937760" cy="402336"/>
           </a:xfrm>
           <a:prstGeom prst="rect">
@@ -9318,7 +9366,9 @@
           <a:ln/>
         </p:spPr>
         <p:txBody>
-          <a:bodyPr wrap="square" lIns="0" tIns="0" rIns="0" bIns="0" rtlCol="0" anchor="ctr"/>
+          <a:bodyPr wrap="square" lIns="0" tIns="0" rIns="0" bIns="0" rtlCol="0" anchor="ctr">
+            <a:normAutofit/>
+          </a:bodyPr>
           <a:lstStyle/>
           <a:p>
             <a:pPr indent="0" marL="0">
@@ -9350,7 +9400,7 @@
         </p:nvSpPr>
         <p:spPr>
           <a:xfrm>
-            <a:off x="7540600" y="1371600"/>
+            <a:off x="7604608" y="1371600"/>
             <a:ext cx="0" cy="4754880"/>
           </a:xfrm>
           <a:prstGeom prst="line">
@@ -9373,7 +9423,7 @@
         </p:nvSpPr>
         <p:spPr>
           <a:xfrm>
-            <a:off x="7720279" y="1645920"/>
+            <a:off x="7784287" y="1645920"/>
             <a:ext cx="3840480" cy="2103120"/>
           </a:xfrm>
           <a:prstGeom prst="roundRect">
@@ -9395,7 +9445,7 @@
         </p:nvSpPr>
         <p:spPr>
           <a:xfrm>
-            <a:off x="7720279" y="1700784"/>
+            <a:off x="7784287" y="1700784"/>
             <a:ext cx="36576" cy="1993392"/>
           </a:xfrm>
           <a:prstGeom prst="rect">
@@ -9415,7 +9465,7 @@
         </p:nvSpPr>
         <p:spPr>
           <a:xfrm>
-            <a:off x="7866583" y="1737360"/>
+            <a:off x="7930591" y="1737360"/>
             <a:ext cx="3584448" cy="201168"/>
           </a:xfrm>
           <a:prstGeom prst="rect">
@@ -9454,7 +9504,7 @@
         </p:nvSpPr>
         <p:spPr>
           <a:xfrm>
-            <a:off x="7866583" y="1938528"/>
+            <a:off x="7930591" y="1938528"/>
             <a:ext cx="3584448" cy="1773936"/>
           </a:xfrm>
           <a:prstGeom prst="rect">
@@ -9497,7 +9547,7 @@
         </p:nvSpPr>
         <p:spPr>
           <a:xfrm>
-            <a:off x="7720279" y="3977640"/>
+            <a:off x="7784287" y="3977640"/>
             <a:ext cx="3840480" cy="2148840"/>
           </a:xfrm>
           <a:prstGeom prst="roundRect">
@@ -9519,7 +9569,7 @@
         </p:nvSpPr>
         <p:spPr>
           <a:xfrm>
-            <a:off x="7720279" y="4032504"/>
+            <a:off x="7784287" y="4032504"/>
             <a:ext cx="36576" cy="2039112"/>
           </a:xfrm>
           <a:prstGeom prst="rect">
@@ -9539,7 +9589,7 @@
         </p:nvSpPr>
         <p:spPr>
           <a:xfrm>
-            <a:off x="7866583" y="4069080"/>
+            <a:off x="7930591" y="4069080"/>
             <a:ext cx="3584448" cy="201168"/>
           </a:xfrm>
           <a:prstGeom prst="rect">
@@ -9578,7 +9628,7 @@
         </p:nvSpPr>
         <p:spPr>
           <a:xfrm>
-            <a:off x="7866583" y="4270248"/>
+            <a:off x="7930591" y="4270248"/>
             <a:ext cx="3584448" cy="1819656"/>
           </a:xfrm>
           <a:prstGeom prst="rect">
@@ -9669,7 +9719,7 @@
         </p:nvSpPr>
         <p:spPr>
           <a:xfrm>
-            <a:off x="502920" y="6382512"/>
+            <a:off x="566928" y="6382512"/>
             <a:ext cx="7315200" cy="219456"/>
           </a:xfrm>
           <a:prstGeom prst="rect">
@@ -9708,7 +9758,7 @@
         </p:nvSpPr>
         <p:spPr>
           <a:xfrm>
-            <a:off x="10774375" y="6382512"/>
+            <a:off x="10710367" y="6382512"/>
             <a:ext cx="914400" cy="219456"/>
           </a:xfrm>
           <a:prstGeom prst="rect">
@@ -9779,7 +9829,7 @@
         </p:nvSpPr>
         <p:spPr>
           <a:xfrm>
-            <a:off x="502920" y="457200"/>
+            <a:off x="566928" y="457200"/>
             <a:ext cx="384048" cy="384048"/>
           </a:xfrm>
           <a:prstGeom prst="ellipse">
@@ -9799,7 +9849,7 @@
         </p:nvSpPr>
         <p:spPr>
           <a:xfrm>
-            <a:off x="502920" y="457200"/>
+            <a:off x="566928" y="457200"/>
             <a:ext cx="384048" cy="384048"/>
           </a:xfrm>
           <a:prstGeom prst="rect">
@@ -9838,7 +9888,7 @@
         </p:nvSpPr>
         <p:spPr>
           <a:xfrm>
-            <a:off x="1069848" y="457200"/>
+            <a:off x="1133856" y="457200"/>
             <a:ext cx="10490911" cy="182880"/>
           </a:xfrm>
           <a:prstGeom prst="rect">
@@ -9877,7 +9927,7 @@
         </p:nvSpPr>
         <p:spPr>
           <a:xfrm>
-            <a:off x="1069848" y="640080"/>
+            <a:off x="1133856" y="640080"/>
             <a:ext cx="10490911" cy="365760"/>
           </a:xfrm>
           <a:prstGeom prst="rect">
@@ -9887,7 +9937,9 @@
           <a:ln/>
         </p:spPr>
         <p:txBody>
-          <a:bodyPr wrap="square" lIns="0" tIns="0" rIns="0" bIns="0" rtlCol="0" anchor="ctr"/>
+          <a:bodyPr wrap="square" lIns="0" tIns="0" rIns="0" bIns="0" rtlCol="0" anchor="ctr">
+            <a:normAutofit/>
+          </a:bodyPr>
           <a:lstStyle/>
           <a:p>
             <a:pPr indent="0" marL="0">
@@ -9916,7 +9968,7 @@
         </p:nvSpPr>
         <p:spPr>
           <a:xfrm>
-            <a:off x="502920" y="1371600"/>
+            <a:off x="566928" y="1371600"/>
             <a:ext cx="6858000" cy="237744"/>
           </a:xfrm>
           <a:prstGeom prst="rect">
@@ -9955,7 +10007,7 @@
         </p:nvSpPr>
         <p:spPr>
           <a:xfrm>
-            <a:off x="502920" y="1645920"/>
+            <a:off x="566928" y="1645920"/>
             <a:ext cx="1920240" cy="402336"/>
           </a:xfrm>
           <a:prstGeom prst="rect">
@@ -9965,7 +10017,9 @@
           <a:ln/>
         </p:spPr>
         <p:txBody>
-          <a:bodyPr wrap="square" lIns="0" tIns="0" rIns="0" bIns="0" rtlCol="0" anchor="ctr"/>
+          <a:bodyPr wrap="square" lIns="0" tIns="0" rIns="0" bIns="0" rtlCol="0" anchor="ctr">
+            <a:normAutofit/>
+          </a:bodyPr>
           <a:lstStyle/>
           <a:p>
             <a:pPr indent="0" marL="0">
@@ -9997,7 +10051,7 @@
         </p:nvSpPr>
         <p:spPr>
           <a:xfrm>
-            <a:off x="2423160" y="1645920"/>
+            <a:off x="2487168" y="1645920"/>
             <a:ext cx="4937760" cy="402336"/>
           </a:xfrm>
           <a:prstGeom prst="rect">
@@ -10007,7 +10061,9 @@
           <a:ln/>
         </p:spPr>
         <p:txBody>
-          <a:bodyPr wrap="square" lIns="0" tIns="0" rIns="0" bIns="0" rtlCol="0" anchor="ctr"/>
+          <a:bodyPr wrap="square" lIns="0" tIns="0" rIns="0" bIns="0" rtlCol="0" anchor="ctr">
+            <a:normAutofit/>
+          </a:bodyPr>
           <a:lstStyle/>
           <a:p>
             <a:pPr indent="0" marL="0">
@@ -10039,7 +10095,7 @@
         </p:nvSpPr>
         <p:spPr>
           <a:xfrm>
-            <a:off x="502920" y="2048256"/>
+            <a:off x="566928" y="2048256"/>
             <a:ext cx="6858000" cy="0"/>
           </a:xfrm>
           <a:prstGeom prst="line">
@@ -10062,7 +10118,7 @@
         </p:nvSpPr>
         <p:spPr>
           <a:xfrm>
-            <a:off x="502920" y="2048256"/>
+            <a:off x="566928" y="2048256"/>
             <a:ext cx="1920240" cy="402336"/>
           </a:xfrm>
           <a:prstGeom prst="rect">
@@ -10072,7 +10128,9 @@
           <a:ln/>
         </p:spPr>
         <p:txBody>
-          <a:bodyPr wrap="square" lIns="0" tIns="0" rIns="0" bIns="0" rtlCol="0" anchor="ctr"/>
+          <a:bodyPr wrap="square" lIns="0" tIns="0" rIns="0" bIns="0" rtlCol="0" anchor="ctr">
+            <a:normAutofit/>
+          </a:bodyPr>
           <a:lstStyle/>
           <a:p>
             <a:pPr indent="0" marL="0">
@@ -10104,7 +10162,7 @@
         </p:nvSpPr>
         <p:spPr>
           <a:xfrm>
-            <a:off x="2423160" y="2048256"/>
+            <a:off x="2487168" y="2048256"/>
             <a:ext cx="4937760" cy="402336"/>
           </a:xfrm>
           <a:prstGeom prst="rect">
@@ -10114,7 +10172,9 @@
           <a:ln/>
         </p:spPr>
         <p:txBody>
-          <a:bodyPr wrap="square" lIns="0" tIns="0" rIns="0" bIns="0" rtlCol="0" anchor="ctr"/>
+          <a:bodyPr wrap="square" lIns="0" tIns="0" rIns="0" bIns="0" rtlCol="0" anchor="ctr">
+            <a:normAutofit/>
+          </a:bodyPr>
           <a:lstStyle/>
           <a:p>
             <a:pPr indent="0" marL="0">
@@ -10146,7 +10206,7 @@
         </p:nvSpPr>
         <p:spPr>
           <a:xfrm>
-            <a:off x="502920" y="2450592"/>
+            <a:off x="566928" y="2450592"/>
             <a:ext cx="6858000" cy="0"/>
           </a:xfrm>
           <a:prstGeom prst="line">
@@ -10169,7 +10229,7 @@
         </p:nvSpPr>
         <p:spPr>
           <a:xfrm>
-            <a:off x="502920" y="2450592"/>
+            <a:off x="566928" y="2450592"/>
             <a:ext cx="1920240" cy="402336"/>
           </a:xfrm>
           <a:prstGeom prst="rect">
@@ -10179,7 +10239,9 @@
           <a:ln/>
         </p:spPr>
         <p:txBody>
-          <a:bodyPr wrap="square" lIns="0" tIns="0" rIns="0" bIns="0" rtlCol="0" anchor="ctr"/>
+          <a:bodyPr wrap="square" lIns="0" tIns="0" rIns="0" bIns="0" rtlCol="0" anchor="ctr">
+            <a:normAutofit/>
+          </a:bodyPr>
           <a:lstStyle/>
           <a:p>
             <a:pPr indent="0" marL="0">
@@ -10211,7 +10273,7 @@
         </p:nvSpPr>
         <p:spPr>
           <a:xfrm>
-            <a:off x="2423160" y="2450592"/>
+            <a:off x="2487168" y="2450592"/>
             <a:ext cx="4937760" cy="402336"/>
           </a:xfrm>
           <a:prstGeom prst="rect">
@@ -10221,7 +10283,9 @@
           <a:ln/>
         </p:spPr>
         <p:txBody>
-          <a:bodyPr wrap="square" lIns="0" tIns="0" rIns="0" bIns="0" rtlCol="0" anchor="ctr"/>
+          <a:bodyPr wrap="square" lIns="0" tIns="0" rIns="0" bIns="0" rtlCol="0" anchor="ctr">
+            <a:normAutofit/>
+          </a:bodyPr>
           <a:lstStyle/>
           <a:p>
             <a:pPr indent="0" marL="0">
@@ -10253,7 +10317,7 @@
         </p:nvSpPr>
         <p:spPr>
           <a:xfrm>
-            <a:off x="7540600" y="1371600"/>
+            <a:off x="7604608" y="1371600"/>
             <a:ext cx="0" cy="4754880"/>
           </a:xfrm>
           <a:prstGeom prst="line">
@@ -10276,7 +10340,7 @@
         </p:nvSpPr>
         <p:spPr>
           <a:xfrm>
-            <a:off x="7720279" y="1645920"/>
+            <a:off x="7784287" y="1645920"/>
             <a:ext cx="3840480" cy="1645920"/>
           </a:xfrm>
           <a:prstGeom prst="roundRect">
@@ -10298,7 +10362,7 @@
         </p:nvSpPr>
         <p:spPr>
           <a:xfrm>
-            <a:off x="7720279" y="1700784"/>
+            <a:off x="7784287" y="1700784"/>
             <a:ext cx="36576" cy="1536192"/>
           </a:xfrm>
           <a:prstGeom prst="rect">
@@ -10318,7 +10382,7 @@
         </p:nvSpPr>
         <p:spPr>
           <a:xfrm>
-            <a:off x="7866583" y="1737360"/>
+            <a:off x="7930591" y="1737360"/>
             <a:ext cx="3584448" cy="201168"/>
           </a:xfrm>
           <a:prstGeom prst="rect">
@@ -10346,7 +10410,7 @@
         </p:nvSpPr>
         <p:spPr>
           <a:xfrm>
-            <a:off x="7866583" y="1938528"/>
+            <a:off x="7930591" y="1938528"/>
             <a:ext cx="3584448" cy="1316736"/>
           </a:xfrm>
           <a:prstGeom prst="rect">
@@ -10388,7 +10452,7 @@
         </p:nvSpPr>
         <p:spPr>
           <a:xfrm>
-            <a:off x="502920" y="6382512"/>
+            <a:off x="566928" y="6382512"/>
             <a:ext cx="7315200" cy="219456"/>
           </a:xfrm>
           <a:prstGeom prst="rect">
@@ -10427,7 +10491,7 @@
         </p:nvSpPr>
         <p:spPr>
           <a:xfrm>
-            <a:off x="10774375" y="6382512"/>
+            <a:off x="10710367" y="6382512"/>
             <a:ext cx="914400" cy="219456"/>
           </a:xfrm>
           <a:prstGeom prst="rect">
@@ -10498,7 +10562,7 @@
         </p:nvSpPr>
         <p:spPr>
           <a:xfrm>
-            <a:off x="502920" y="457200"/>
+            <a:off x="566928" y="457200"/>
             <a:ext cx="384048" cy="384048"/>
           </a:xfrm>
           <a:prstGeom prst="ellipse">
@@ -10518,7 +10582,7 @@
         </p:nvSpPr>
         <p:spPr>
           <a:xfrm>
-            <a:off x="502920" y="457200"/>
+            <a:off x="566928" y="457200"/>
             <a:ext cx="384048" cy="384048"/>
           </a:xfrm>
           <a:prstGeom prst="rect">
@@ -10557,7 +10621,7 @@
         </p:nvSpPr>
         <p:spPr>
           <a:xfrm>
-            <a:off x="1069848" y="457200"/>
+            <a:off x="1133856" y="457200"/>
             <a:ext cx="10490911" cy="182880"/>
           </a:xfrm>
           <a:prstGeom prst="rect">
@@ -10596,7 +10660,7 @@
         </p:nvSpPr>
         <p:spPr>
           <a:xfrm>
-            <a:off x="1069848" y="640080"/>
+            <a:off x="1133856" y="640080"/>
             <a:ext cx="10490911" cy="365760"/>
           </a:xfrm>
           <a:prstGeom prst="rect">
@@ -10606,7 +10670,9 @@
           <a:ln/>
         </p:spPr>
         <p:txBody>
-          <a:bodyPr wrap="square" lIns="0" tIns="0" rIns="0" bIns="0" rtlCol="0" anchor="ctr"/>
+          <a:bodyPr wrap="square" lIns="0" tIns="0" rIns="0" bIns="0" rtlCol="0" anchor="ctr">
+            <a:normAutofit/>
+          </a:bodyPr>
           <a:lstStyle/>
           <a:p>
             <a:pPr indent="0" marL="0">
@@ -10642,7 +10708,7 @@
           </p:nvPr>
         </p:nvGraphicFramePr>
         <p:xfrm>
-          <a:off x="502920" y="1645920"/>
+          <a:off x="566928" y="1645920"/>
           <a:ext cx="11057839" cy="914400"/>
         </p:xfrm>
         <a:graphic>
@@ -10661,7 +10727,7 @@
                     <a:bodyPr/>
                     <a:lstStyle/>
                     <a:p>
-                      <a:pPr indent="0" marL="0">
+                      <a:pPr algn="ctr" indent="0" marL="0">
                         <a:buNone/>
                       </a:pPr>
                       <a:r>
@@ -10729,7 +10795,7 @@
                     <a:bodyPr/>
                     <a:lstStyle/>
                     <a:p>
-                      <a:pPr indent="0" marL="0">
+                      <a:pPr algn="l" indent="0" marL="0">
                         <a:buNone/>
                       </a:pPr>
                       <a:r>
@@ -10797,7 +10863,7 @@
                     <a:bodyPr/>
                     <a:lstStyle/>
                     <a:p>
-                      <a:pPr indent="0" marL="0">
+                      <a:pPr algn="r" indent="0" marL="0">
                         <a:buNone/>
                       </a:pPr>
                       <a:r>
@@ -10865,7 +10931,7 @@
                     <a:bodyPr/>
                     <a:lstStyle/>
                     <a:p>
-                      <a:pPr indent="0" marL="0">
+                      <a:pPr algn="r" indent="0" marL="0">
                         <a:buNone/>
                       </a:pPr>
                       <a:r>
@@ -10935,7 +11001,7 @@
                     <a:bodyPr/>
                     <a:lstStyle/>
                     <a:p>
-                      <a:pPr indent="0" marL="0">
+                      <a:pPr algn="ctr" indent="0" marL="0">
                         <a:buNone/>
                       </a:pPr>
                       <a:r>
@@ -11003,7 +11069,7 @@
                     <a:bodyPr/>
                     <a:lstStyle/>
                     <a:p>
-                      <a:pPr indent="0" marL="0">
+                      <a:pPr algn="l" indent="0" marL="0">
                         <a:buNone/>
                       </a:pPr>
                       <a:r>
@@ -11071,7 +11137,7 @@
                     <a:bodyPr/>
                     <a:lstStyle/>
                     <a:p>
-                      <a:pPr indent="0" marL="0">
+                      <a:pPr algn="r" indent="0" marL="0">
                         <a:buNone/>
                       </a:pPr>
                       <a:r>
@@ -11139,7 +11205,7 @@
                     <a:bodyPr/>
                     <a:lstStyle/>
                     <a:p>
-                      <a:pPr indent="0" marL="0">
+                      <a:pPr algn="r" indent="0" marL="0">
                         <a:buNone/>
                       </a:pPr>
                       <a:r>
@@ -11209,7 +11275,7 @@
                     <a:bodyPr/>
                     <a:lstStyle/>
                     <a:p>
-                      <a:pPr indent="0" marL="0">
+                      <a:pPr algn="ctr" indent="0" marL="0">
                         <a:buNone/>
                       </a:pPr>
                       <a:r>
@@ -11277,7 +11343,7 @@
                     <a:bodyPr/>
                     <a:lstStyle/>
                     <a:p>
-                      <a:pPr indent="0" marL="0">
+                      <a:pPr algn="l" indent="0" marL="0">
                         <a:buNone/>
                       </a:pPr>
                       <a:r>
@@ -11345,7 +11411,7 @@
                     <a:bodyPr/>
                     <a:lstStyle/>
                     <a:p>
-                      <a:pPr indent="0" marL="0">
+                      <a:pPr algn="r" indent="0" marL="0">
                         <a:buNone/>
                       </a:pPr>
                       <a:r>
@@ -11413,7 +11479,7 @@
                     <a:bodyPr/>
                     <a:lstStyle/>
                     <a:p>
-                      <a:pPr indent="0" marL="0">
+                      <a:pPr algn="r" indent="0" marL="0">
                         <a:buNone/>
                       </a:pPr>
                       <a:r>
@@ -11489,7 +11555,7 @@
         </p:nvSpPr>
         <p:spPr>
           <a:xfrm>
-            <a:off x="502920" y="6382512"/>
+            <a:off x="566928" y="6382512"/>
             <a:ext cx="7315200" cy="219456"/>
           </a:xfrm>
           <a:prstGeom prst="rect">
@@ -11528,7 +11594,7 @@
         </p:nvSpPr>
         <p:spPr>
           <a:xfrm>
-            <a:off x="10774375" y="6382512"/>
+            <a:off x="10710367" y="6382512"/>
             <a:ext cx="914400" cy="219456"/>
           </a:xfrm>
           <a:prstGeom prst="rect">
@@ -11599,7 +11665,7 @@
         </p:nvSpPr>
         <p:spPr>
           <a:xfrm>
-            <a:off x="502920" y="457200"/>
+            <a:off x="566928" y="457200"/>
             <a:ext cx="384048" cy="384048"/>
           </a:xfrm>
           <a:prstGeom prst="ellipse">
@@ -11619,7 +11685,7 @@
         </p:nvSpPr>
         <p:spPr>
           <a:xfrm>
-            <a:off x="502920" y="457200"/>
+            <a:off x="566928" y="457200"/>
             <a:ext cx="384048" cy="384048"/>
           </a:xfrm>
           <a:prstGeom prst="rect">
@@ -11658,7 +11724,7 @@
         </p:nvSpPr>
         <p:spPr>
           <a:xfrm>
-            <a:off x="1069848" y="457200"/>
+            <a:off x="1133856" y="457200"/>
             <a:ext cx="10490911" cy="182880"/>
           </a:xfrm>
           <a:prstGeom prst="rect">
@@ -11697,7 +11763,7 @@
         </p:nvSpPr>
         <p:spPr>
           <a:xfrm>
-            <a:off x="1069848" y="640080"/>
+            <a:off x="1133856" y="640080"/>
             <a:ext cx="10490911" cy="365760"/>
           </a:xfrm>
           <a:prstGeom prst="rect">
@@ -11707,7 +11773,9 @@
           <a:ln/>
         </p:spPr>
         <p:txBody>
-          <a:bodyPr wrap="square" lIns="0" tIns="0" rIns="0" bIns="0" rtlCol="0" anchor="ctr"/>
+          <a:bodyPr wrap="square" lIns="0" tIns="0" rIns="0" bIns="0" rtlCol="0" anchor="ctr">
+            <a:normAutofit/>
+          </a:bodyPr>
           <a:lstStyle/>
           <a:p>
             <a:pPr indent="0" marL="0">
@@ -11736,7 +11804,7 @@
         </p:nvSpPr>
         <p:spPr>
           <a:xfrm>
-            <a:off x="502920" y="1371600"/>
+            <a:off x="566928" y="1371600"/>
             <a:ext cx="6858000" cy="237744"/>
           </a:xfrm>
           <a:prstGeom prst="rect">
@@ -11775,7 +11843,7 @@
         </p:nvSpPr>
         <p:spPr>
           <a:xfrm>
-            <a:off x="502920" y="1645920"/>
+            <a:off x="566928" y="1645920"/>
             <a:ext cx="1920240" cy="402336"/>
           </a:xfrm>
           <a:prstGeom prst="rect">
@@ -11785,7 +11853,9 @@
           <a:ln/>
         </p:spPr>
         <p:txBody>
-          <a:bodyPr wrap="square" lIns="0" tIns="0" rIns="0" bIns="0" rtlCol="0" anchor="ctr"/>
+          <a:bodyPr wrap="square" lIns="0" tIns="0" rIns="0" bIns="0" rtlCol="0" anchor="ctr">
+            <a:normAutofit/>
+          </a:bodyPr>
           <a:lstStyle/>
           <a:p>
             <a:pPr indent="0" marL="0">
@@ -11817,7 +11887,7 @@
         </p:nvSpPr>
         <p:spPr>
           <a:xfrm>
-            <a:off x="2423160" y="1645920"/>
+            <a:off x="2487168" y="1645920"/>
             <a:ext cx="4937760" cy="402336"/>
           </a:xfrm>
           <a:prstGeom prst="rect">
@@ -11827,7 +11897,9 @@
           <a:ln/>
         </p:spPr>
         <p:txBody>
-          <a:bodyPr wrap="square" lIns="0" tIns="0" rIns="0" bIns="0" rtlCol="0" anchor="ctr"/>
+          <a:bodyPr wrap="square" lIns="0" tIns="0" rIns="0" bIns="0" rtlCol="0" anchor="ctr">
+            <a:normAutofit/>
+          </a:bodyPr>
           <a:lstStyle/>
           <a:p>
             <a:pPr indent="0" marL="0">
@@ -11859,7 +11931,7 @@
         </p:nvSpPr>
         <p:spPr>
           <a:xfrm>
-            <a:off x="502920" y="2048256"/>
+            <a:off x="566928" y="2048256"/>
             <a:ext cx="6858000" cy="0"/>
           </a:xfrm>
           <a:prstGeom prst="line">
@@ -11882,7 +11954,7 @@
         </p:nvSpPr>
         <p:spPr>
           <a:xfrm>
-            <a:off x="502920" y="2048256"/>
+            <a:off x="566928" y="2048256"/>
             <a:ext cx="1920240" cy="402336"/>
           </a:xfrm>
           <a:prstGeom prst="rect">
@@ -11892,7 +11964,9 @@
           <a:ln/>
         </p:spPr>
         <p:txBody>
-          <a:bodyPr wrap="square" lIns="0" tIns="0" rIns="0" bIns="0" rtlCol="0" anchor="ctr"/>
+          <a:bodyPr wrap="square" lIns="0" tIns="0" rIns="0" bIns="0" rtlCol="0" anchor="ctr">
+            <a:normAutofit/>
+          </a:bodyPr>
           <a:lstStyle/>
           <a:p>
             <a:pPr indent="0" marL="0">
@@ -11924,7 +11998,7 @@
         </p:nvSpPr>
         <p:spPr>
           <a:xfrm>
-            <a:off x="2423160" y="2048256"/>
+            <a:off x="2487168" y="2048256"/>
             <a:ext cx="4937760" cy="402336"/>
           </a:xfrm>
           <a:prstGeom prst="rect">
@@ -11934,7 +12008,9 @@
           <a:ln/>
         </p:spPr>
         <p:txBody>
-          <a:bodyPr wrap="square" lIns="0" tIns="0" rIns="0" bIns="0" rtlCol="0" anchor="ctr"/>
+          <a:bodyPr wrap="square" lIns="0" tIns="0" rIns="0" bIns="0" rtlCol="0" anchor="ctr">
+            <a:normAutofit/>
+          </a:bodyPr>
           <a:lstStyle/>
           <a:p>
             <a:pPr indent="0" marL="0">
@@ -11966,7 +12042,7 @@
         </p:nvSpPr>
         <p:spPr>
           <a:xfrm>
-            <a:off x="7540600" y="1371600"/>
+            <a:off x="7604608" y="1371600"/>
             <a:ext cx="0" cy="4754880"/>
           </a:xfrm>
           <a:prstGeom prst="line">
@@ -11989,7 +12065,7 @@
         </p:nvSpPr>
         <p:spPr>
           <a:xfrm>
-            <a:off x="7720279" y="1645920"/>
+            <a:off x="7784287" y="1645920"/>
             <a:ext cx="3840480" cy="1645920"/>
           </a:xfrm>
           <a:prstGeom prst="roundRect">
@@ -12011,7 +12087,7 @@
         </p:nvSpPr>
         <p:spPr>
           <a:xfrm>
-            <a:off x="7720279" y="1700784"/>
+            <a:off x="7784287" y="1700784"/>
             <a:ext cx="36576" cy="1536192"/>
           </a:xfrm>
           <a:prstGeom prst="rect">
@@ -12031,7 +12107,7 @@
         </p:nvSpPr>
         <p:spPr>
           <a:xfrm>
-            <a:off x="7866583" y="1737360"/>
+            <a:off x="7930591" y="1737360"/>
             <a:ext cx="3584448" cy="201168"/>
           </a:xfrm>
           <a:prstGeom prst="rect">
@@ -12059,7 +12135,7 @@
         </p:nvSpPr>
         <p:spPr>
           <a:xfrm>
-            <a:off x="7866583" y="1938528"/>
+            <a:off x="7930591" y="1938528"/>
             <a:ext cx="3584448" cy="1316736"/>
           </a:xfrm>
           <a:prstGeom prst="rect">
@@ -12101,7 +12177,7 @@
         </p:nvSpPr>
         <p:spPr>
           <a:xfrm>
-            <a:off x="502920" y="6382512"/>
+            <a:off x="566928" y="6382512"/>
             <a:ext cx="7315200" cy="219456"/>
           </a:xfrm>
           <a:prstGeom prst="rect">
@@ -12140,7 +12216,7 @@
         </p:nvSpPr>
         <p:spPr>
           <a:xfrm>
-            <a:off x="10774375" y="6382512"/>
+            <a:off x="10710367" y="6382512"/>
             <a:ext cx="914400" cy="219456"/>
           </a:xfrm>
           <a:prstGeom prst="rect">
@@ -12211,7 +12287,7 @@
         </p:nvSpPr>
         <p:spPr>
           <a:xfrm>
-            <a:off x="502920" y="457200"/>
+            <a:off x="566928" y="457200"/>
             <a:ext cx="384048" cy="384048"/>
           </a:xfrm>
           <a:prstGeom prst="ellipse">
@@ -12231,7 +12307,7 @@
         </p:nvSpPr>
         <p:spPr>
           <a:xfrm>
-            <a:off x="502920" y="457200"/>
+            <a:off x="566928" y="457200"/>
             <a:ext cx="384048" cy="384048"/>
           </a:xfrm>
           <a:prstGeom prst="rect">
@@ -12270,7 +12346,7 @@
         </p:nvSpPr>
         <p:spPr>
           <a:xfrm>
-            <a:off x="1069848" y="457200"/>
+            <a:off x="1133856" y="457200"/>
             <a:ext cx="10490911" cy="182880"/>
           </a:xfrm>
           <a:prstGeom prst="rect">
@@ -12309,7 +12385,7 @@
         </p:nvSpPr>
         <p:spPr>
           <a:xfrm>
-            <a:off x="1069848" y="640080"/>
+            <a:off x="1133856" y="640080"/>
             <a:ext cx="10490911" cy="365760"/>
           </a:xfrm>
           <a:prstGeom prst="rect">
@@ -12319,7 +12395,9 @@
           <a:ln/>
         </p:spPr>
         <p:txBody>
-          <a:bodyPr wrap="square" lIns="0" tIns="0" rIns="0" bIns="0" rtlCol="0" anchor="ctr"/>
+          <a:bodyPr wrap="square" lIns="0" tIns="0" rIns="0" bIns="0" rtlCol="0" anchor="ctr">
+            <a:normAutofit/>
+          </a:bodyPr>
           <a:lstStyle/>
           <a:p>
             <a:pPr indent="0" marL="0">
@@ -12348,7 +12426,7 @@
         </p:nvSpPr>
         <p:spPr>
           <a:xfrm>
-            <a:off x="502920" y="1325880"/>
+            <a:off x="566928" y="1325880"/>
             <a:ext cx="11057839" cy="0"/>
           </a:xfrm>
           <a:prstGeom prst="line">
@@ -12371,7 +12449,7 @@
         </p:nvSpPr>
         <p:spPr>
           <a:xfrm>
-            <a:off x="502920" y="1554480"/>
+            <a:off x="566928" y="1554480"/>
             <a:ext cx="3576218" cy="1188720"/>
           </a:xfrm>
           <a:prstGeom prst="roundRect">
@@ -12398,7 +12476,7 @@
         </p:nvSpPr>
         <p:spPr>
           <a:xfrm>
-            <a:off x="667512" y="1682496"/>
+            <a:off x="731520" y="1682496"/>
             <a:ext cx="3247034" cy="201168"/>
           </a:xfrm>
           <a:prstGeom prst="rect">
@@ -12408,7 +12486,9 @@
           <a:ln/>
         </p:spPr>
         <p:txBody>
-          <a:bodyPr wrap="square" lIns="0" tIns="0" rIns="0" bIns="0" rtlCol="0" anchor="ctr"/>
+          <a:bodyPr wrap="square" lIns="0" tIns="0" rIns="0" bIns="0" rtlCol="0" anchor="ctr">
+            <a:normAutofit/>
+          </a:bodyPr>
           <a:lstStyle/>
           <a:p>
             <a:pPr indent="0" marL="0">
@@ -12437,8 +12517,8 @@
         </p:nvSpPr>
         <p:spPr>
           <a:xfrm>
-            <a:off x="667512" y="1901952"/>
-            <a:ext cx="3247034" cy="402336"/>
+            <a:off x="731520" y="1901952"/>
+            <a:ext cx="3247034" cy="279400"/>
           </a:xfrm>
           <a:prstGeom prst="rect">
             <a:avLst/>
@@ -12481,7 +12561,7 @@
         </p:nvSpPr>
         <p:spPr>
           <a:xfrm>
-            <a:off x="4243730" y="1554480"/>
+            <a:off x="4307738" y="1554480"/>
             <a:ext cx="3576218" cy="1188720"/>
           </a:xfrm>
           <a:prstGeom prst="roundRect">
@@ -12508,7 +12588,7 @@
         </p:nvSpPr>
         <p:spPr>
           <a:xfrm>
-            <a:off x="4408322" y="1682496"/>
+            <a:off x="4472330" y="1682496"/>
             <a:ext cx="3247034" cy="201168"/>
           </a:xfrm>
           <a:prstGeom prst="rect">
@@ -12518,7 +12598,9 @@
           <a:ln/>
         </p:spPr>
         <p:txBody>
-          <a:bodyPr wrap="square" lIns="0" tIns="0" rIns="0" bIns="0" rtlCol="0" anchor="ctr"/>
+          <a:bodyPr wrap="square" lIns="0" tIns="0" rIns="0" bIns="0" rtlCol="0" anchor="ctr">
+            <a:normAutofit/>
+          </a:bodyPr>
           <a:lstStyle/>
           <a:p>
             <a:pPr indent="0" marL="0">
@@ -12547,8 +12629,8 @@
         </p:nvSpPr>
         <p:spPr>
           <a:xfrm>
-            <a:off x="4408322" y="1901952"/>
-            <a:ext cx="3247034" cy="402336"/>
+            <a:off x="4472330" y="1901952"/>
+            <a:ext cx="3247034" cy="279400"/>
           </a:xfrm>
           <a:prstGeom prst="rect">
             <a:avLst/>
@@ -12591,7 +12673,7 @@
         </p:nvSpPr>
         <p:spPr>
           <a:xfrm>
-            <a:off x="7984541" y="1554480"/>
+            <a:off x="8048549" y="1554480"/>
             <a:ext cx="3576218" cy="1188720"/>
           </a:xfrm>
           <a:prstGeom prst="roundRect">
@@ -12618,7 +12700,7 @@
         </p:nvSpPr>
         <p:spPr>
           <a:xfrm>
-            <a:off x="8149133" y="1682496"/>
+            <a:off x="8213141" y="1682496"/>
             <a:ext cx="3247034" cy="201168"/>
           </a:xfrm>
           <a:prstGeom prst="rect">
@@ -12628,7 +12710,9 @@
           <a:ln/>
         </p:spPr>
         <p:txBody>
-          <a:bodyPr wrap="square" lIns="0" tIns="0" rIns="0" bIns="0" rtlCol="0" anchor="ctr"/>
+          <a:bodyPr wrap="square" lIns="0" tIns="0" rIns="0" bIns="0" rtlCol="0" anchor="ctr">
+            <a:normAutofit/>
+          </a:bodyPr>
           <a:lstStyle/>
           <a:p>
             <a:pPr indent="0" marL="0">
@@ -12657,8 +12741,8 @@
         </p:nvSpPr>
         <p:spPr>
           <a:xfrm>
-            <a:off x="8149133" y="1901952"/>
-            <a:ext cx="3247034" cy="402336"/>
+            <a:off x="8213141" y="1901952"/>
+            <a:ext cx="3247034" cy="279400"/>
           </a:xfrm>
           <a:prstGeom prst="rect">
             <a:avLst/>
@@ -12701,7 +12785,7 @@
         </p:nvSpPr>
         <p:spPr>
           <a:xfrm>
-            <a:off x="502920" y="2999232"/>
+            <a:off x="566928" y="2999232"/>
             <a:ext cx="11057839" cy="1280160"/>
           </a:xfrm>
           <a:prstGeom prst="roundRect">
@@ -12723,7 +12807,7 @@
         </p:nvSpPr>
         <p:spPr>
           <a:xfrm>
-            <a:off x="502920" y="3054096"/>
+            <a:off x="566928" y="3054096"/>
             <a:ext cx="36576" cy="1170432"/>
           </a:xfrm>
           <a:prstGeom prst="rect">
@@ -12743,7 +12827,7 @@
         </p:nvSpPr>
         <p:spPr>
           <a:xfrm>
-            <a:off x="649224" y="3090672"/>
+            <a:off x="713232" y="3090672"/>
             <a:ext cx="10801807" cy="201168"/>
           </a:xfrm>
           <a:prstGeom prst="rect">
@@ -12782,7 +12866,7 @@
         </p:nvSpPr>
         <p:spPr>
           <a:xfrm>
-            <a:off x="649224" y="3291840"/>
+            <a:off x="713232" y="3291840"/>
             <a:ext cx="10801807" cy="950976"/>
           </a:xfrm>
           <a:prstGeom prst="rect">
@@ -12824,7 +12908,7 @@
         </p:nvSpPr>
         <p:spPr>
           <a:xfrm>
-            <a:off x="502920" y="6382512"/>
+            <a:off x="566928" y="6382512"/>
             <a:ext cx="7315200" cy="219456"/>
           </a:xfrm>
           <a:prstGeom prst="rect">
@@ -12863,7 +12947,7 @@
         </p:nvSpPr>
         <p:spPr>
           <a:xfrm>
-            <a:off x="10774375" y="6382512"/>
+            <a:off x="10710367" y="6382512"/>
             <a:ext cx="914400" cy="219456"/>
           </a:xfrm>
           <a:prstGeom prst="rect">
@@ -12934,7 +13018,7 @@
         </p:nvSpPr>
         <p:spPr>
           <a:xfrm>
-            <a:off x="502920" y="457200"/>
+            <a:off x="566928" y="457200"/>
             <a:ext cx="384048" cy="384048"/>
           </a:xfrm>
           <a:prstGeom prst="ellipse">
@@ -12954,7 +13038,7 @@
         </p:nvSpPr>
         <p:spPr>
           <a:xfrm>
-            <a:off x="502920" y="457200"/>
+            <a:off x="566928" y="457200"/>
             <a:ext cx="384048" cy="384048"/>
           </a:xfrm>
           <a:prstGeom prst="rect">
@@ -12993,7 +13077,7 @@
         </p:nvSpPr>
         <p:spPr>
           <a:xfrm>
-            <a:off x="1069848" y="457200"/>
+            <a:off x="1133856" y="457200"/>
             <a:ext cx="10490911" cy="182880"/>
           </a:xfrm>
           <a:prstGeom prst="rect">
@@ -13032,7 +13116,7 @@
         </p:nvSpPr>
         <p:spPr>
           <a:xfrm>
-            <a:off x="1069848" y="640080"/>
+            <a:off x="1133856" y="640080"/>
             <a:ext cx="10490911" cy="365760"/>
           </a:xfrm>
           <a:prstGeom prst="rect">
@@ -13042,7 +13126,9 @@
           <a:ln/>
         </p:spPr>
         <p:txBody>
-          <a:bodyPr wrap="square" lIns="0" tIns="0" rIns="0" bIns="0" rtlCol="0" anchor="ctr"/>
+          <a:bodyPr wrap="square" lIns="0" tIns="0" rIns="0" bIns="0" rtlCol="0" anchor="ctr">
+            <a:normAutofit/>
+          </a:bodyPr>
           <a:lstStyle/>
           <a:p>
             <a:pPr indent="0" marL="0">
@@ -13071,7 +13157,7 @@
         </p:nvSpPr>
         <p:spPr>
           <a:xfrm>
-            <a:off x="502920" y="1417320"/>
+            <a:off x="566928" y="1417320"/>
             <a:ext cx="5391760" cy="4389120"/>
           </a:xfrm>
           <a:prstGeom prst="roundRect">
@@ -13098,7 +13184,7 @@
         </p:nvSpPr>
         <p:spPr>
           <a:xfrm>
-            <a:off x="731520" y="1618488"/>
+            <a:off x="795528" y="1618488"/>
             <a:ext cx="4934560" cy="320040"/>
           </a:xfrm>
           <a:prstGeom prst="rect">
@@ -13137,7 +13223,7 @@
         </p:nvSpPr>
         <p:spPr>
           <a:xfrm>
-            <a:off x="731520" y="2011680"/>
+            <a:off x="795528" y="2011680"/>
             <a:ext cx="2269897" cy="475488"/>
           </a:xfrm>
           <a:prstGeom prst="rect">
@@ -13147,7 +13233,9 @@
           <a:ln/>
         </p:spPr>
         <p:txBody>
-          <a:bodyPr wrap="square" lIns="0" tIns="0" rIns="0" bIns="0" rtlCol="0" anchor="ctr"/>
+          <a:bodyPr wrap="square" lIns="0" tIns="0" rIns="0" bIns="0" rtlCol="0" anchor="ctr">
+            <a:normAutofit/>
+          </a:bodyPr>
           <a:lstStyle/>
           <a:p>
             <a:pPr indent="0" marL="0">
@@ -13179,7 +13267,7 @@
         </p:nvSpPr>
         <p:spPr>
           <a:xfrm>
-            <a:off x="3001417" y="2011680"/>
+            <a:off x="3065425" y="2011680"/>
             <a:ext cx="2664662" cy="475488"/>
           </a:xfrm>
           <a:prstGeom prst="rect">
@@ -13189,7 +13277,9 @@
           <a:ln/>
         </p:spPr>
         <p:txBody>
-          <a:bodyPr wrap="square" lIns="0" tIns="0" rIns="0" bIns="0" rtlCol="0" anchor="ctr"/>
+          <a:bodyPr wrap="square" lIns="0" tIns="0" rIns="0" bIns="0" rtlCol="0" anchor="ctr">
+            <a:normAutofit/>
+          </a:bodyPr>
           <a:lstStyle/>
           <a:p>
             <a:pPr indent="0" marL="0">
@@ -13221,7 +13311,7 @@
         </p:nvSpPr>
         <p:spPr>
           <a:xfrm>
-            <a:off x="731520" y="2487168"/>
+            <a:off x="795528" y="2487168"/>
             <a:ext cx="4934560" cy="0"/>
           </a:xfrm>
           <a:prstGeom prst="line">
@@ -13244,7 +13334,7 @@
         </p:nvSpPr>
         <p:spPr>
           <a:xfrm>
-            <a:off x="731520" y="2487168"/>
+            <a:off x="795528" y="2487168"/>
             <a:ext cx="2269897" cy="475488"/>
           </a:xfrm>
           <a:prstGeom prst="rect">
@@ -13254,7 +13344,9 @@
           <a:ln/>
         </p:spPr>
         <p:txBody>
-          <a:bodyPr wrap="square" lIns="0" tIns="0" rIns="0" bIns="0" rtlCol="0" anchor="ctr"/>
+          <a:bodyPr wrap="square" lIns="0" tIns="0" rIns="0" bIns="0" rtlCol="0" anchor="ctr">
+            <a:normAutofit/>
+          </a:bodyPr>
           <a:lstStyle/>
           <a:p>
             <a:pPr indent="0" marL="0">
@@ -13286,7 +13378,7 @@
         </p:nvSpPr>
         <p:spPr>
           <a:xfrm>
-            <a:off x="3001417" y="2487168"/>
+            <a:off x="3065425" y="2487168"/>
             <a:ext cx="2664662" cy="475488"/>
           </a:xfrm>
           <a:prstGeom prst="rect">
@@ -13296,7 +13388,9 @@
           <a:ln/>
         </p:spPr>
         <p:txBody>
-          <a:bodyPr wrap="square" lIns="0" tIns="0" rIns="0" bIns="0" rtlCol="0" anchor="ctr"/>
+          <a:bodyPr wrap="square" lIns="0" tIns="0" rIns="0" bIns="0" rtlCol="0" anchor="ctr">
+            <a:normAutofit/>
+          </a:bodyPr>
           <a:lstStyle/>
           <a:p>
             <a:pPr indent="0" marL="0">
@@ -13328,7 +13422,7 @@
         </p:nvSpPr>
         <p:spPr>
           <a:xfrm>
-            <a:off x="731520" y="2962656"/>
+            <a:off x="795528" y="2962656"/>
             <a:ext cx="4934560" cy="0"/>
           </a:xfrm>
           <a:prstGeom prst="line">
@@ -13351,7 +13445,7 @@
         </p:nvSpPr>
         <p:spPr>
           <a:xfrm>
-            <a:off x="731520" y="2962656"/>
+            <a:off x="795528" y="2962656"/>
             <a:ext cx="2269897" cy="475488"/>
           </a:xfrm>
           <a:prstGeom prst="rect">
@@ -13361,7 +13455,9 @@
           <a:ln/>
         </p:spPr>
         <p:txBody>
-          <a:bodyPr wrap="square" lIns="0" tIns="0" rIns="0" bIns="0" rtlCol="0" anchor="ctr"/>
+          <a:bodyPr wrap="square" lIns="0" tIns="0" rIns="0" bIns="0" rtlCol="0" anchor="ctr">
+            <a:normAutofit/>
+          </a:bodyPr>
           <a:lstStyle/>
           <a:p>
             <a:pPr indent="0" marL="0">
@@ -13393,7 +13489,7 @@
         </p:nvSpPr>
         <p:spPr>
           <a:xfrm>
-            <a:off x="3001417" y="2962656"/>
+            <a:off x="3065425" y="2962656"/>
             <a:ext cx="2664662" cy="475488"/>
           </a:xfrm>
           <a:prstGeom prst="rect">
@@ -13403,7 +13499,9 @@
           <a:ln/>
         </p:spPr>
         <p:txBody>
-          <a:bodyPr wrap="square" lIns="0" tIns="0" rIns="0" bIns="0" rtlCol="0" anchor="ctr"/>
+          <a:bodyPr wrap="square" lIns="0" tIns="0" rIns="0" bIns="0" rtlCol="0" anchor="ctr">
+            <a:normAutofit/>
+          </a:bodyPr>
           <a:lstStyle/>
           <a:p>
             <a:pPr indent="0" marL="0">
@@ -13435,7 +13533,7 @@
         </p:nvSpPr>
         <p:spPr>
           <a:xfrm>
-            <a:off x="731520" y="3438144"/>
+            <a:off x="795528" y="3438144"/>
             <a:ext cx="4934560" cy="0"/>
           </a:xfrm>
           <a:prstGeom prst="line">
@@ -13458,7 +13556,7 @@
         </p:nvSpPr>
         <p:spPr>
           <a:xfrm>
-            <a:off x="731520" y="3438144"/>
+            <a:off x="795528" y="3438144"/>
             <a:ext cx="2269897" cy="475488"/>
           </a:xfrm>
           <a:prstGeom prst="rect">
@@ -13468,7 +13566,9 @@
           <a:ln/>
         </p:spPr>
         <p:txBody>
-          <a:bodyPr wrap="square" lIns="0" tIns="0" rIns="0" bIns="0" rtlCol="0" anchor="ctr"/>
+          <a:bodyPr wrap="square" lIns="0" tIns="0" rIns="0" bIns="0" rtlCol="0" anchor="ctr">
+            <a:normAutofit/>
+          </a:bodyPr>
           <a:lstStyle/>
           <a:p>
             <a:pPr indent="0" marL="0">
@@ -13500,7 +13600,7 @@
         </p:nvSpPr>
         <p:spPr>
           <a:xfrm>
-            <a:off x="3001417" y="3438144"/>
+            <a:off x="3065425" y="3438144"/>
             <a:ext cx="2664662" cy="475488"/>
           </a:xfrm>
           <a:prstGeom prst="rect">
@@ -13510,7 +13610,9 @@
           <a:ln/>
         </p:spPr>
         <p:txBody>
-          <a:bodyPr wrap="square" lIns="0" tIns="0" rIns="0" bIns="0" rtlCol="0" anchor="ctr"/>
+          <a:bodyPr wrap="square" lIns="0" tIns="0" rIns="0" bIns="0" rtlCol="0" anchor="ctr">
+            <a:normAutofit/>
+          </a:bodyPr>
           <a:lstStyle/>
           <a:p>
             <a:pPr indent="0" marL="0">
@@ -13542,7 +13644,7 @@
         </p:nvSpPr>
         <p:spPr>
           <a:xfrm>
-            <a:off x="731520" y="3913632"/>
+            <a:off x="795528" y="3913632"/>
             <a:ext cx="4934560" cy="0"/>
           </a:xfrm>
           <a:prstGeom prst="line">
@@ -13565,7 +13667,7 @@
         </p:nvSpPr>
         <p:spPr>
           <a:xfrm>
-            <a:off x="731520" y="3913632"/>
+            <a:off x="795528" y="3913632"/>
             <a:ext cx="2269897" cy="475488"/>
           </a:xfrm>
           <a:prstGeom prst="rect">
@@ -13575,7 +13677,9 @@
           <a:ln/>
         </p:spPr>
         <p:txBody>
-          <a:bodyPr wrap="square" lIns="0" tIns="0" rIns="0" bIns="0" rtlCol="0" anchor="ctr"/>
+          <a:bodyPr wrap="square" lIns="0" tIns="0" rIns="0" bIns="0" rtlCol="0" anchor="ctr">
+            <a:normAutofit/>
+          </a:bodyPr>
           <a:lstStyle/>
           <a:p>
             <a:pPr indent="0" marL="0">
@@ -13607,7 +13711,7 @@
         </p:nvSpPr>
         <p:spPr>
           <a:xfrm>
-            <a:off x="3001417" y="3913632"/>
+            <a:off x="3065425" y="3913632"/>
             <a:ext cx="2664662" cy="475488"/>
           </a:xfrm>
           <a:prstGeom prst="rect">
@@ -13617,7 +13721,9 @@
           <a:ln/>
         </p:spPr>
         <p:txBody>
-          <a:bodyPr wrap="square" lIns="0" tIns="0" rIns="0" bIns="0" rtlCol="0" anchor="ctr"/>
+          <a:bodyPr wrap="square" lIns="0" tIns="0" rIns="0" bIns="0" rtlCol="0" anchor="ctr">
+            <a:normAutofit/>
+          </a:bodyPr>
           <a:lstStyle/>
           <a:p>
             <a:pPr indent="0" marL="0">
@@ -13649,7 +13755,7 @@
         </p:nvSpPr>
         <p:spPr>
           <a:xfrm>
-            <a:off x="731520" y="4389120"/>
+            <a:off x="795528" y="4389120"/>
             <a:ext cx="4934560" cy="0"/>
           </a:xfrm>
           <a:prstGeom prst="line">
@@ -13672,7 +13778,7 @@
         </p:nvSpPr>
         <p:spPr>
           <a:xfrm>
-            <a:off x="731520" y="4389120"/>
+            <a:off x="795528" y="4389120"/>
             <a:ext cx="2269897" cy="475488"/>
           </a:xfrm>
           <a:prstGeom prst="rect">
@@ -13682,7 +13788,9 @@
           <a:ln/>
         </p:spPr>
         <p:txBody>
-          <a:bodyPr wrap="square" lIns="0" tIns="0" rIns="0" bIns="0" rtlCol="0" anchor="ctr"/>
+          <a:bodyPr wrap="square" lIns="0" tIns="0" rIns="0" bIns="0" rtlCol="0" anchor="ctr">
+            <a:normAutofit/>
+          </a:bodyPr>
           <a:lstStyle/>
           <a:p>
             <a:pPr indent="0" marL="0">
@@ -13714,7 +13822,7 @@
         </p:nvSpPr>
         <p:spPr>
           <a:xfrm>
-            <a:off x="3001417" y="4389120"/>
+            <a:off x="3065425" y="4389120"/>
             <a:ext cx="2664662" cy="475488"/>
           </a:xfrm>
           <a:prstGeom prst="rect">
@@ -13724,7 +13832,9 @@
           <a:ln/>
         </p:spPr>
         <p:txBody>
-          <a:bodyPr wrap="square" lIns="0" tIns="0" rIns="0" bIns="0" rtlCol="0" anchor="ctr"/>
+          <a:bodyPr wrap="square" lIns="0" tIns="0" rIns="0" bIns="0" rtlCol="0" anchor="ctr">
+            <a:normAutofit/>
+          </a:bodyPr>
           <a:lstStyle/>
           <a:p>
             <a:pPr indent="0" marL="0">
@@ -13756,7 +13866,7 @@
         </p:nvSpPr>
         <p:spPr>
           <a:xfrm>
-            <a:off x="731520" y="4864608"/>
+            <a:off x="795528" y="4864608"/>
             <a:ext cx="4934560" cy="0"/>
           </a:xfrm>
           <a:prstGeom prst="line">
@@ -13779,7 +13889,7 @@
         </p:nvSpPr>
         <p:spPr>
           <a:xfrm>
-            <a:off x="731520" y="4864608"/>
+            <a:off x="795528" y="4864608"/>
             <a:ext cx="2269897" cy="475488"/>
           </a:xfrm>
           <a:prstGeom prst="rect">
@@ -13789,7 +13899,9 @@
           <a:ln/>
         </p:spPr>
         <p:txBody>
-          <a:bodyPr wrap="square" lIns="0" tIns="0" rIns="0" bIns="0" rtlCol="0" anchor="ctr"/>
+          <a:bodyPr wrap="square" lIns="0" tIns="0" rIns="0" bIns="0" rtlCol="0" anchor="ctr">
+            <a:normAutofit/>
+          </a:bodyPr>
           <a:lstStyle/>
           <a:p>
             <a:pPr indent="0" marL="0">
@@ -13821,7 +13933,7 @@
         </p:nvSpPr>
         <p:spPr>
           <a:xfrm>
-            <a:off x="3001417" y="4864608"/>
+            <a:off x="3065425" y="4864608"/>
             <a:ext cx="2664662" cy="475488"/>
           </a:xfrm>
           <a:prstGeom prst="rect">
@@ -13831,7 +13943,9 @@
           <a:ln/>
         </p:spPr>
         <p:txBody>
-          <a:bodyPr wrap="square" lIns="0" tIns="0" rIns="0" bIns="0" rtlCol="0" anchor="ctr"/>
+          <a:bodyPr wrap="square" lIns="0" tIns="0" rIns="0" bIns="0" rtlCol="0" anchor="ctr">
+            <a:normAutofit/>
+          </a:bodyPr>
           <a:lstStyle/>
           <a:p>
             <a:pPr indent="0" marL="0">
@@ -13863,7 +13977,7 @@
         </p:nvSpPr>
         <p:spPr>
           <a:xfrm>
-            <a:off x="6169000" y="1417320"/>
+            <a:off x="6233008" y="1417320"/>
             <a:ext cx="5391760" cy="4389120"/>
           </a:xfrm>
           <a:prstGeom prst="roundRect">
@@ -13890,7 +14004,7 @@
         </p:nvSpPr>
         <p:spPr>
           <a:xfrm>
-            <a:off x="6397600" y="1618488"/>
+            <a:off x="6461608" y="1618488"/>
             <a:ext cx="4934560" cy="320040"/>
           </a:xfrm>
           <a:prstGeom prst="rect">
@@ -13936,7 +14050,7 @@
           </p:nvPr>
         </p:nvGraphicFramePr>
         <p:xfrm>
-          <a:off x="6397600" y="2057400"/>
+          <a:off x="6461608" y="2057400"/>
           <a:ext cx="4934560" cy="914400"/>
         </p:xfrm>
         <a:graphic>
@@ -15443,7 +15557,7 @@
         </p:nvSpPr>
         <p:spPr>
           <a:xfrm>
-            <a:off x="6397600" y="4069080"/>
+            <a:off x="6461608" y="4069080"/>
             <a:ext cx="4934560" cy="1463040"/>
           </a:xfrm>
           <a:prstGeom prst="roundRect">
@@ -15465,7 +15579,7 @@
         </p:nvSpPr>
         <p:spPr>
           <a:xfrm>
-            <a:off x="6397600" y="4123944"/>
+            <a:off x="6461608" y="4123944"/>
             <a:ext cx="36576" cy="1353312"/>
           </a:xfrm>
           <a:prstGeom prst="rect">
@@ -15485,7 +15599,7 @@
         </p:nvSpPr>
         <p:spPr>
           <a:xfrm>
-            <a:off x="6543904" y="4160520"/>
+            <a:off x="6607912" y="4160520"/>
             <a:ext cx="4678528" cy="201168"/>
           </a:xfrm>
           <a:prstGeom prst="rect">
@@ -15524,7 +15638,7 @@
         </p:nvSpPr>
         <p:spPr>
           <a:xfrm>
-            <a:off x="6543904" y="4361688"/>
+            <a:off x="6607912" y="4361688"/>
             <a:ext cx="4678528" cy="1133856"/>
           </a:xfrm>
           <a:prstGeom prst="rect">
@@ -15566,7 +15680,7 @@
         </p:nvSpPr>
         <p:spPr>
           <a:xfrm>
-            <a:off x="502920" y="6382512"/>
+            <a:off x="566928" y="6382512"/>
             <a:ext cx="7315200" cy="219456"/>
           </a:xfrm>
           <a:prstGeom prst="rect">
@@ -15605,7 +15719,7 @@
         </p:nvSpPr>
         <p:spPr>
           <a:xfrm>
-            <a:off x="10774375" y="6382512"/>
+            <a:off x="10710367" y="6382512"/>
             <a:ext cx="914400" cy="219456"/>
           </a:xfrm>
           <a:prstGeom prst="rect">

--- a/docs/test/stress/e2e-outputs/income_basic_pr01.pptx
+++ b/docs/test/stress/e2e-outputs/income_basic_pr01.pptx
@@ -2285,10 +2285,15 @@
           <a:ln/>
         </p:spPr>
         <p:txBody>
-          <a:bodyPr wrap="square" lIns="0" tIns="0" rIns="0" bIns="0" rtlCol="0" anchor="ctr"/>
+          <a:bodyPr wrap="square" lIns="0" tIns="0" rIns="0" bIns="0" rtlCol="0" anchor="ctr">
+            <a:normAutofit/>
+          </a:bodyPr>
           <a:lstStyle/>
           <a:p>
             <a:pPr algn="l" indent="0" marL="0">
+              <a:lnSpc>
+                <a:spcPct val="100000"/>
+              </a:lnSpc>
               <a:buNone/>
             </a:pPr>
             <a:r>
@@ -7592,7 +7597,7 @@
               <a:buNone/>
             </a:pPr>
             <a:r>
-              <a:rPr lang="en-US" sz="850" dirty="0">
+              <a:rPr lang="en-US" sz="950" dirty="0">
                 <a:solidFill>
                   <a:srgbClr val="718096"/>
                 </a:solidFill>
@@ -7600,9 +7605,9 @@
                 <a:ea typeface="Pretendard" pitchFamily="34" charset="-122"/>
                 <a:cs typeface="Pretendard" pitchFamily="34" charset="-120"/>
               </a:rPr>
-              <a:t>연 수익률(Cap Rate)</a:t>
-            </a:r>
-            <a:endParaRPr lang="en-US" sz="850" dirty="0"/>
+              <a:t>연 수익률</a:t>
+            </a:r>
+            <a:endParaRPr lang="en-US" sz="950" dirty="0"/>
           </a:p>
         </p:txBody>
       </p:sp>
@@ -7704,7 +7709,7 @@
               <a:buNone/>
             </a:pPr>
             <a:r>
-              <a:rPr lang="en-US" sz="950" dirty="0">
+              <a:rPr lang="en-US" sz="850" dirty="0">
                 <a:solidFill>
                   <a:srgbClr val="718096"/>
                 </a:solidFill>
@@ -7712,9 +7717,9 @@
                 <a:ea typeface="Pretendard" pitchFamily="34" charset="-122"/>
                 <a:cs typeface="Pretendard" pitchFamily="34" charset="-120"/>
               </a:rPr>
-              <a:t>실투자금</a:t>
-            </a:r>
-            <a:endParaRPr lang="en-US" sz="950" dirty="0"/>
+              <a:t>실투자금 (취득비용 포함)</a:t>
+            </a:r>
+            <a:endParaRPr lang="en-US" sz="850" dirty="0"/>
           </a:p>
         </p:txBody>
       </p:sp>
@@ -7864,11 +7869,11 @@
                 <a:solidFill>
                   <a:srgbClr val="10161F"/>
                 </a:solidFill>
-                <a:latin typeface="Pretendard" pitchFamily="34" charset="0"/>
-                <a:ea typeface="Pretendard" pitchFamily="34" charset="-122"/>
-                <a:cs typeface="Pretendard" pitchFamily="34" charset="-120"/>
-              </a:rPr>
-              <a:t>확인 중</a:t>
+                <a:latin typeface="Arial" pitchFamily="34" charset="0"/>
+                <a:ea typeface="Arial" pitchFamily="34" charset="-122"/>
+                <a:cs typeface="Arial" pitchFamily="34" charset="-120"/>
+              </a:rPr>
+              <a:t>-</a:t>
             </a:r>
             <a:endParaRPr lang="en-US" sz="2200" dirty="0"/>
           </a:p>
@@ -8024,7 +8029,9 @@
           <a:ln/>
         </p:spPr>
         <p:txBody>
-          <a:bodyPr wrap="square" lIns="0" tIns="0" rIns="0" bIns="0" rtlCol="0" anchor="ctr"/>
+          <a:bodyPr wrap="square" lIns="0" tIns="0" rIns="0" bIns="0" rtlCol="0" anchor="ctr">
+            <a:normAutofit/>
+          </a:bodyPr>
           <a:lstStyle/>
           <a:p>
             <a:pPr indent="0" marL="0">
@@ -8156,7 +8163,9 @@
           <a:ln/>
         </p:spPr>
         <p:txBody>
-          <a:bodyPr wrap="square" lIns="0" tIns="0" rIns="0" bIns="0" rtlCol="0" anchor="ctr"/>
+          <a:bodyPr wrap="square" lIns="0" tIns="0" rIns="0" bIns="0" rtlCol="0" anchor="ctr">
+            <a:normAutofit/>
+          </a:bodyPr>
           <a:lstStyle/>
           <a:p>
             <a:pPr indent="0" marL="0">
@@ -8171,7 +8180,7 @@
                 <a:ea typeface="Pretendard" pitchFamily="34" charset="-122"/>
                 <a:cs typeface="Pretendard" pitchFamily="34" charset="-120"/>
               </a:rPr>
-              <a:t>자산 규모: 해당 권역 소재 단독 빌딩 매입 기회</a:t>
+              <a:t>안정적 현금흐름: 전 층 임차인 운영 기반의 안정적 월 임대수익 창출</a:t>
             </a:r>
             <a:endParaRPr lang="en-US" sz="1150" dirty="0"/>
           </a:p>
@@ -8288,7 +8297,9 @@
           <a:ln/>
         </p:spPr>
         <p:txBody>
-          <a:bodyPr wrap="square" lIns="0" tIns="0" rIns="0" bIns="0" rtlCol="0" anchor="ctr"/>
+          <a:bodyPr wrap="square" lIns="0" tIns="0" rIns="0" bIns="0" rtlCol="0" anchor="ctr">
+            <a:normAutofit/>
+          </a:bodyPr>
           <a:lstStyle/>
           <a:p>
             <a:pPr indent="0" marL="0">
@@ -8303,7 +8314,7 @@
                 <a:ea typeface="Pretendard" pitchFamily="34" charset="-122"/>
                 <a:cs typeface="Pretendard" pitchFamily="34" charset="-120"/>
               </a:rPr>
-              <a:t>수익 안정성: 안정적 임대수익 기반 투자 매물</a:t>
+              <a:t>자산 규모: 해당 권역 소재 단독 빌딩 매입 기회</a:t>
             </a:r>
             <a:endParaRPr lang="en-US" sz="1150" dirty="0"/>
           </a:p>
@@ -8584,7 +8595,183 @@
       </p:pic>
       <p:sp>
         <p:nvSpPr>
-          <p:cNvPr id="7" name="Text 4"/>
+          <p:cNvPr id="7" name="Shape 4"/>
+          <p:cNvSpPr/>
+          <p:nvPr/>
+        </p:nvSpPr>
+        <p:spPr>
+          <a:xfrm>
+            <a:off x="704088" y="5184648"/>
+            <a:ext cx="3200400" cy="320040"/>
+          </a:xfrm>
+          <a:prstGeom prst="roundRect">
+            <a:avLst>
+              <a:gd name="adj" fmla="val 11429"/>
+            </a:avLst>
+          </a:prstGeom>
+          <a:solidFill>
+            <a:srgbClr val="FFFFFF">
+              <a:alpha val="90000"/>
+            </a:srgbClr>
+          </a:solidFill>
+          <a:ln w="10160">
+            <a:solidFill>
+              <a:srgbClr val="CBD5E1"/>
+            </a:solidFill>
+            <a:prstDash val="solid"/>
+          </a:ln>
+        </p:spPr>
+      </p:sp>
+      <p:sp>
+        <p:nvSpPr>
+          <p:cNvPr id="8" name="Text 5"/>
+          <p:cNvSpPr/>
+          <p:nvPr/>
+        </p:nvSpPr>
+        <p:spPr>
+          <a:xfrm>
+            <a:off x="749808" y="5202936"/>
+            <a:ext cx="3108960" cy="274320"/>
+          </a:xfrm>
+          <a:prstGeom prst="rect">
+            <a:avLst/>
+          </a:prstGeom>
+          <a:noFill/>
+          <a:ln/>
+        </p:spPr>
+        <p:txBody>
+          <a:bodyPr wrap="square" rtlCol="0" anchor="ctr"/>
+          <a:lstStyle/>
+          <a:p>
+            <a:pPr indent="0" marL="0">
+              <a:buNone/>
+            </a:pPr>
+            <a:r>
+              <a:rPr lang="en-US" sz="900" b="1" dirty="0">
+                <a:solidFill>
+                  <a:srgbClr val="B8860B"/>
+                </a:solidFill>
+                <a:latin typeface="Pretendard" pitchFamily="34" charset="0"/>
+                <a:ea typeface="Pretendard" pitchFamily="34" charset="-122"/>
+                <a:cs typeface="Pretendard" pitchFamily="34" charset="-120"/>
+              </a:rPr>
+              <a:t>★ </a:t>
+            </a:r>
+            <a:pPr indent="0" marL="0">
+              <a:buNone/>
+            </a:pPr>
+            <a:r>
+              <a:rPr lang="en-US" sz="850" b="1" dirty="0">
+                <a:solidFill>
+                  <a:srgbClr val="1E293B"/>
+                </a:solidFill>
+                <a:latin typeface="Pretendard" pitchFamily="34" charset="0"/>
+                <a:ea typeface="Pretendard" pitchFamily="34" charset="-122"/>
+                <a:cs typeface="Pretendard" pitchFamily="34" charset="-120"/>
+              </a:rPr>
+              <a:t>대상 자산(본건)   </a:t>
+            </a:r>
+            <a:pPr indent="0" marL="0">
+              <a:buNone/>
+            </a:pPr>
+            <a:r>
+              <a:rPr lang="en-US" sz="1000" b="1" dirty="0">
+                <a:solidFill>
+                  <a:srgbClr val="B8860B"/>
+                </a:solidFill>
+                <a:latin typeface="Pretendard" pitchFamily="34" charset="0"/>
+                <a:ea typeface="Pretendard" pitchFamily="34" charset="-122"/>
+                <a:cs typeface="Pretendard" pitchFamily="34" charset="-120"/>
+              </a:rPr>
+              <a:t>╌ </a:t>
+            </a:r>
+            <a:pPr indent="0" marL="0">
+              <a:buNone/>
+            </a:pPr>
+            <a:r>
+              <a:rPr lang="en-US" sz="850" dirty="0">
+                <a:solidFill>
+                  <a:srgbClr val="475569"/>
+                </a:solidFill>
+                <a:latin typeface="Pretendard" pitchFamily="34" charset="0"/>
+                <a:ea typeface="Pretendard" pitchFamily="34" charset="-122"/>
+                <a:cs typeface="Pretendard" pitchFamily="34" charset="-120"/>
+              </a:rPr>
+              <a:t>도보 5분 반경 (약 400m)</a:t>
+            </a:r>
+            <a:endParaRPr lang="en-US" sz="900" dirty="0"/>
+          </a:p>
+        </p:txBody>
+      </p:sp>
+      <p:sp>
+        <p:nvSpPr>
+          <p:cNvPr id="9" name="Shape 6"/>
+          <p:cNvSpPr/>
+          <p:nvPr/>
+        </p:nvSpPr>
+        <p:spPr>
+          <a:xfrm>
+            <a:off x="2715768" y="3739896"/>
+            <a:ext cx="822960" cy="219456"/>
+          </a:xfrm>
+          <a:prstGeom prst="roundRect">
+            <a:avLst>
+              <a:gd name="adj" fmla="val 16667"/>
+            </a:avLst>
+          </a:prstGeom>
+          <a:solidFill>
+            <a:srgbClr val="132A3A"/>
+          </a:solidFill>
+          <a:ln w="12700">
+            <a:solidFill>
+              <a:srgbClr val="FFFFFF"/>
+            </a:solidFill>
+            <a:prstDash val="solid"/>
+          </a:ln>
+        </p:spPr>
+      </p:sp>
+      <p:sp>
+        <p:nvSpPr>
+          <p:cNvPr id="10" name="Text 7"/>
+          <p:cNvSpPr/>
+          <p:nvPr/>
+        </p:nvSpPr>
+        <p:spPr>
+          <a:xfrm>
+            <a:off x="2715768" y="3739896"/>
+            <a:ext cx="822960" cy="219456"/>
+          </a:xfrm>
+          <a:prstGeom prst="rect">
+            <a:avLst/>
+          </a:prstGeom>
+          <a:noFill/>
+          <a:ln/>
+        </p:spPr>
+        <p:txBody>
+          <a:bodyPr wrap="square" rtlCol="0" anchor="ctr"/>
+          <a:lstStyle/>
+          <a:p>
+            <a:pPr algn="ctr" indent="0" marL="0">
+              <a:buNone/>
+            </a:pPr>
+            <a:r>
+              <a:rPr lang="en-US" sz="900" b="1" dirty="0">
+                <a:solidFill>
+                  <a:srgbClr val="FFFFFF"/>
+                </a:solidFill>
+                <a:latin typeface="Pretendard" pitchFamily="34" charset="0"/>
+                <a:ea typeface="Pretendard" pitchFamily="34" charset="-122"/>
+                <a:cs typeface="Pretendard" pitchFamily="34" charset="-120"/>
+              </a:rPr>
+              <a:t>★ 본건</a:t>
+            </a:r>
+            <a:endParaRPr lang="en-US" sz="900" dirty="0"/>
+          </a:p>
+        </p:txBody>
+      </p:sp>
+      <p:sp>
+        <p:nvSpPr>
+          <p:cNvPr id="11" name="Text 8"/>
           <p:cNvSpPr/>
           <p:nvPr/>
         </p:nvSpPr>
@@ -8628,7 +8815,7 @@
       </p:sp>
       <p:sp>
         <p:nvSpPr>
-          <p:cNvPr id="8" name="Text 5"/>
+          <p:cNvPr id="12" name="Text 9"/>
           <p:cNvSpPr/>
           <p:nvPr/>
         </p:nvSpPr>
@@ -8672,7 +8859,7 @@
       </p:sp>
       <p:sp>
         <p:nvSpPr>
-          <p:cNvPr id="9" name="Shape 6"/>
+          <p:cNvPr id="13" name="Shape 10"/>
           <p:cNvSpPr/>
           <p:nvPr/>
         </p:nvSpPr>
@@ -8695,7 +8882,7 @@
       </p:sp>
       <p:sp>
         <p:nvSpPr>
-          <p:cNvPr id="10" name="Text 7"/>
+          <p:cNvPr id="14" name="Text 11"/>
           <p:cNvSpPr/>
           <p:nvPr/>
         </p:nvSpPr>
@@ -8739,7 +8926,7 @@
       </p:sp>
       <p:sp>
         <p:nvSpPr>
-          <p:cNvPr id="11" name="Text 8"/>
+          <p:cNvPr id="15" name="Text 12"/>
           <p:cNvSpPr/>
           <p:nvPr/>
         </p:nvSpPr>
@@ -8783,7 +8970,7 @@
       </p:sp>
       <p:sp>
         <p:nvSpPr>
-          <p:cNvPr id="12" name="Shape 9"/>
+          <p:cNvPr id="16" name="Shape 13"/>
           <p:cNvSpPr/>
           <p:nvPr/>
         </p:nvSpPr>
@@ -8805,7 +8992,7 @@
       </p:sp>
       <p:sp>
         <p:nvSpPr>
-          <p:cNvPr id="13" name="Shape 10"/>
+          <p:cNvPr id="17" name="Shape 14"/>
           <p:cNvSpPr/>
           <p:nvPr/>
         </p:nvSpPr>
@@ -8825,7 +9012,7 @@
       </p:sp>
       <p:sp>
         <p:nvSpPr>
-          <p:cNvPr id="14" name="Text 11"/>
+          <p:cNvPr id="18" name="Text 15"/>
           <p:cNvSpPr/>
           <p:nvPr/>
         </p:nvSpPr>
@@ -8864,7 +9051,7 @@
       </p:sp>
       <p:sp>
         <p:nvSpPr>
-          <p:cNvPr id="15" name="Text 12"/>
+          <p:cNvPr id="19" name="Text 16"/>
           <p:cNvSpPr/>
           <p:nvPr/>
         </p:nvSpPr>
@@ -8907,7 +9094,7 @@
       </p:sp>
       <p:sp>
         <p:nvSpPr>
-          <p:cNvPr id="16" name="Text 13"/>
+          <p:cNvPr id="20" name="Text 17"/>
           <p:cNvSpPr/>
           <p:nvPr/>
         </p:nvSpPr>
@@ -8946,7 +9133,7 @@
       </p:sp>
       <p:sp>
         <p:nvSpPr>
-          <p:cNvPr id="17" name="Text 14"/>
+          <p:cNvPr id="21" name="Text 18"/>
           <p:cNvSpPr/>
           <p:nvPr/>
         </p:nvSpPr>
